--- a/bottleneck_presentation.pptx
+++ b/bottleneck_presentation.pptx
@@ -14,9 +14,11 @@
     <p:sldId id="262" r:id="rId8"/>
     <p:sldId id="263" r:id="rId9"/>
     <p:sldId id="264" r:id="rId10"/>
+    <p:sldId id="265" r:id="rId11"/>
+    <p:sldId id="266" r:id="rId12"/>
   </p:sldIdLst>
   <p:notesMasterIdLst>
-    <p:notesMasterId r:id="rId11"/>
+    <p:notesMasterId r:id="rId13"/>
   </p:notesMasterIdLst>
   <p:sldSz cx="12192000" cy="6858000"/>
   <p:notesSz cx="6858000" cy="12192000"/>
@@ -534,6 +536,182 @@
             <a:fld id="{F7021451-1387-4CA6-816F-3879F97B5CBC}" type="slidenum">
               <a:rPr lang="en-US"/>
               <a:t>1</a:t>
+            </a:fld>
+            <a:endParaRPr lang="en-US"/>
+          </a:p>
+        </p:txBody>
+      </p:sp>
+    </p:spTree>
+    <p:extLst>
+      <p:ext uri="{BB962C8B-B14F-4D97-AF65-F5344CB8AC3E}">
+        <p14:creationId xmlns:p14="http://schemas.microsoft.com/office/powerpoint/2010/main" val="1024086991"/>
+      </p:ext>
+    </p:extLst>
+  </p:cSld>
+  <p:clrMapOvr>
+    <a:masterClrMapping/>
+  </p:clrMapOvr>
+</p:notes>
+</file>
+
+<file path=ppt/notesSlides/notesSlide10.xml><?xml version="1.0" encoding="utf-8"?>
+<p:notes xmlns:a="http://schemas.openxmlformats.org/drawingml/2006/main" xmlns:r="http://schemas.openxmlformats.org/officeDocument/2006/relationships" xmlns:p="http://schemas.openxmlformats.org/presentationml/2006/main">
+  <p:cSld>
+    <p:spTree>
+      <p:nvGrpSpPr>
+        <p:cNvPr id="1" name=""/>
+        <p:cNvGrpSpPr/>
+        <p:nvPr/>
+      </p:nvGrpSpPr>
+      <p:grpSpPr>
+        <a:xfrm>
+          <a:off x="0" y="0"/>
+          <a:ext cx="0" cy="0"/>
+          <a:chOff x="0" y="0"/>
+          <a:chExt cx="0" cy="0"/>
+        </a:xfrm>
+      </p:grpSpPr>
+      <p:sp>
+        <p:nvSpPr>
+          <p:cNvPr id="2" name="Slide Image Placeholder 1"/>
+          <p:cNvSpPr>
+            <a:spLocks noGrp="1" noRot="1" noChangeAspect="1"/>
+          </p:cNvSpPr>
+          <p:nvPr>
+            <p:ph type="sldImg"/>
+          </p:nvPr>
+        </p:nvSpPr>
+        <p:spPr/>
+      </p:sp>
+      <p:sp>
+        <p:nvSpPr>
+          <p:cNvPr id="3" name="Notes Placeholder 2"/>
+          <p:cNvSpPr>
+            <a:spLocks noGrp="1"/>
+          </p:cNvSpPr>
+          <p:nvPr>
+            <p:ph type="body" idx="1"/>
+          </p:nvPr>
+        </p:nvSpPr>
+        <p:spPr/>
+        <p:txBody>
+          <a:bodyPr/>
+          <a:lstStyle/>
+          <a:p>
+            <a:r>
+              <a:rPr lang="en-US" dirty="0"/>
+              <a:t/>
+            </a:r>
+            <a:endParaRPr lang="en-US" dirty="0"/>
+          </a:p>
+        </p:txBody>
+      </p:sp>
+      <p:sp>
+        <p:nvSpPr>
+          <p:cNvPr id="4" name="Slide Number Placeholder 3"/>
+          <p:cNvSpPr>
+            <a:spLocks noGrp="1"/>
+          </p:cNvSpPr>
+          <p:nvPr>
+            <p:ph type="sldNum" sz="quarter" idx="10"/>
+          </p:nvPr>
+        </p:nvSpPr>
+        <p:spPr/>
+        <p:txBody>
+          <a:bodyPr/>
+          <a:lstStyle/>
+          <a:p>
+            <a:fld id="{F7021451-1387-4CA6-816F-3879F97B5CBC}" type="slidenum">
+              <a:rPr lang="en-US"/>
+              <a:t>10</a:t>
+            </a:fld>
+            <a:endParaRPr lang="en-US"/>
+          </a:p>
+        </p:txBody>
+      </p:sp>
+    </p:spTree>
+    <p:extLst>
+      <p:ext uri="{BB962C8B-B14F-4D97-AF65-F5344CB8AC3E}">
+        <p14:creationId xmlns:p14="http://schemas.microsoft.com/office/powerpoint/2010/main" val="1024086991"/>
+      </p:ext>
+    </p:extLst>
+  </p:cSld>
+  <p:clrMapOvr>
+    <a:masterClrMapping/>
+  </p:clrMapOvr>
+</p:notes>
+</file>
+
+<file path=ppt/notesSlides/notesSlide11.xml><?xml version="1.0" encoding="utf-8"?>
+<p:notes xmlns:a="http://schemas.openxmlformats.org/drawingml/2006/main" xmlns:r="http://schemas.openxmlformats.org/officeDocument/2006/relationships" xmlns:p="http://schemas.openxmlformats.org/presentationml/2006/main">
+  <p:cSld>
+    <p:spTree>
+      <p:nvGrpSpPr>
+        <p:cNvPr id="1" name=""/>
+        <p:cNvGrpSpPr/>
+        <p:nvPr/>
+      </p:nvGrpSpPr>
+      <p:grpSpPr>
+        <a:xfrm>
+          <a:off x="0" y="0"/>
+          <a:ext cx="0" cy="0"/>
+          <a:chOff x="0" y="0"/>
+          <a:chExt cx="0" cy="0"/>
+        </a:xfrm>
+      </p:grpSpPr>
+      <p:sp>
+        <p:nvSpPr>
+          <p:cNvPr id="2" name="Slide Image Placeholder 1"/>
+          <p:cNvSpPr>
+            <a:spLocks noGrp="1" noRot="1" noChangeAspect="1"/>
+          </p:cNvSpPr>
+          <p:nvPr>
+            <p:ph type="sldImg"/>
+          </p:nvPr>
+        </p:nvSpPr>
+        <p:spPr/>
+      </p:sp>
+      <p:sp>
+        <p:nvSpPr>
+          <p:cNvPr id="3" name="Notes Placeholder 2"/>
+          <p:cNvSpPr>
+            <a:spLocks noGrp="1"/>
+          </p:cNvSpPr>
+          <p:nvPr>
+            <p:ph type="body" idx="1"/>
+          </p:nvPr>
+        </p:nvSpPr>
+        <p:spPr/>
+        <p:txBody>
+          <a:bodyPr/>
+          <a:lstStyle/>
+          <a:p>
+            <a:r>
+              <a:rPr lang="en-US" dirty="0"/>
+              <a:t/>
+            </a:r>
+            <a:endParaRPr lang="en-US" dirty="0"/>
+          </a:p>
+        </p:txBody>
+      </p:sp>
+      <p:sp>
+        <p:nvSpPr>
+          <p:cNvPr id="4" name="Slide Number Placeholder 3"/>
+          <p:cNvSpPr>
+            <a:spLocks noGrp="1"/>
+          </p:cNvSpPr>
+          <p:nvPr>
+            <p:ph type="sldNum" sz="quarter" idx="10"/>
+          </p:nvPr>
+        </p:nvSpPr>
+        <p:spPr/>
+        <p:txBody>
+          <a:bodyPr/>
+          <a:lstStyle/>
+          <a:p>
+            <a:fld id="{F7021451-1387-4CA6-816F-3879F97B5CBC}" type="slidenum">
+              <a:rPr lang="en-US"/>
+              <a:t>11</a:t>
             </a:fld>
             <a:endParaRPr lang="en-US"/>
           </a:p>
@@ -1569,7 +1747,7 @@
     <p:bg>
       <p:bgPr>
         <a:solidFill>
-          <a:srgbClr val="1F1B18"/>
+          <a:srgbClr val="4A3363"/>
         </a:solidFill>
       </p:bgPr>
     </p:bg>
@@ -1602,7 +1780,7 @@
             <a:avLst/>
           </a:prstGeom>
           <a:solidFill>
-            <a:srgbClr val="1F1B18"/>
+            <a:srgbClr val="4A3363"/>
           </a:solidFill>
           <a:ln/>
         </p:spPr>
@@ -1634,7 +1812,7 @@
             <a:r>
               <a:rPr lang="en-US" sz="4400" b="1" dirty="0">
                 <a:solidFill>
-                  <a:srgbClr val="B8862B"/>
+                  <a:srgbClr val="A8D4E5"/>
                 </a:solidFill>
                 <a:latin typeface="Georgia" pitchFamily="34" charset="0"/>
                 <a:ea typeface="Georgia" pitchFamily="34" charset="-122"/>
@@ -1712,13 +1890,13 @@
             <a:r>
               <a:rPr lang="en-US" sz="1300" dirty="0">
                 <a:solidFill>
-                  <a:srgbClr val="C9C4BE"/>
+                  <a:srgbClr val="D4C5E8"/>
                 </a:solidFill>
                 <a:latin typeface="Arial" pitchFamily="34" charset="0"/>
                 <a:ea typeface="Arial" pitchFamily="34" charset="-122"/>
                 <a:cs typeface="Arial" pitchFamily="34" charset="-120"/>
               </a:rPr>
-              <a:t>Mise en œuvre d'un pipeline Kestra — nettoyage, jointure, chiffre d'affaires, détection des vins premium</a:t>
+              <a:t>Pipeline Kestra complet : nettoyage, jointure, chiffre d'affaires, détection des vins premium, planification automatique</a:t>
             </a:r>
             <a:endParaRPr lang="en-US" sz="1300" dirty="0"/>
           </a:p>
@@ -1751,12 +1929,653 @@
             <a:r>
               <a:rPr lang="en-US" sz="1400" b="1" dirty="0">
                 <a:solidFill>
-                  <a:srgbClr val="B8862B"/>
+                  <a:srgbClr val="A8D4E5"/>
                 </a:solidFill>
               </a:rPr>
               <a:t>Dorra  —  Data Engineer</a:t>
             </a:r>
             <a:endParaRPr lang="en-US" sz="1400" dirty="0"/>
+          </a:p>
+        </p:txBody>
+      </p:sp>
+    </p:spTree>
+  </p:cSld>
+  <p:clrMapOvr>
+    <a:masterClrMapping/>
+  </p:clrMapOvr>
+</p:sld>
+</file>
+
+<file path=ppt/slides/slide10.xml><?xml version="1.0" encoding="utf-8"?>
+<p:sld xmlns:a="http://schemas.openxmlformats.org/drawingml/2006/main" xmlns:r="http://schemas.openxmlformats.org/officeDocument/2006/relationships" xmlns:p="http://schemas.openxmlformats.org/presentationml/2006/main">
+  <p:cSld name="Slide 10">
+    <p:bg>
+      <p:bgPr>
+        <a:solidFill>
+          <a:srgbClr val="FFFFFF"/>
+        </a:solidFill>
+      </p:bgPr>
+    </p:bg>
+    <p:spTree>
+      <p:nvGrpSpPr>
+        <p:cNvPr id="1" name=""/>
+        <p:cNvGrpSpPr/>
+        <p:nvPr/>
+      </p:nvGrpSpPr>
+      <p:grpSpPr>
+        <a:xfrm>
+          <a:off x="0" y="0"/>
+          <a:ext cx="0" cy="0"/>
+          <a:chOff x="0" y="0"/>
+          <a:chExt cx="0" cy="0"/>
+        </a:xfrm>
+      </p:grpSpPr>
+      <p:sp>
+        <p:nvSpPr>
+          <p:cNvPr id="2" name="Text 0"/>
+          <p:cNvSpPr/>
+          <p:nvPr/>
+        </p:nvSpPr>
+        <p:spPr>
+          <a:xfrm>
+            <a:off x="640080" y="457200"/>
+            <a:ext cx="10881360" cy="640080"/>
+          </a:xfrm>
+          <a:prstGeom prst="rect">
+            <a:avLst/>
+          </a:prstGeom>
+          <a:noFill/>
+          <a:ln/>
+        </p:spPr>
+        <p:txBody>
+          <a:bodyPr wrap="square" rtlCol="0" anchor="ctr"/>
+          <a:lstStyle/>
+          <a:p>
+            <a:pPr indent="0" marL="0">
+              <a:buNone/>
+            </a:pPr>
+            <a:r>
+              <a:rPr lang="en-US" sz="3000" b="1" dirty="0">
+                <a:solidFill>
+                  <a:srgbClr val="4A3363"/>
+                </a:solidFill>
+                <a:latin typeface="Georgia" pitchFamily="34" charset="0"/>
+                <a:ea typeface="Georgia" pitchFamily="34" charset="-122"/>
+                <a:cs typeface="Georgia" pitchFamily="34" charset="-120"/>
+              </a:rPr>
+              <a:t>Défis techniques rencontrés</a:t>
+            </a:r>
+            <a:endParaRPr lang="en-US" sz="3000" dirty="0"/>
+          </a:p>
+        </p:txBody>
+      </p:sp>
+      <p:sp>
+        <p:nvSpPr>
+          <p:cNvPr id="3" name="Shape 1"/>
+          <p:cNvSpPr/>
+          <p:nvPr/>
+        </p:nvSpPr>
+        <p:spPr>
+          <a:xfrm>
+            <a:off x="640080" y="1371600"/>
+            <a:ext cx="5257800" cy="2103120"/>
+          </a:xfrm>
+          <a:prstGeom prst="rect">
+            <a:avLst/>
+          </a:prstGeom>
+          <a:solidFill>
+            <a:srgbClr val="F0E2CC"/>
+          </a:solidFill>
+          <a:ln/>
+        </p:spPr>
+      </p:sp>
+      <p:sp>
+        <p:nvSpPr>
+          <p:cNvPr id="4" name="Text 2"/>
+          <p:cNvSpPr/>
+          <p:nvPr/>
+        </p:nvSpPr>
+        <p:spPr>
+          <a:xfrm>
+            <a:off x="914400" y="1554480"/>
+            <a:ext cx="4709160" cy="457200"/>
+          </a:xfrm>
+          <a:prstGeom prst="rect">
+            <a:avLst/>
+          </a:prstGeom>
+          <a:noFill/>
+          <a:ln/>
+        </p:spPr>
+        <p:txBody>
+          <a:bodyPr wrap="square" rtlCol="0" anchor="ctr"/>
+          <a:lstStyle/>
+          <a:p>
+            <a:pPr indent="0" marL="0">
+              <a:buNone/>
+            </a:pPr>
+            <a:r>
+              <a:rPr lang="en-US" sz="1500" b="1" dirty="0">
+                <a:solidFill>
+                  <a:srgbClr val="8862A8"/>
+                </a:solidFill>
+              </a:rPr>
+              <a:t>Données hétérogènes</a:t>
+            </a:r>
+            <a:endParaRPr lang="en-US" sz="1500" dirty="0"/>
+          </a:p>
+        </p:txBody>
+      </p:sp>
+      <p:sp>
+        <p:nvSpPr>
+          <p:cNvPr id="5" name="Text 3"/>
+          <p:cNvSpPr/>
+          <p:nvPr/>
+        </p:nvSpPr>
+        <p:spPr>
+          <a:xfrm>
+            <a:off x="914400" y="2029968"/>
+            <a:ext cx="4709160" cy="1325880"/>
+          </a:xfrm>
+          <a:prstGeom prst="rect">
+            <a:avLst/>
+          </a:prstGeom>
+          <a:noFill/>
+          <a:ln/>
+        </p:spPr>
+        <p:txBody>
+          <a:bodyPr wrap="square" rtlCol="0" anchor="ctr"/>
+          <a:lstStyle/>
+          <a:p>
+            <a:pPr indent="0" marL="0">
+              <a:buNone/>
+            </a:pPr>
+            <a:r>
+              <a:rPr lang="en-US" sz="1050" dirty="0">
+                <a:solidFill>
+                  <a:srgbClr val="4A3363"/>
+                </a:solidFill>
+              </a:rPr>
+              <a:t>Un produit « bon cadeau » avait un identifiant texte, pas numérique — corrigé en forçant la lecture en texte puis reconversion ciblée (TRY_CAST)</a:t>
+            </a:r>
+            <a:endParaRPr lang="en-US" sz="1050" dirty="0"/>
+          </a:p>
+        </p:txBody>
+      </p:sp>
+      <p:sp>
+        <p:nvSpPr>
+          <p:cNvPr id="6" name="Shape 4"/>
+          <p:cNvSpPr/>
+          <p:nvPr/>
+        </p:nvSpPr>
+        <p:spPr>
+          <a:xfrm>
+            <a:off x="6172200" y="1371600"/>
+            <a:ext cx="5257800" cy="2103120"/>
+          </a:xfrm>
+          <a:prstGeom prst="rect">
+            <a:avLst/>
+          </a:prstGeom>
+          <a:solidFill>
+            <a:srgbClr val="F0E2CC"/>
+          </a:solidFill>
+          <a:ln/>
+        </p:spPr>
+      </p:sp>
+      <p:sp>
+        <p:nvSpPr>
+          <p:cNvPr id="7" name="Text 5"/>
+          <p:cNvSpPr/>
+          <p:nvPr/>
+        </p:nvSpPr>
+        <p:spPr>
+          <a:xfrm>
+            <a:off x="6446520" y="1554480"/>
+            <a:ext cx="4709160" cy="457200"/>
+          </a:xfrm>
+          <a:prstGeom prst="rect">
+            <a:avLst/>
+          </a:prstGeom>
+          <a:noFill/>
+          <a:ln/>
+        </p:spPr>
+        <p:txBody>
+          <a:bodyPr wrap="square" rtlCol="0" anchor="ctr"/>
+          <a:lstStyle/>
+          <a:p>
+            <a:pPr indent="0" marL="0">
+              <a:buNone/>
+            </a:pPr>
+            <a:r>
+              <a:rPr lang="en-US" sz="1500" b="1" dirty="0">
+                <a:solidFill>
+                  <a:srgbClr val="8862A8"/>
+                </a:solidFill>
+              </a:rPr>
+              <a:t>Dédoublonnage ambigu</a:t>
+            </a:r>
+            <a:endParaRPr lang="en-US" sz="1500" dirty="0"/>
+          </a:p>
+        </p:txBody>
+      </p:sp>
+      <p:sp>
+        <p:nvSpPr>
+          <p:cNvPr id="8" name="Text 6"/>
+          <p:cNvSpPr/>
+          <p:nvPr/>
+        </p:nvSpPr>
+        <p:spPr>
+          <a:xfrm>
+            <a:off x="6446520" y="2029968"/>
+            <a:ext cx="4709160" cy="1325880"/>
+          </a:xfrm>
+          <a:prstGeom prst="rect">
+            <a:avLst/>
+          </a:prstGeom>
+          <a:noFill/>
+          <a:ln/>
+        </p:spPr>
+        <p:txBody>
+          <a:bodyPr wrap="square" rtlCol="0" anchor="ctr"/>
+          <a:lstStyle/>
+          <a:p>
+            <a:pPr indent="0" marL="0">
+              <a:buNone/>
+            </a:pPr>
+            <a:r>
+              <a:rPr lang="en-US" sz="1050" dirty="0">
+                <a:solidFill>
+                  <a:srgbClr val="4A3363"/>
+                </a:solidFill>
+              </a:rPr>
+              <a:t>Le fichier web contient 2 lignes par produit avec des chiffres de vente parfois différents — résolu en priorisant explicitement la ligne « product »</a:t>
+            </a:r>
+            <a:endParaRPr lang="en-US" sz="1050" dirty="0"/>
+          </a:p>
+        </p:txBody>
+      </p:sp>
+      <p:sp>
+        <p:nvSpPr>
+          <p:cNvPr id="9" name="Shape 7"/>
+          <p:cNvSpPr/>
+          <p:nvPr/>
+        </p:nvSpPr>
+        <p:spPr>
+          <a:xfrm>
+            <a:off x="640080" y="3749040"/>
+            <a:ext cx="5257800" cy="2103120"/>
+          </a:xfrm>
+          <a:prstGeom prst="rect">
+            <a:avLst/>
+          </a:prstGeom>
+          <a:solidFill>
+            <a:srgbClr val="F0E2CC"/>
+          </a:solidFill>
+          <a:ln/>
+        </p:spPr>
+      </p:sp>
+      <p:sp>
+        <p:nvSpPr>
+          <p:cNvPr id="10" name="Text 8"/>
+          <p:cNvSpPr/>
+          <p:nvPr/>
+        </p:nvSpPr>
+        <p:spPr>
+          <a:xfrm>
+            <a:off x="914400" y="3931920"/>
+            <a:ext cx="4709160" cy="457200"/>
+          </a:xfrm>
+          <a:prstGeom prst="rect">
+            <a:avLst/>
+          </a:prstGeom>
+          <a:noFill/>
+          <a:ln/>
+        </p:spPr>
+        <p:txBody>
+          <a:bodyPr wrap="square" rtlCol="0" anchor="ctr"/>
+          <a:lstStyle/>
+          <a:p>
+            <a:pPr indent="0" marL="0">
+              <a:buNone/>
+            </a:pPr>
+            <a:r>
+              <a:rPr lang="en-US" sz="1500" b="1" dirty="0">
+                <a:solidFill>
+                  <a:srgbClr val="8862A8"/>
+                </a:solidFill>
+              </a:rPr>
+              <a:t>Partage de fichiers entre moteurs</a:t>
+            </a:r>
+            <a:endParaRPr lang="en-US" sz="1500" dirty="0"/>
+          </a:p>
+        </p:txBody>
+      </p:sp>
+      <p:sp>
+        <p:nvSpPr>
+          <p:cNvPr id="11" name="Text 9"/>
+          <p:cNvSpPr/>
+          <p:nvPr/>
+        </p:nvSpPr>
+        <p:spPr>
+          <a:xfrm>
+            <a:off x="914400" y="4407408"/>
+            <a:ext cx="4709160" cy="1325880"/>
+          </a:xfrm>
+          <a:prstGeom prst="rect">
+            <a:avLst/>
+          </a:prstGeom>
+          <a:noFill/>
+          <a:ln/>
+        </p:spPr>
+        <p:txBody>
+          <a:bodyPr wrap="square" rtlCol="0" anchor="ctr"/>
+          <a:lstStyle/>
+          <a:p>
+            <a:pPr indent="0" marL="0">
+              <a:buNone/>
+            </a:pPr>
+            <a:r>
+              <a:rPr lang="en-US" sz="1050" dirty="0">
+                <a:solidFill>
+                  <a:srgbClr val="4A3363"/>
+                </a:solidFill>
+              </a:rPr>
+              <a:t>Un script Python isolé ne trouvait jamais le fichier produit par SQL — diagnostiqué (recherche système) : les tâches SQL et le serveur Kestra partagent /app, le Python a son propre dossier. Résolu.</a:t>
+            </a:r>
+            <a:endParaRPr lang="en-US" sz="1050" dirty="0"/>
+          </a:p>
+        </p:txBody>
+      </p:sp>
+      <p:sp>
+        <p:nvSpPr>
+          <p:cNvPr id="12" name="Shape 10"/>
+          <p:cNvSpPr/>
+          <p:nvPr/>
+        </p:nvSpPr>
+        <p:spPr>
+          <a:xfrm>
+            <a:off x="6172200" y="3749040"/>
+            <a:ext cx="5257800" cy="2103120"/>
+          </a:xfrm>
+          <a:prstGeom prst="rect">
+            <a:avLst/>
+          </a:prstGeom>
+          <a:solidFill>
+            <a:srgbClr val="F0E2CC"/>
+          </a:solidFill>
+          <a:ln/>
+        </p:spPr>
+      </p:sp>
+      <p:sp>
+        <p:nvSpPr>
+          <p:cNvPr id="13" name="Text 11"/>
+          <p:cNvSpPr/>
+          <p:nvPr/>
+        </p:nvSpPr>
+        <p:spPr>
+          <a:xfrm>
+            <a:off x="6446520" y="3931920"/>
+            <a:ext cx="4709160" cy="457200"/>
+          </a:xfrm>
+          <a:prstGeom prst="rect">
+            <a:avLst/>
+          </a:prstGeom>
+          <a:noFill/>
+          <a:ln/>
+        </p:spPr>
+        <p:txBody>
+          <a:bodyPr wrap="square" rtlCol="0" anchor="ctr"/>
+          <a:lstStyle/>
+          <a:p>
+            <a:pPr indent="0" marL="0">
+              <a:buNone/>
+            </a:pPr>
+            <a:r>
+              <a:rPr lang="en-US" sz="1500" b="1" dirty="0">
+                <a:solidFill>
+                  <a:srgbClr val="8862A8"/>
+                </a:solidFill>
+              </a:rPr>
+              <a:t>Condition du Switch</a:t>
+            </a:r>
+            <a:endParaRPr lang="en-US" sz="1500" dirty="0"/>
+          </a:p>
+        </p:txBody>
+      </p:sp>
+      <p:sp>
+        <p:nvSpPr>
+          <p:cNvPr id="14" name="Text 12"/>
+          <p:cNvSpPr/>
+          <p:nvPr/>
+        </p:nvSpPr>
+        <p:spPr>
+          <a:xfrm>
+            <a:off x="6446520" y="4407408"/>
+            <a:ext cx="4709160" cy="1325880"/>
+          </a:xfrm>
+          <a:prstGeom prst="rect">
+            <a:avLst/>
+          </a:prstGeom>
+          <a:noFill/>
+          <a:ln/>
+        </p:spPr>
+        <p:txBody>
+          <a:bodyPr wrap="square" rtlCol="0" anchor="ctr"/>
+          <a:lstStyle/>
+          <a:p>
+            <a:pPr indent="0" marL="0">
+              <a:buNone/>
+            </a:pPr>
+            <a:r>
+              <a:rPr lang="en-US" sz="1050" dirty="0">
+                <a:solidFill>
+                  <a:srgbClr val="4A3363"/>
+                </a:solidFill>
+              </a:rPr>
+              <a:t>Impossible de faire lire au Switch une valeur calculée par un script — résolu en réutilisant le même mécanisme que pour les tests (error() + état de la tâche), plutôt qu'une nouvelle approche plus fragile</a:t>
+            </a:r>
+            <a:endParaRPr lang="en-US" sz="1050" dirty="0"/>
+          </a:p>
+        </p:txBody>
+      </p:sp>
+    </p:spTree>
+  </p:cSld>
+  <p:clrMapOvr>
+    <a:masterClrMapping/>
+  </p:clrMapOvr>
+</p:sld>
+</file>
+
+<file path=ppt/slides/slide11.xml><?xml version="1.0" encoding="utf-8"?>
+<p:sld xmlns:a="http://schemas.openxmlformats.org/drawingml/2006/main" xmlns:r="http://schemas.openxmlformats.org/officeDocument/2006/relationships" xmlns:p="http://schemas.openxmlformats.org/presentationml/2006/main">
+  <p:cSld name="Slide 11">
+    <p:bg>
+      <p:bgPr>
+        <a:solidFill>
+          <a:srgbClr val="4A3363"/>
+        </a:solidFill>
+      </p:bgPr>
+    </p:bg>
+    <p:spTree>
+      <p:nvGrpSpPr>
+        <p:cNvPr id="1" name=""/>
+        <p:cNvGrpSpPr/>
+        <p:nvPr/>
+      </p:nvGrpSpPr>
+      <p:grpSpPr>
+        <a:xfrm>
+          <a:off x="0" y="0"/>
+          <a:ext cx="0" cy="0"/>
+          <a:chOff x="0" y="0"/>
+          <a:chExt cx="0" cy="0"/>
+        </a:xfrm>
+      </p:grpSpPr>
+      <p:sp>
+        <p:nvSpPr>
+          <p:cNvPr id="2" name="Shape 0"/>
+          <p:cNvSpPr/>
+          <p:nvPr/>
+        </p:nvSpPr>
+        <p:spPr>
+          <a:xfrm>
+            <a:off x="0" y="0"/>
+            <a:ext cx="12188952" cy="6858000"/>
+          </a:xfrm>
+          <a:prstGeom prst="rect">
+            <a:avLst/>
+          </a:prstGeom>
+          <a:solidFill>
+            <a:srgbClr val="4A3363"/>
+          </a:solidFill>
+          <a:ln/>
+        </p:spPr>
+      </p:sp>
+      <p:sp>
+        <p:nvSpPr>
+          <p:cNvPr id="3" name="Text 1"/>
+          <p:cNvSpPr/>
+          <p:nvPr/>
+        </p:nvSpPr>
+        <p:spPr>
+          <a:xfrm>
+            <a:off x="731520" y="2286000"/>
+            <a:ext cx="10515600" cy="731520"/>
+          </a:xfrm>
+          <a:prstGeom prst="rect">
+            <a:avLst/>
+          </a:prstGeom>
+          <a:noFill/>
+          <a:ln/>
+        </p:spPr>
+        <p:txBody>
+          <a:bodyPr wrap="square" rtlCol="0" anchor="ctr"/>
+          <a:lstStyle/>
+          <a:p>
+            <a:pPr indent="0" marL="0">
+              <a:buNone/>
+            </a:pPr>
+            <a:r>
+              <a:rPr lang="en-US" sz="3000" b="1" dirty="0">
+                <a:solidFill>
+                  <a:srgbClr val="A8D4E5"/>
+                </a:solidFill>
+                <a:latin typeface="Georgia" pitchFamily="34" charset="0"/>
+                <a:ea typeface="Georgia" pitchFamily="34" charset="-122"/>
+                <a:cs typeface="Georgia" pitchFamily="34" charset="-120"/>
+              </a:rPr>
+              <a:t>Pipeline BottleNeck</a:t>
+            </a:r>
+            <a:endParaRPr lang="en-US" sz="3000" dirty="0"/>
+          </a:p>
+        </p:txBody>
+      </p:sp>
+      <p:sp>
+        <p:nvSpPr>
+          <p:cNvPr id="4" name="Text 2"/>
+          <p:cNvSpPr/>
+          <p:nvPr/>
+        </p:nvSpPr>
+        <p:spPr>
+          <a:xfrm>
+            <a:off x="731520" y="3063240"/>
+            <a:ext cx="9601200" cy="548640"/>
+          </a:xfrm>
+          <a:prstGeom prst="rect">
+            <a:avLst/>
+          </a:prstGeom>
+          <a:noFill/>
+          <a:ln/>
+        </p:spPr>
+        <p:txBody>
+          <a:bodyPr wrap="square" rtlCol="0" anchor="ctr"/>
+          <a:lstStyle/>
+          <a:p>
+            <a:pPr indent="0" marL="0">
+              <a:buNone/>
+            </a:pPr>
+            <a:r>
+              <a:rPr lang="en-US" sz="1500" dirty="0">
+                <a:solidFill>
+                  <a:srgbClr val="D4C5E8"/>
+                </a:solidFill>
+              </a:rPr>
+              <a:t>Nettoyage parallélisé → jointure → chiffre d'affaires → détection z-score → extractions conditionnelles, entièrement automatisé et testé sur Kestra</a:t>
+            </a:r>
+            <a:endParaRPr lang="en-US" sz="1500" dirty="0"/>
+          </a:p>
+        </p:txBody>
+      </p:sp>
+      <p:sp>
+        <p:nvSpPr>
+          <p:cNvPr id="5" name="Text 3"/>
+          <p:cNvSpPr/>
+          <p:nvPr/>
+        </p:nvSpPr>
+        <p:spPr>
+          <a:xfrm>
+            <a:off x="731520" y="4114800"/>
+            <a:ext cx="7315200" cy="640080"/>
+          </a:xfrm>
+          <a:prstGeom prst="rect">
+            <a:avLst/>
+          </a:prstGeom>
+          <a:noFill/>
+          <a:ln/>
+        </p:spPr>
+        <p:txBody>
+          <a:bodyPr wrap="square" rtlCol="0" anchor="ctr"/>
+          <a:lstStyle/>
+          <a:p>
+            <a:pPr indent="0" marL="0">
+              <a:buNone/>
+            </a:pPr>
+            <a:r>
+              <a:rPr lang="en-US" sz="2600" b="1" dirty="0">
+                <a:solidFill>
+                  <a:srgbClr val="A8D4E5"/>
+                </a:solidFill>
+                <a:latin typeface="Georgia" pitchFamily="34" charset="0"/>
+                <a:ea typeface="Georgia" pitchFamily="34" charset="-122"/>
+                <a:cs typeface="Georgia" pitchFamily="34" charset="-120"/>
+              </a:rPr>
+              <a:t>Merci de votre attention</a:t>
+            </a:r>
+            <a:endParaRPr lang="en-US" sz="2600" dirty="0"/>
+          </a:p>
+        </p:txBody>
+      </p:sp>
+      <p:sp>
+        <p:nvSpPr>
+          <p:cNvPr id="6" name="Text 4"/>
+          <p:cNvSpPr/>
+          <p:nvPr/>
+        </p:nvSpPr>
+        <p:spPr>
+          <a:xfrm>
+            <a:off x="731520" y="4800600"/>
+            <a:ext cx="5486400" cy="457200"/>
+          </a:xfrm>
+          <a:prstGeom prst="rect">
+            <a:avLst/>
+          </a:prstGeom>
+          <a:noFill/>
+          <a:ln/>
+        </p:spPr>
+        <p:txBody>
+          <a:bodyPr wrap="square" rtlCol="0" anchor="ctr"/>
+          <a:lstStyle/>
+          <a:p>
+            <a:pPr indent="0" marL="0">
+              <a:buNone/>
+            </a:pPr>
+            <a:r>
+              <a:rPr lang="en-US" sz="1600" dirty="0">
+                <a:solidFill>
+                  <a:srgbClr val="FFFFFF"/>
+                </a:solidFill>
+              </a:rPr>
+              <a:t>Questions ?</a:t>
+            </a:r>
+            <a:endParaRPr lang="en-US" sz="1600" dirty="0"/>
           </a:p>
         </p:txBody>
       </p:sp>
@@ -1819,7 +2638,7 @@
             <a:r>
               <a:rPr lang="en-US" sz="3000" b="1" dirty="0">
                 <a:solidFill>
-                  <a:srgbClr val="1F1B18"/>
+                  <a:srgbClr val="4A3363"/>
                 </a:solidFill>
                 <a:latin typeface="Georgia" pitchFamily="34" charset="0"/>
                 <a:ea typeface="Georgia" pitchFamily="34" charset="-122"/>
@@ -1846,7 +2665,7 @@
             <a:avLst/>
           </a:prstGeom>
           <a:solidFill>
-            <a:srgbClr val="F7F5F2"/>
+            <a:srgbClr val="F0E2CC"/>
           </a:solidFill>
           <a:ln/>
         </p:spPr>
@@ -1878,7 +2697,7 @@
             <a:r>
               <a:rPr lang="en-US" sz="1800" b="1" dirty="0">
                 <a:solidFill>
-                  <a:srgbClr val="6B1233"/>
+                  <a:srgbClr val="8862A8"/>
                 </a:solidFill>
               </a:rPr>
               <a:t>BottleNeck</a:t>
@@ -1918,7 +2737,7 @@
             <a:r>
               <a:rPr lang="en-US" sz="1300" dirty="0">
                 <a:solidFill>
-                  <a:srgbClr val="1F1B18"/>
+                  <a:srgbClr val="4A3363"/>
                 </a:solidFill>
               </a:rPr>
               <a:t>Marchand de vin en ligne et auprès d'entreprises
@@ -1937,7 +2756,7 @@
             <a:r>
               <a:rPr lang="en-US" sz="1300" dirty="0">
                 <a:solidFill>
-                  <a:srgbClr val="1F1B18"/>
+                  <a:srgbClr val="4A3363"/>
                 </a:solidFill>
               </a:rPr>
               <a:t>Deux systèmes de données distincts : ERP (stock/prix) et CMS (ventes web)
@@ -1956,7 +2775,7 @@
             <a:r>
               <a:rPr lang="en-US" sz="1300" dirty="0">
                 <a:solidFill>
-                  <a:srgbClr val="1F1B18"/>
+                  <a:srgbClr val="4A3363"/>
                 </a:solidFill>
               </a:rPr>
               <a:t>Une première analyse manuelle réalisée par Stéphane, Data Analyst</a:t>
@@ -1980,7 +2799,7 @@
             <a:avLst/>
           </a:prstGeom>
           <a:solidFill>
-            <a:srgbClr val="6B1233"/>
+            <a:srgbClr val="8862A8"/>
           </a:solidFill>
           <a:ln/>
         </p:spPr>
@@ -2012,7 +2831,7 @@
             <a:r>
               <a:rPr lang="en-US" sz="1800" b="1" dirty="0">
                 <a:solidFill>
-                  <a:srgbClr val="B8862B"/>
+                  <a:srgbClr val="A8D4E5"/>
                 </a:solidFill>
               </a:rPr>
               <a:t>Mon rôle</a:t>
@@ -2177,7 +2996,7 @@
             <a:r>
               <a:rPr lang="en-US" sz="3000" b="1" dirty="0">
                 <a:solidFill>
-                  <a:srgbClr val="1F1B18"/>
+                  <a:srgbClr val="4A3363"/>
                 </a:solidFill>
                 <a:latin typeface="Georgia" pitchFamily="34" charset="0"/>
                 <a:ea typeface="Georgia" pitchFamily="34" charset="-122"/>
@@ -2206,11 +3025,11 @@
             </a:avLst>
           </a:prstGeom>
           <a:solidFill>
-            <a:srgbClr val="F7F5F2"/>
+            <a:srgbClr val="F0E2CC"/>
           </a:solidFill>
           <a:ln w="12700">
             <a:solidFill>
-              <a:srgbClr val="DEDAD4"/>
+              <a:srgbClr val="E5D5C3"/>
             </a:solidFill>
             <a:prstDash val="solid"/>
           </a:ln>
@@ -2243,7 +3062,7 @@
             <a:r>
               <a:rPr lang="en-US" sz="2800" b="1" dirty="0">
                 <a:solidFill>
-                  <a:srgbClr val="B8862B"/>
+                  <a:srgbClr val="A8D4E5"/>
                 </a:solidFill>
                 <a:latin typeface="Georgia" pitchFamily="34" charset="0"/>
                 <a:ea typeface="Georgia" pitchFamily="34" charset="-122"/>
@@ -2282,7 +3101,7 @@
             <a:r>
               <a:rPr lang="en-US" sz="1500" b="1" dirty="0">
                 <a:solidFill>
-                  <a:srgbClr val="6B1233"/>
+                  <a:srgbClr val="8862A8"/>
                 </a:solidFill>
               </a:rPr>
               <a:t>Nettoyage</a:t>
@@ -2318,7 +3137,7 @@
             <a:r>
               <a:rPr lang="en-US" sz="1050" dirty="0">
                 <a:solidFill>
-                  <a:srgbClr val="5A5550"/>
+                  <a:srgbClr val="7A7085"/>
                 </a:solidFill>
               </a:rPr>
               <a:t>Suppression des valeurs manquantes et dédoublonnage des 3 fichiers sources</a:t>
@@ -2354,7 +3173,7 @@
             <a:r>
               <a:rPr lang="en-US" sz="2200" dirty="0">
                 <a:solidFill>
-                  <a:srgbClr val="B8862B"/>
+                  <a:srgbClr val="A8D4E5"/>
                 </a:solidFill>
               </a:rPr>
               <a:t>→</a:t>
@@ -2384,7 +3203,7 @@
           </a:solidFill>
           <a:ln w="12700">
             <a:solidFill>
-              <a:srgbClr val="DEDAD4"/>
+              <a:srgbClr val="E5D5C3"/>
             </a:solidFill>
             <a:prstDash val="solid"/>
           </a:ln>
@@ -2417,7 +3236,7 @@
             <a:r>
               <a:rPr lang="en-US" sz="2800" b="1" dirty="0">
                 <a:solidFill>
-                  <a:srgbClr val="B8862B"/>
+                  <a:srgbClr val="A8D4E5"/>
                 </a:solidFill>
                 <a:latin typeface="Georgia" pitchFamily="34" charset="0"/>
                 <a:ea typeface="Georgia" pitchFamily="34" charset="-122"/>
@@ -2456,7 +3275,7 @@
             <a:r>
               <a:rPr lang="en-US" sz="1500" b="1" dirty="0">
                 <a:solidFill>
-                  <a:srgbClr val="6B1233"/>
+                  <a:srgbClr val="8862A8"/>
                 </a:solidFill>
               </a:rPr>
               <a:t>Jointure</a:t>
@@ -2492,7 +3311,7 @@
             <a:r>
               <a:rPr lang="en-US" sz="1050" dirty="0">
                 <a:solidFill>
-                  <a:srgbClr val="5A5550"/>
+                  <a:srgbClr val="7A7085"/>
                 </a:solidFill>
               </a:rPr>
               <a:t>Fusion erp + web via le fichier liaison (clés : product_id / sku)</a:t>
@@ -2528,7 +3347,7 @@
             <a:r>
               <a:rPr lang="en-US" sz="2200" dirty="0">
                 <a:solidFill>
-                  <a:srgbClr val="B8862B"/>
+                  <a:srgbClr val="A8D4E5"/>
                 </a:solidFill>
               </a:rPr>
               <a:t>→</a:t>
@@ -2554,11 +3373,11 @@
             </a:avLst>
           </a:prstGeom>
           <a:solidFill>
-            <a:srgbClr val="F7F5F2"/>
+            <a:srgbClr val="F0E2CC"/>
           </a:solidFill>
           <a:ln w="12700">
             <a:solidFill>
-              <a:srgbClr val="DEDAD4"/>
+              <a:srgbClr val="E5D5C3"/>
             </a:solidFill>
             <a:prstDash val="solid"/>
           </a:ln>
@@ -2591,7 +3410,7 @@
             <a:r>
               <a:rPr lang="en-US" sz="2800" b="1" dirty="0">
                 <a:solidFill>
-                  <a:srgbClr val="B8862B"/>
+                  <a:srgbClr val="A8D4E5"/>
                 </a:solidFill>
                 <a:latin typeface="Georgia" pitchFamily="34" charset="0"/>
                 <a:ea typeface="Georgia" pitchFamily="34" charset="-122"/>
@@ -2630,7 +3449,7 @@
             <a:r>
               <a:rPr lang="en-US" sz="1500" b="1" dirty="0">
                 <a:solidFill>
-                  <a:srgbClr val="6B1233"/>
+                  <a:srgbClr val="8862A8"/>
                 </a:solidFill>
               </a:rPr>
               <a:t>Chiffre d'affaires</a:t>
@@ -2666,7 +3485,7 @@
             <a:r>
               <a:rPr lang="en-US" sz="1050" dirty="0">
                 <a:solidFill>
-                  <a:srgbClr val="5A5550"/>
+                  <a:srgbClr val="7A7085"/>
                 </a:solidFill>
               </a:rPr>
               <a:t>Calcul du CA par produit et du CA total sur les données fusionnées</a:t>
@@ -2702,7 +3521,7 @@
             <a:r>
               <a:rPr lang="en-US" sz="2200" dirty="0">
                 <a:solidFill>
-                  <a:srgbClr val="B8862B"/>
+                  <a:srgbClr val="A8D4E5"/>
                 </a:solidFill>
               </a:rPr>
               <a:t>→</a:t>
@@ -2732,7 +3551,7 @@
           </a:solidFill>
           <a:ln w="12700">
             <a:solidFill>
-              <a:srgbClr val="DEDAD4"/>
+              <a:srgbClr val="E5D5C3"/>
             </a:solidFill>
             <a:prstDash val="solid"/>
           </a:ln>
@@ -2765,7 +3584,7 @@
             <a:r>
               <a:rPr lang="en-US" sz="2800" b="1" dirty="0">
                 <a:solidFill>
-                  <a:srgbClr val="B8862B"/>
+                  <a:srgbClr val="A8D4E5"/>
                 </a:solidFill>
                 <a:latin typeface="Georgia" pitchFamily="34" charset="0"/>
                 <a:ea typeface="Georgia" pitchFamily="34" charset="-122"/>
@@ -2804,7 +3623,7 @@
             <a:r>
               <a:rPr lang="en-US" sz="1500" b="1" dirty="0">
                 <a:solidFill>
-                  <a:srgbClr val="6B1233"/>
+                  <a:srgbClr val="8862A8"/>
                 </a:solidFill>
               </a:rPr>
               <a:t>Z-score</a:t>
@@ -2840,7 +3659,7 @@
             <a:r>
               <a:rPr lang="en-US" sz="1050" dirty="0">
                 <a:solidFill>
-                  <a:srgbClr val="5A5550"/>
+                  <a:srgbClr val="7A7085"/>
                 </a:solidFill>
               </a:rPr>
               <a:t>Identification des vins premium (z-score &gt; 2) et ordinaires</a:t>
@@ -2876,7 +3695,7 @@
             <a:r>
               <a:rPr lang="en-US" sz="1100" i="1" dirty="0">
                 <a:solidFill>
-                  <a:srgbClr val="5A5550"/>
+                  <a:srgbClr val="7A7085"/>
                 </a:solidFill>
               </a:rPr>
               <a:t>Source : démarche transmise par Laurent (manager Data) — basée sur le travail de Stéphane, Data Analyst</a:t>
@@ -2944,7 +3763,7 @@
             <a:r>
               <a:rPr lang="en-US" sz="2800" b="1" dirty="0">
                 <a:solidFill>
-                  <a:srgbClr val="1F1B18"/>
+                  <a:srgbClr val="4A3363"/>
                 </a:solidFill>
                 <a:latin typeface="Georgia" pitchFamily="34" charset="0"/>
                 <a:ea typeface="Georgia" pitchFamily="34" charset="-122"/>
@@ -2983,7 +3802,7 @@
             <a:r>
               <a:rPr lang="en-US" sz="1200" i="1" dirty="0">
                 <a:solidFill>
-                  <a:srgbClr val="5A5550"/>
+                  <a:srgbClr val="7A7085"/>
                 </a:solidFill>
               </a:rPr>
               <a:t>Conçu sur Draw.io — 3 nettoyages en parallèle, puis flux séquentiel, chaque étape validée par un test</a:t>
@@ -3009,7 +3828,7 @@
             </a:avLst>
           </a:prstGeom>
           <a:solidFill>
-            <a:srgbClr val="B8862B"/>
+            <a:srgbClr val="A8D4E5"/>
           </a:solidFill>
           <a:ln w="12700">
             <a:solidFill>
@@ -3046,7 +3865,7 @@
             <a:r>
               <a:rPr lang="en-US" sz="1100" b="1" dirty="0">
                 <a:solidFill>
-                  <a:srgbClr val="1F1B18"/>
+                  <a:srgbClr val="4A3363"/>
                 </a:solidFill>
               </a:rPr>
               <a:t>erp.xlsx</a:t>
@@ -3072,7 +3891,7 @@
             </a:avLst>
           </a:prstGeom>
           <a:solidFill>
-            <a:srgbClr val="EDE7DE"/>
+            <a:srgbClr val="F7EFE0"/>
           </a:solidFill>
           <a:ln w="12700">
             <a:solidFill>
@@ -3109,7 +3928,7 @@
             <a:r>
               <a:rPr lang="en-US" sz="900" b="1" dirty="0">
                 <a:solidFill>
-                  <a:srgbClr val="1F1B18"/>
+                  <a:srgbClr val="4A3363"/>
                 </a:solidFill>
               </a:rPr>
               <a:t>Nettoyage +</a:t>
@@ -3123,7 +3942,7 @@
             <a:r>
               <a:rPr lang="en-US" sz="900" b="1" dirty="0">
                 <a:solidFill>
-                  <a:srgbClr val="1F1B18"/>
+                  <a:srgbClr val="4A3363"/>
                 </a:solidFill>
               </a:rPr>
               <a:t>dédoublonnage</a:t>
@@ -3149,7 +3968,7 @@
             </a:avLst>
           </a:prstGeom>
           <a:solidFill>
-            <a:srgbClr val="6B1233"/>
+            <a:srgbClr val="8862A8"/>
           </a:solidFill>
           <a:ln w="12700">
             <a:solidFill>
@@ -3212,7 +4031,7 @@
           <a:noFill/>
           <a:ln w="19050">
             <a:solidFill>
-              <a:srgbClr val="9A9490"/>
+              <a:srgbClr val="A79CB0"/>
             </a:solidFill>
             <a:prstDash val="solid"/>
             <a:tailEnd type="triangle"/>
@@ -3236,7 +4055,7 @@
           <a:noFill/>
           <a:ln w="19050">
             <a:solidFill>
-              <a:srgbClr val="9A9490"/>
+              <a:srgbClr val="A79CB0"/>
             </a:solidFill>
             <a:prstDash val="solid"/>
             <a:tailEnd type="triangle"/>
@@ -3260,7 +4079,7 @@
             </a:avLst>
           </a:prstGeom>
           <a:solidFill>
-            <a:srgbClr val="B8862B"/>
+            <a:srgbClr val="A8D4E5"/>
           </a:solidFill>
           <a:ln w="12700">
             <a:solidFill>
@@ -3297,7 +4116,7 @@
             <a:r>
               <a:rPr lang="en-US" sz="1100" b="1" dirty="0">
                 <a:solidFill>
-                  <a:srgbClr val="1F1B18"/>
+                  <a:srgbClr val="4A3363"/>
                 </a:solidFill>
               </a:rPr>
               <a:t>liaison.xlsx</a:t>
@@ -3323,7 +4142,7 @@
             </a:avLst>
           </a:prstGeom>
           <a:solidFill>
-            <a:srgbClr val="EDE7DE"/>
+            <a:srgbClr val="F7EFE0"/>
           </a:solidFill>
           <a:ln w="12700">
             <a:solidFill>
@@ -3360,7 +4179,7 @@
             <a:r>
               <a:rPr lang="en-US" sz="900" b="1" dirty="0">
                 <a:solidFill>
-                  <a:srgbClr val="1F1B18"/>
+                  <a:srgbClr val="4A3363"/>
                 </a:solidFill>
               </a:rPr>
               <a:t>Nettoyage +</a:t>
@@ -3374,7 +4193,7 @@
             <a:r>
               <a:rPr lang="en-US" sz="900" b="1" dirty="0">
                 <a:solidFill>
-                  <a:srgbClr val="1F1B18"/>
+                  <a:srgbClr val="4A3363"/>
                 </a:solidFill>
               </a:rPr>
               <a:t>dédoublonnage</a:t>
@@ -3400,7 +4219,7 @@
             </a:avLst>
           </a:prstGeom>
           <a:solidFill>
-            <a:srgbClr val="6B1233"/>
+            <a:srgbClr val="8862A8"/>
           </a:solidFill>
           <a:ln w="12700">
             <a:solidFill>
@@ -3463,7 +4282,7 @@
           <a:noFill/>
           <a:ln w="19050">
             <a:solidFill>
-              <a:srgbClr val="9A9490"/>
+              <a:srgbClr val="A79CB0"/>
             </a:solidFill>
             <a:prstDash val="solid"/>
             <a:tailEnd type="triangle"/>
@@ -3487,7 +4306,7 @@
           <a:noFill/>
           <a:ln w="19050">
             <a:solidFill>
-              <a:srgbClr val="9A9490"/>
+              <a:srgbClr val="A79CB0"/>
             </a:solidFill>
             <a:prstDash val="solid"/>
             <a:tailEnd type="triangle"/>
@@ -3511,7 +4330,7 @@
             </a:avLst>
           </a:prstGeom>
           <a:solidFill>
-            <a:srgbClr val="B8862B"/>
+            <a:srgbClr val="A8D4E5"/>
           </a:solidFill>
           <a:ln w="12700">
             <a:solidFill>
@@ -3548,7 +4367,7 @@
             <a:r>
               <a:rPr lang="en-US" sz="1100" b="1" dirty="0">
                 <a:solidFill>
-                  <a:srgbClr val="1F1B18"/>
+                  <a:srgbClr val="4A3363"/>
                 </a:solidFill>
               </a:rPr>
               <a:t>web.xlsx</a:t>
@@ -3574,7 +4393,7 @@
             </a:avLst>
           </a:prstGeom>
           <a:solidFill>
-            <a:srgbClr val="EDE7DE"/>
+            <a:srgbClr val="F7EFE0"/>
           </a:solidFill>
           <a:ln w="12700">
             <a:solidFill>
@@ -3611,7 +4430,7 @@
             <a:r>
               <a:rPr lang="en-US" sz="900" b="1" dirty="0">
                 <a:solidFill>
-                  <a:srgbClr val="1F1B18"/>
+                  <a:srgbClr val="4A3363"/>
                 </a:solidFill>
               </a:rPr>
               <a:t>Nettoyage +</a:t>
@@ -3625,7 +4444,7 @@
             <a:r>
               <a:rPr lang="en-US" sz="900" b="1" dirty="0">
                 <a:solidFill>
-                  <a:srgbClr val="1F1B18"/>
+                  <a:srgbClr val="4A3363"/>
                 </a:solidFill>
               </a:rPr>
               <a:t>dédoublonnage</a:t>
@@ -3651,7 +4470,7 @@
             </a:avLst>
           </a:prstGeom>
           <a:solidFill>
-            <a:srgbClr val="6B1233"/>
+            <a:srgbClr val="8862A8"/>
           </a:solidFill>
           <a:ln w="12700">
             <a:solidFill>
@@ -3714,7 +4533,7 @@
           <a:noFill/>
           <a:ln w="19050">
             <a:solidFill>
-              <a:srgbClr val="9A9490"/>
+              <a:srgbClr val="A79CB0"/>
             </a:solidFill>
             <a:prstDash val="solid"/>
             <a:tailEnd type="triangle"/>
@@ -3738,7 +4557,7 @@
           <a:noFill/>
           <a:ln w="19050">
             <a:solidFill>
-              <a:srgbClr val="9A9490"/>
+              <a:srgbClr val="A79CB0"/>
             </a:solidFill>
             <a:prstDash val="solid"/>
             <a:tailEnd type="triangle"/>
@@ -3762,7 +4581,7 @@
             </a:avLst>
           </a:prstGeom>
           <a:solidFill>
-            <a:srgbClr val="1F1B18"/>
+            <a:srgbClr val="4A3363"/>
           </a:solidFill>
           <a:ln w="12700">
             <a:solidFill>
@@ -3799,7 +4618,7 @@
             <a:r>
               <a:rPr lang="en-US" sz="1100" b="1" dirty="0">
                 <a:solidFill>
-                  <a:srgbClr val="B8862B"/>
+                  <a:srgbClr val="A8D4E5"/>
                 </a:solidFill>
               </a:rPr>
               <a:t>Jointure</a:t>
@@ -3825,7 +4644,7 @@
           <a:noFill/>
           <a:ln w="19050">
             <a:solidFill>
-              <a:srgbClr val="9A9490"/>
+              <a:srgbClr val="A79CB0"/>
             </a:solidFill>
             <a:prstDash val="solid"/>
             <a:tailEnd type="triangle"/>
@@ -3849,7 +4668,7 @@
           <a:noFill/>
           <a:ln w="19050">
             <a:solidFill>
-              <a:srgbClr val="9A9490"/>
+              <a:srgbClr val="A79CB0"/>
             </a:solidFill>
             <a:prstDash val="solid"/>
             <a:tailEnd type="triangle"/>
@@ -3873,7 +4692,7 @@
           <a:noFill/>
           <a:ln w="19050">
             <a:solidFill>
-              <a:srgbClr val="9A9490"/>
+              <a:srgbClr val="A79CB0"/>
             </a:solidFill>
             <a:prstDash val="solid"/>
             <a:tailEnd type="triangle"/>
@@ -3897,7 +4716,7 @@
             </a:avLst>
           </a:prstGeom>
           <a:solidFill>
-            <a:srgbClr val="6B1233"/>
+            <a:srgbClr val="8862A8"/>
           </a:solidFill>
           <a:ln w="12700">
             <a:solidFill>
@@ -3960,7 +4779,7 @@
           <a:noFill/>
           <a:ln w="19050">
             <a:solidFill>
-              <a:srgbClr val="9A9490"/>
+              <a:srgbClr val="A79CB0"/>
             </a:solidFill>
             <a:prstDash val="solid"/>
             <a:tailEnd type="triangle"/>
@@ -3984,7 +4803,7 @@
             </a:avLst>
           </a:prstGeom>
           <a:solidFill>
-            <a:srgbClr val="EDE7DE"/>
+            <a:srgbClr val="F7EFE0"/>
           </a:solidFill>
           <a:ln w="12700">
             <a:solidFill>
@@ -4021,7 +4840,7 @@
             <a:r>
               <a:rPr lang="en-US" sz="1000" b="1" dirty="0">
                 <a:solidFill>
-                  <a:srgbClr val="1F1B18"/>
+                  <a:srgbClr val="4A3363"/>
                 </a:solidFill>
               </a:rPr>
               <a:t>Calcul du CA + test</a:t>
@@ -4047,7 +4866,7 @@
           <a:noFill/>
           <a:ln w="19050">
             <a:solidFill>
-              <a:srgbClr val="9A9490"/>
+              <a:srgbClr val="A79CB0"/>
             </a:solidFill>
             <a:prstDash val="solid"/>
             <a:tailEnd type="triangle"/>
@@ -4071,7 +4890,7 @@
             </a:avLst>
           </a:prstGeom>
           <a:solidFill>
-            <a:srgbClr val="EDE7DE"/>
+            <a:srgbClr val="F7EFE0"/>
           </a:solidFill>
           <a:ln w="12700">
             <a:solidFill>
@@ -4108,7 +4927,7 @@
             <a:r>
               <a:rPr lang="en-US" sz="1000" b="1" dirty="0">
                 <a:solidFill>
-                  <a:srgbClr val="1F1B18"/>
+                  <a:srgbClr val="4A3363"/>
                 </a:solidFill>
               </a:rPr>
               <a:t>Détection z-score + test</a:t>
@@ -4134,7 +4953,7 @@
           <a:noFill/>
           <a:ln w="19050">
             <a:solidFill>
-              <a:srgbClr val="9A9490"/>
+              <a:srgbClr val="A79CB0"/>
             </a:solidFill>
             <a:prstDash val="solid"/>
             <a:tailEnd type="triangle"/>
@@ -4158,7 +4977,7 @@
             </a:avLst>
           </a:prstGeom>
           <a:solidFill>
-            <a:srgbClr val="3E7C4A"/>
+            <a:srgbClr val="E8B4C0"/>
           </a:solidFill>
           <a:ln w="12700">
             <a:solidFill>
@@ -4235,7 +5054,7 @@
             </a:avLst>
           </a:prstGeom>
           <a:solidFill>
-            <a:srgbClr val="3E7C4A"/>
+            <a:srgbClr val="E8B4C0"/>
           </a:solidFill>
           <a:ln w="12700">
             <a:solidFill>
@@ -4312,7 +5131,7 @@
             </a:avLst>
           </a:prstGeom>
           <a:solidFill>
-            <a:srgbClr val="3E7C4A"/>
+            <a:srgbClr val="E8B4C0"/>
           </a:solidFill>
           <a:ln w="12700">
             <a:solidFill>
@@ -4389,7 +5208,7 @@
           <a:noFill/>
           <a:ln w="19050">
             <a:solidFill>
-              <a:srgbClr val="9A9490"/>
+              <a:srgbClr val="A79CB0"/>
             </a:solidFill>
             <a:prstDash val="solid"/>
             <a:tailEnd type="triangle"/>
@@ -4413,7 +5232,7 @@
           <a:noFill/>
           <a:ln w="19050">
             <a:solidFill>
-              <a:srgbClr val="9A9490"/>
+              <a:srgbClr val="A79CB0"/>
             </a:solidFill>
             <a:prstDash val="solid"/>
             <a:tailEnd type="triangle"/>
@@ -4437,7 +5256,7 @@
           <a:noFill/>
           <a:ln w="19050">
             <a:solidFill>
-              <a:srgbClr val="9A9490"/>
+              <a:srgbClr val="A79CB0"/>
             </a:solidFill>
             <a:prstDash val="solid"/>
             <a:tailEnd type="triangle"/>
@@ -4503,7 +5322,7 @@
             <a:r>
               <a:rPr lang="en-US" sz="3000" b="1" dirty="0">
                 <a:solidFill>
-                  <a:srgbClr val="1F1B18"/>
+                  <a:srgbClr val="4A3363"/>
                 </a:solidFill>
                 <a:latin typeface="Georgia" pitchFamily="34" charset="0"/>
                 <a:ea typeface="Georgia" pitchFamily="34" charset="-122"/>
@@ -4530,7 +5349,7 @@
             <a:avLst/>
           </a:prstGeom>
           <a:solidFill>
-            <a:srgbClr val="F7F5F2"/>
+            <a:srgbClr val="F0E2CC"/>
           </a:solidFill>
           <a:ln/>
         </p:spPr>
@@ -4562,10 +5381,10 @@
             <a:r>
               <a:rPr lang="en-US" sz="1600" b="1" dirty="0">
                 <a:solidFill>
-                  <a:srgbClr val="6B1233"/>
-                </a:solidFill>
-              </a:rPr>
-              <a:t>WorkingDirectory</a:t>
+                  <a:srgbClr val="8862A8"/>
+                </a:solidFill>
+              </a:rPr>
+              <a:t>Parallel + WorkingDirectory</a:t>
             </a:r>
             <a:endParaRPr lang="en-US" sz="1600" dirty="0"/>
           </a:p>
@@ -4598,10 +5417,10 @@
             <a:r>
               <a:rPr lang="en-US" sz="1150" dirty="0">
                 <a:solidFill>
-                  <a:srgbClr val="1F1B18"/>
-                </a:solidFill>
-              </a:rPr>
-              <a:t>Un dossier de travail partagé pour toutes les tâches : chaque script lit/écrit ses fichiers sans configuration complexe</a:t>
+                  <a:srgbClr val="4A3363"/>
+                </a:solidFill>
+              </a:rPr>
+              <a:t>Les 3 nettoyages (erp/web/liaison) tournent en parallèle (tâche Parallel), chacun dans son propre WorkingDirectory pour charger les fichiers sources</a:t>
             </a:r>
             <a:endParaRPr lang="en-US" sz="1150" dirty="0"/>
           </a:p>
@@ -4622,7 +5441,7 @@
             <a:avLst/>
           </a:prstGeom>
           <a:solidFill>
-            <a:srgbClr val="F7F5F2"/>
+            <a:srgbClr val="F0E2CC"/>
           </a:solidFill>
           <a:ln/>
         </p:spPr>
@@ -4654,7 +5473,7 @@
             <a:r>
               <a:rPr lang="en-US" sz="1600" b="1" dirty="0">
                 <a:solidFill>
-                  <a:srgbClr val="6B1233"/>
+                  <a:srgbClr val="8862A8"/>
                 </a:solidFill>
               </a:rPr>
               <a:t>Namespace Files</a:t>
@@ -4690,7 +5509,7 @@
             <a:r>
               <a:rPr lang="en-US" sz="1150" dirty="0">
                 <a:solidFill>
-                  <a:srgbClr val="1F1B18"/>
+                  <a:srgbClr val="4A3363"/>
                 </a:solidFill>
               </a:rPr>
               <a:t>Les 3 fichiers sources et les scripts sont déposés une fois dans Kestra ; il suffira de les remplacer chaque mois</a:t>
@@ -4714,7 +5533,7 @@
             <a:avLst/>
           </a:prstGeom>
           <a:solidFill>
-            <a:srgbClr val="F7F5F2"/>
+            <a:srgbClr val="F0E2CC"/>
           </a:solidFill>
           <a:ln/>
         </p:spPr>
@@ -4746,10 +5565,10 @@
             <a:r>
               <a:rPr lang="en-US" sz="1600" b="1" dirty="0">
                 <a:solidFill>
-                  <a:srgbClr val="6B1233"/>
-                </a:solidFill>
-              </a:rPr>
-              <a:t>DuckDB (JDBC)</a:t>
+                  <a:srgbClr val="8862A8"/>
+                </a:solidFill>
+              </a:rPr>
+              <a:t>Planification + résilience</a:t>
             </a:r>
             <a:endParaRPr lang="en-US" sz="1600" dirty="0"/>
           </a:p>
@@ -4782,10 +5601,10 @@
             <a:r>
               <a:rPr lang="en-US" sz="1150" dirty="0">
                 <a:solidFill>
-                  <a:srgbClr val="1F1B18"/>
-                </a:solidFill>
-              </a:rPr>
-              <a:t>Moteur SQL intégré à Kestra pour le nettoyage, la jointure et le calcul du CA — rapide, sans conteneur supplémentaire</a:t>
+                  <a:srgbClr val="4A3363"/>
+                </a:solidFill>
+              </a:rPr>
+              <a:t>Déclenchement automatique via cron (15 du mois, 9h), retry (3 tentatives) sur chaque tâche, alerte automatique en cas d'échec</a:t>
             </a:r>
             <a:endParaRPr lang="en-US" sz="1150" dirty="0"/>
           </a:p>
@@ -4806,7 +5625,7 @@
             <a:avLst/>
           </a:prstGeom>
           <a:solidFill>
-            <a:srgbClr val="F7F5F2"/>
+            <a:srgbClr val="F0E2CC"/>
           </a:solidFill>
           <a:ln/>
         </p:spPr>
@@ -4838,10 +5657,10 @@
             <a:r>
               <a:rPr lang="en-US" sz="1600" b="1" dirty="0">
                 <a:solidFill>
-                  <a:srgbClr val="6B1233"/>
-                </a:solidFill>
-              </a:rPr>
-              <a:t>Tests via error()</a:t>
+                  <a:srgbClr val="8862A8"/>
+                </a:solidFill>
+              </a:rPr>
+              <a:t>Switch de routage</a:t>
             </a:r>
             <a:endParaRPr lang="en-US" sz="1600" dirty="0"/>
           </a:p>
@@ -4874,10 +5693,10 @@
             <a:r>
               <a:rPr lang="en-US" sz="1150" dirty="0">
                 <a:solidFill>
-                  <a:srgbClr val="1F1B18"/>
-                </a:solidFill>
-              </a:rPr>
-              <a:t>Chaque étape est suivie d'un contrôle SQL qui fait échouer la tâche (donc alerte l'équipe) si un critère n'est pas respecté</a:t>
+                  <a:srgbClr val="4A3363"/>
+                </a:solidFill>
+              </a:rPr>
+              <a:t>Un branchement conditionnel vérifie si des vins premium sont détectés : si oui, extraction des deux catégories ; sinon, extraction des ordinaires seuls + alerte</a:t>
             </a:r>
             <a:endParaRPr lang="en-US" sz="1150" dirty="0"/>
           </a:p>
@@ -4923,8 +5742,8 @@
         </p:nvSpPr>
         <p:spPr>
           <a:xfrm>
-            <a:off x="640080" y="457200"/>
-            <a:ext cx="10881360" cy="640080"/>
+            <a:off x="640080" y="365760"/>
+            <a:ext cx="10881360" cy="548640"/>
           </a:xfrm>
           <a:prstGeom prst="rect">
             <a:avLst/>
@@ -4940,52 +5759,30 @@
               <a:buNone/>
             </a:pPr>
             <a:r>
-              <a:rPr lang="en-US" sz="3000" b="1" dirty="0">
-                <a:solidFill>
-                  <a:srgbClr val="1F1B18"/>
+              <a:rPr lang="en-US" sz="2800" b="1" dirty="0">
+                <a:solidFill>
+                  <a:srgbClr val="4A3363"/>
                 </a:solidFill>
                 <a:latin typeface="Georgia" pitchFamily="34" charset="0"/>
                 <a:ea typeface="Georgia" pitchFamily="34" charset="-122"/>
                 <a:cs typeface="Georgia" pitchFamily="34" charset="-120"/>
               </a:rPr>
-              <a:t>Le workflow, exécution réelle</a:t>
-            </a:r>
-            <a:endParaRPr lang="en-US" sz="3000" dirty="0"/>
-          </a:p>
-        </p:txBody>
-      </p:sp>
-      <p:sp>
-        <p:nvSpPr>
-          <p:cNvPr id="3" name="Shape 1"/>
-          <p:cNvSpPr/>
-          <p:nvPr/>
-        </p:nvSpPr>
-        <p:spPr>
-          <a:xfrm>
-            <a:off x="640080" y="1554480"/>
-            <a:ext cx="2011680" cy="1143000"/>
-          </a:xfrm>
-          <a:prstGeom prst="roundRect">
-            <a:avLst>
-              <a:gd name="adj" fmla="val 6400"/>
-            </a:avLst>
-          </a:prstGeom>
-          <a:solidFill>
-            <a:srgbClr val="3E7C4A"/>
-          </a:solidFill>
-          <a:ln/>
-        </p:spPr>
-      </p:sp>
-      <p:sp>
-        <p:nvSpPr>
-          <p:cNvPr id="4" name="Text 2"/>
-          <p:cNvSpPr/>
-          <p:nvPr/>
-        </p:nvSpPr>
-        <p:spPr>
-          <a:xfrm>
-            <a:off x="731520" y="1627632"/>
-            <a:ext cx="457200" cy="365760"/>
+              <a:t>Topologie du workflow dans Kestra</a:t>
+            </a:r>
+            <a:endParaRPr lang="en-US" sz="2800" dirty="0"/>
+          </a:p>
+        </p:txBody>
+      </p:sp>
+      <p:sp>
+        <p:nvSpPr>
+          <p:cNvPr id="3" name="Text 1"/>
+          <p:cNvSpPr/>
+          <p:nvPr/>
+        </p:nvSpPr>
+        <p:spPr>
+          <a:xfrm>
+            <a:off x="640080" y="868680"/>
+            <a:ext cx="10881360" cy="365760"/>
           </a:xfrm>
           <a:prstGeom prst="rect">
             <a:avLst/>
@@ -5001,971 +5798,41 @@
               <a:buNone/>
             </a:pPr>
             <a:r>
-              <a:rPr lang="en-US" sz="1600" b="1" dirty="0">
-                <a:solidFill>
-                  <a:srgbClr val="FFFFFF"/>
-                </a:solidFill>
-              </a:rPr>
-              <a:t>✓</a:t>
-            </a:r>
-            <a:endParaRPr lang="en-US" sz="1600" dirty="0"/>
-          </a:p>
-        </p:txBody>
-      </p:sp>
-      <p:sp>
-        <p:nvSpPr>
-          <p:cNvPr id="5" name="Text 3"/>
-          <p:cNvSpPr/>
-          <p:nvPr/>
-        </p:nvSpPr>
-        <p:spPr>
-          <a:xfrm>
-            <a:off x="731520" y="2011680"/>
-            <a:ext cx="1828800" cy="594360"/>
-          </a:xfrm>
-          <a:prstGeom prst="rect">
-            <a:avLst/>
-          </a:prstGeom>
-          <a:noFill/>
-          <a:ln/>
-        </p:spPr>
-        <p:txBody>
-          <a:bodyPr wrap="square" rtlCol="0" anchor="ctr"/>
-          <a:lstStyle/>
-          <a:p>
-            <a:pPr algn="ctr" indent="0" marL="0">
-              <a:buNone/>
-            </a:pPr>
-            <a:r>
-              <a:rPr lang="en-US" sz="1100" b="1" dirty="0">
-                <a:solidFill>
-                  <a:srgbClr val="FFFFFF"/>
-                </a:solidFill>
-              </a:rPr>
-              <a:t>nettoyage_erp</a:t>
-            </a:r>
-            <a:endParaRPr lang="en-US" sz="1100" dirty="0"/>
-          </a:p>
-        </p:txBody>
-      </p:sp>
-      <p:sp>
-        <p:nvSpPr>
-          <p:cNvPr id="6" name="Shape 4"/>
-          <p:cNvSpPr/>
-          <p:nvPr/>
-        </p:nvSpPr>
-        <p:spPr>
-          <a:xfrm>
-            <a:off x="2852928" y="1554480"/>
-            <a:ext cx="2011680" cy="1143000"/>
-          </a:xfrm>
-          <a:prstGeom prst="roundRect">
-            <a:avLst>
-              <a:gd name="adj" fmla="val 6400"/>
-            </a:avLst>
-          </a:prstGeom>
-          <a:solidFill>
-            <a:srgbClr val="3E7C4A"/>
-          </a:solidFill>
-          <a:ln/>
-        </p:spPr>
-      </p:sp>
-      <p:sp>
-        <p:nvSpPr>
-          <p:cNvPr id="7" name="Text 5"/>
-          <p:cNvSpPr/>
-          <p:nvPr/>
-        </p:nvSpPr>
-        <p:spPr>
-          <a:xfrm>
-            <a:off x="2944368" y="1627632"/>
-            <a:ext cx="457200" cy="365760"/>
-          </a:xfrm>
-          <a:prstGeom prst="rect">
-            <a:avLst/>
-          </a:prstGeom>
-          <a:noFill/>
-          <a:ln/>
-        </p:spPr>
-        <p:txBody>
-          <a:bodyPr wrap="square" rtlCol="0" anchor="ctr"/>
-          <a:lstStyle/>
-          <a:p>
-            <a:pPr indent="0" marL="0">
-              <a:buNone/>
-            </a:pPr>
-            <a:r>
-              <a:rPr lang="en-US" sz="1600" b="1" dirty="0">
-                <a:solidFill>
-                  <a:srgbClr val="FFFFFF"/>
-                </a:solidFill>
-              </a:rPr>
-              <a:t>✓</a:t>
-            </a:r>
-            <a:endParaRPr lang="en-US" sz="1600" dirty="0"/>
-          </a:p>
-        </p:txBody>
-      </p:sp>
-      <p:sp>
-        <p:nvSpPr>
-          <p:cNvPr id="8" name="Text 6"/>
-          <p:cNvSpPr/>
-          <p:nvPr/>
-        </p:nvSpPr>
-        <p:spPr>
-          <a:xfrm>
-            <a:off x="2944368" y="2011680"/>
-            <a:ext cx="1828800" cy="594360"/>
-          </a:xfrm>
-          <a:prstGeom prst="rect">
-            <a:avLst/>
-          </a:prstGeom>
-          <a:noFill/>
-          <a:ln/>
-        </p:spPr>
-        <p:txBody>
-          <a:bodyPr wrap="square" rtlCol="0" anchor="ctr"/>
-          <a:lstStyle/>
-          <a:p>
-            <a:pPr algn="ctr" indent="0" marL="0">
-              <a:buNone/>
-            </a:pPr>
-            <a:r>
-              <a:rPr lang="en-US" sz="1100" b="1" dirty="0">
-                <a:solidFill>
-                  <a:srgbClr val="FFFFFF"/>
-                </a:solidFill>
-              </a:rPr>
-              <a:t>test_erp</a:t>
-            </a:r>
-            <a:endParaRPr lang="en-US" sz="1100" dirty="0"/>
-          </a:p>
-        </p:txBody>
-      </p:sp>
-      <p:sp>
-        <p:nvSpPr>
-          <p:cNvPr id="9" name="Shape 7"/>
-          <p:cNvSpPr/>
-          <p:nvPr/>
-        </p:nvSpPr>
-        <p:spPr>
-          <a:xfrm>
-            <a:off x="5065776" y="1554480"/>
-            <a:ext cx="2011680" cy="1143000"/>
-          </a:xfrm>
-          <a:prstGeom prst="roundRect">
-            <a:avLst>
-              <a:gd name="adj" fmla="val 6400"/>
-            </a:avLst>
-          </a:prstGeom>
-          <a:solidFill>
-            <a:srgbClr val="3E7C4A"/>
-          </a:solidFill>
-          <a:ln/>
-        </p:spPr>
-      </p:sp>
-      <p:sp>
-        <p:nvSpPr>
-          <p:cNvPr id="10" name="Text 8"/>
-          <p:cNvSpPr/>
-          <p:nvPr/>
-        </p:nvSpPr>
-        <p:spPr>
-          <a:xfrm>
-            <a:off x="5157216" y="1627632"/>
-            <a:ext cx="457200" cy="365760"/>
-          </a:xfrm>
-          <a:prstGeom prst="rect">
-            <a:avLst/>
-          </a:prstGeom>
-          <a:noFill/>
-          <a:ln/>
-        </p:spPr>
-        <p:txBody>
-          <a:bodyPr wrap="square" rtlCol="0" anchor="ctr"/>
-          <a:lstStyle/>
-          <a:p>
-            <a:pPr indent="0" marL="0">
-              <a:buNone/>
-            </a:pPr>
-            <a:r>
-              <a:rPr lang="en-US" sz="1600" b="1" dirty="0">
-                <a:solidFill>
-                  <a:srgbClr val="FFFFFF"/>
-                </a:solidFill>
-              </a:rPr>
-              <a:t>✓</a:t>
-            </a:r>
-            <a:endParaRPr lang="en-US" sz="1600" dirty="0"/>
-          </a:p>
-        </p:txBody>
-      </p:sp>
-      <p:sp>
-        <p:nvSpPr>
-          <p:cNvPr id="11" name="Text 9"/>
-          <p:cNvSpPr/>
-          <p:nvPr/>
-        </p:nvSpPr>
-        <p:spPr>
-          <a:xfrm>
-            <a:off x="5157216" y="2011680"/>
-            <a:ext cx="1828800" cy="594360"/>
-          </a:xfrm>
-          <a:prstGeom prst="rect">
-            <a:avLst/>
-          </a:prstGeom>
-          <a:noFill/>
-          <a:ln/>
-        </p:spPr>
-        <p:txBody>
-          <a:bodyPr wrap="square" rtlCol="0" anchor="ctr"/>
-          <a:lstStyle/>
-          <a:p>
-            <a:pPr algn="ctr" indent="0" marL="0">
-              <a:buNone/>
-            </a:pPr>
-            <a:r>
-              <a:rPr lang="en-US" sz="1100" b="1" dirty="0">
-                <a:solidFill>
-                  <a:srgbClr val="FFFFFF"/>
-                </a:solidFill>
-              </a:rPr>
-              <a:t>nettoyage_web</a:t>
-            </a:r>
-            <a:endParaRPr lang="en-US" sz="1100" dirty="0"/>
-          </a:p>
-        </p:txBody>
-      </p:sp>
-      <p:sp>
-        <p:nvSpPr>
-          <p:cNvPr id="12" name="Shape 10"/>
-          <p:cNvSpPr/>
-          <p:nvPr/>
-        </p:nvSpPr>
-        <p:spPr>
-          <a:xfrm>
-            <a:off x="7278624" y="1554480"/>
-            <a:ext cx="2011680" cy="1143000"/>
-          </a:xfrm>
-          <a:prstGeom prst="roundRect">
-            <a:avLst>
-              <a:gd name="adj" fmla="val 6400"/>
-            </a:avLst>
-          </a:prstGeom>
-          <a:solidFill>
-            <a:srgbClr val="3E7C4A"/>
-          </a:solidFill>
-          <a:ln/>
-        </p:spPr>
-      </p:sp>
-      <p:sp>
-        <p:nvSpPr>
-          <p:cNvPr id="13" name="Text 11"/>
-          <p:cNvSpPr/>
-          <p:nvPr/>
-        </p:nvSpPr>
-        <p:spPr>
-          <a:xfrm>
-            <a:off x="7370064" y="1627632"/>
-            <a:ext cx="457200" cy="365760"/>
-          </a:xfrm>
-          <a:prstGeom prst="rect">
-            <a:avLst/>
-          </a:prstGeom>
-          <a:noFill/>
-          <a:ln/>
-        </p:spPr>
-        <p:txBody>
-          <a:bodyPr wrap="square" rtlCol="0" anchor="ctr"/>
-          <a:lstStyle/>
-          <a:p>
-            <a:pPr indent="0" marL="0">
-              <a:buNone/>
-            </a:pPr>
-            <a:r>
-              <a:rPr lang="en-US" sz="1600" b="1" dirty="0">
-                <a:solidFill>
-                  <a:srgbClr val="FFFFFF"/>
-                </a:solidFill>
-              </a:rPr>
-              <a:t>✓</a:t>
-            </a:r>
-            <a:endParaRPr lang="en-US" sz="1600" dirty="0"/>
-          </a:p>
-        </p:txBody>
-      </p:sp>
-      <p:sp>
-        <p:nvSpPr>
-          <p:cNvPr id="14" name="Text 12"/>
-          <p:cNvSpPr/>
-          <p:nvPr/>
-        </p:nvSpPr>
-        <p:spPr>
-          <a:xfrm>
-            <a:off x="7370064" y="2011680"/>
-            <a:ext cx="1828800" cy="594360"/>
-          </a:xfrm>
-          <a:prstGeom prst="rect">
-            <a:avLst/>
-          </a:prstGeom>
-          <a:noFill/>
-          <a:ln/>
-        </p:spPr>
-        <p:txBody>
-          <a:bodyPr wrap="square" rtlCol="0" anchor="ctr"/>
-          <a:lstStyle/>
-          <a:p>
-            <a:pPr algn="ctr" indent="0" marL="0">
-              <a:buNone/>
-            </a:pPr>
-            <a:r>
-              <a:rPr lang="en-US" sz="1100" b="1" dirty="0">
-                <a:solidFill>
-                  <a:srgbClr val="FFFFFF"/>
-                </a:solidFill>
-              </a:rPr>
-              <a:t>test_web</a:t>
-            </a:r>
-            <a:endParaRPr lang="en-US" sz="1100" dirty="0"/>
-          </a:p>
-        </p:txBody>
-      </p:sp>
-      <p:sp>
-        <p:nvSpPr>
-          <p:cNvPr id="15" name="Shape 13"/>
-          <p:cNvSpPr/>
-          <p:nvPr/>
-        </p:nvSpPr>
-        <p:spPr>
-          <a:xfrm>
-            <a:off x="9491472" y="1554480"/>
-            <a:ext cx="2011680" cy="1143000"/>
-          </a:xfrm>
-          <a:prstGeom prst="roundRect">
-            <a:avLst>
-              <a:gd name="adj" fmla="val 6400"/>
-            </a:avLst>
-          </a:prstGeom>
-          <a:solidFill>
-            <a:srgbClr val="3E7C4A"/>
-          </a:solidFill>
-          <a:ln/>
-        </p:spPr>
-      </p:sp>
-      <p:sp>
-        <p:nvSpPr>
-          <p:cNvPr id="16" name="Text 14"/>
-          <p:cNvSpPr/>
-          <p:nvPr/>
-        </p:nvSpPr>
-        <p:spPr>
-          <a:xfrm>
-            <a:off x="9582912" y="1627632"/>
-            <a:ext cx="457200" cy="365760"/>
-          </a:xfrm>
-          <a:prstGeom prst="rect">
-            <a:avLst/>
-          </a:prstGeom>
-          <a:noFill/>
-          <a:ln/>
-        </p:spPr>
-        <p:txBody>
-          <a:bodyPr wrap="square" rtlCol="0" anchor="ctr"/>
-          <a:lstStyle/>
-          <a:p>
-            <a:pPr indent="0" marL="0">
-              <a:buNone/>
-            </a:pPr>
-            <a:r>
-              <a:rPr lang="en-US" sz="1600" b="1" dirty="0">
-                <a:solidFill>
-                  <a:srgbClr val="FFFFFF"/>
-                </a:solidFill>
-              </a:rPr>
-              <a:t>✓</a:t>
-            </a:r>
-            <a:endParaRPr lang="en-US" sz="1600" dirty="0"/>
-          </a:p>
-        </p:txBody>
-      </p:sp>
-      <p:sp>
-        <p:nvSpPr>
-          <p:cNvPr id="17" name="Text 15"/>
-          <p:cNvSpPr/>
-          <p:nvPr/>
-        </p:nvSpPr>
-        <p:spPr>
-          <a:xfrm>
-            <a:off x="9582912" y="2011680"/>
-            <a:ext cx="1828800" cy="594360"/>
-          </a:xfrm>
-          <a:prstGeom prst="rect">
-            <a:avLst/>
-          </a:prstGeom>
-          <a:noFill/>
-          <a:ln/>
-        </p:spPr>
-        <p:txBody>
-          <a:bodyPr wrap="square" rtlCol="0" anchor="ctr"/>
-          <a:lstStyle/>
-          <a:p>
-            <a:pPr algn="ctr" indent="0" marL="0">
-              <a:buNone/>
-            </a:pPr>
-            <a:r>
-              <a:rPr lang="en-US" sz="1100" b="1" dirty="0">
-                <a:solidFill>
-                  <a:srgbClr val="FFFFFF"/>
-                </a:solidFill>
-              </a:rPr>
-              <a:t>nettoyage_liaison</a:t>
-            </a:r>
-            <a:endParaRPr lang="en-US" sz="1100" dirty="0"/>
-          </a:p>
-        </p:txBody>
-      </p:sp>
-      <p:sp>
-        <p:nvSpPr>
-          <p:cNvPr id="18" name="Shape 16"/>
-          <p:cNvSpPr/>
-          <p:nvPr/>
-        </p:nvSpPr>
-        <p:spPr>
-          <a:xfrm>
-            <a:off x="640080" y="3017520"/>
-            <a:ext cx="2011680" cy="1143000"/>
-          </a:xfrm>
-          <a:prstGeom prst="roundRect">
-            <a:avLst>
-              <a:gd name="adj" fmla="val 6400"/>
-            </a:avLst>
-          </a:prstGeom>
-          <a:solidFill>
-            <a:srgbClr val="3E7C4A"/>
-          </a:solidFill>
-          <a:ln/>
-        </p:spPr>
-      </p:sp>
-      <p:sp>
-        <p:nvSpPr>
-          <p:cNvPr id="19" name="Text 17"/>
-          <p:cNvSpPr/>
-          <p:nvPr/>
-        </p:nvSpPr>
-        <p:spPr>
-          <a:xfrm>
-            <a:off x="731520" y="3090672"/>
-            <a:ext cx="457200" cy="365760"/>
-          </a:xfrm>
-          <a:prstGeom prst="rect">
-            <a:avLst/>
-          </a:prstGeom>
-          <a:noFill/>
-          <a:ln/>
-        </p:spPr>
-        <p:txBody>
-          <a:bodyPr wrap="square" rtlCol="0" anchor="ctr"/>
-          <a:lstStyle/>
-          <a:p>
-            <a:pPr indent="0" marL="0">
-              <a:buNone/>
-            </a:pPr>
-            <a:r>
-              <a:rPr lang="en-US" sz="1600" b="1" dirty="0">
-                <a:solidFill>
-                  <a:srgbClr val="FFFFFF"/>
-                </a:solidFill>
-              </a:rPr>
-              <a:t>✓</a:t>
-            </a:r>
-            <a:endParaRPr lang="en-US" sz="1600" dirty="0"/>
-          </a:p>
-        </p:txBody>
-      </p:sp>
-      <p:sp>
-        <p:nvSpPr>
-          <p:cNvPr id="20" name="Text 18"/>
-          <p:cNvSpPr/>
-          <p:nvPr/>
-        </p:nvSpPr>
-        <p:spPr>
-          <a:xfrm>
-            <a:off x="731520" y="3474720"/>
-            <a:ext cx="1828800" cy="594360"/>
-          </a:xfrm>
-          <a:prstGeom prst="rect">
-            <a:avLst/>
-          </a:prstGeom>
-          <a:noFill/>
-          <a:ln/>
-        </p:spPr>
-        <p:txBody>
-          <a:bodyPr wrap="square" rtlCol="0" anchor="ctr"/>
-          <a:lstStyle/>
-          <a:p>
-            <a:pPr algn="ctr" indent="0" marL="0">
-              <a:buNone/>
-            </a:pPr>
-            <a:r>
-              <a:rPr lang="en-US" sz="1100" b="1" dirty="0">
-                <a:solidFill>
-                  <a:srgbClr val="FFFFFF"/>
-                </a:solidFill>
-              </a:rPr>
-              <a:t>test_liaison</a:t>
-            </a:r>
-            <a:endParaRPr lang="en-US" sz="1100" dirty="0"/>
-          </a:p>
-        </p:txBody>
-      </p:sp>
-      <p:sp>
-        <p:nvSpPr>
-          <p:cNvPr id="21" name="Shape 19"/>
-          <p:cNvSpPr/>
-          <p:nvPr/>
-        </p:nvSpPr>
-        <p:spPr>
-          <a:xfrm>
-            <a:off x="2852928" y="3017520"/>
-            <a:ext cx="2011680" cy="1143000"/>
-          </a:xfrm>
-          <a:prstGeom prst="roundRect">
-            <a:avLst>
-              <a:gd name="adj" fmla="val 6400"/>
-            </a:avLst>
-          </a:prstGeom>
-          <a:solidFill>
-            <a:srgbClr val="3E7C4A"/>
-          </a:solidFill>
-          <a:ln/>
-        </p:spPr>
-      </p:sp>
-      <p:sp>
-        <p:nvSpPr>
-          <p:cNvPr id="22" name="Text 20"/>
-          <p:cNvSpPr/>
-          <p:nvPr/>
-        </p:nvSpPr>
-        <p:spPr>
-          <a:xfrm>
-            <a:off x="2944368" y="3090672"/>
-            <a:ext cx="457200" cy="365760"/>
-          </a:xfrm>
-          <a:prstGeom prst="rect">
-            <a:avLst/>
-          </a:prstGeom>
-          <a:noFill/>
-          <a:ln/>
-        </p:spPr>
-        <p:txBody>
-          <a:bodyPr wrap="square" rtlCol="0" anchor="ctr"/>
-          <a:lstStyle/>
-          <a:p>
-            <a:pPr indent="0" marL="0">
-              <a:buNone/>
-            </a:pPr>
-            <a:r>
-              <a:rPr lang="en-US" sz="1600" b="1" dirty="0">
-                <a:solidFill>
-                  <a:srgbClr val="FFFFFF"/>
-                </a:solidFill>
-              </a:rPr>
-              <a:t>✓</a:t>
-            </a:r>
-            <a:endParaRPr lang="en-US" sz="1600" dirty="0"/>
-          </a:p>
-        </p:txBody>
-      </p:sp>
-      <p:sp>
-        <p:nvSpPr>
-          <p:cNvPr id="23" name="Text 21"/>
-          <p:cNvSpPr/>
-          <p:nvPr/>
-        </p:nvSpPr>
-        <p:spPr>
-          <a:xfrm>
-            <a:off x="2944368" y="3474720"/>
-            <a:ext cx="1828800" cy="594360"/>
-          </a:xfrm>
-          <a:prstGeom prst="rect">
-            <a:avLst/>
-          </a:prstGeom>
-          <a:noFill/>
-          <a:ln/>
-        </p:spPr>
-        <p:txBody>
-          <a:bodyPr wrap="square" rtlCol="0" anchor="ctr"/>
-          <a:lstStyle/>
-          <a:p>
-            <a:pPr algn="ctr" indent="0" marL="0">
-              <a:buNone/>
-            </a:pPr>
-            <a:r>
-              <a:rPr lang="en-US" sz="1100" b="1" dirty="0">
-                <a:solidFill>
-                  <a:srgbClr val="FFFFFF"/>
-                </a:solidFill>
-              </a:rPr>
-              <a:t>jointure</a:t>
-            </a:r>
-            <a:endParaRPr lang="en-US" sz="1100" dirty="0"/>
-          </a:p>
-        </p:txBody>
-      </p:sp>
-      <p:sp>
-        <p:nvSpPr>
-          <p:cNvPr id="24" name="Shape 22"/>
-          <p:cNvSpPr/>
-          <p:nvPr/>
-        </p:nvSpPr>
-        <p:spPr>
-          <a:xfrm>
-            <a:off x="5065776" y="3017520"/>
-            <a:ext cx="2011680" cy="1143000"/>
-          </a:xfrm>
-          <a:prstGeom prst="roundRect">
-            <a:avLst>
-              <a:gd name="adj" fmla="val 6400"/>
-            </a:avLst>
-          </a:prstGeom>
-          <a:solidFill>
-            <a:srgbClr val="3E7C4A"/>
-          </a:solidFill>
-          <a:ln/>
-        </p:spPr>
-      </p:sp>
-      <p:sp>
-        <p:nvSpPr>
-          <p:cNvPr id="25" name="Text 23"/>
-          <p:cNvSpPr/>
-          <p:nvPr/>
-        </p:nvSpPr>
-        <p:spPr>
-          <a:xfrm>
-            <a:off x="5157216" y="3090672"/>
-            <a:ext cx="457200" cy="365760"/>
-          </a:xfrm>
-          <a:prstGeom prst="rect">
-            <a:avLst/>
-          </a:prstGeom>
-          <a:noFill/>
-          <a:ln/>
-        </p:spPr>
-        <p:txBody>
-          <a:bodyPr wrap="square" rtlCol="0" anchor="ctr"/>
-          <a:lstStyle/>
-          <a:p>
-            <a:pPr indent="0" marL="0">
-              <a:buNone/>
-            </a:pPr>
-            <a:r>
-              <a:rPr lang="en-US" sz="1600" b="1" dirty="0">
-                <a:solidFill>
-                  <a:srgbClr val="FFFFFF"/>
-                </a:solidFill>
-              </a:rPr>
-              <a:t>✓</a:t>
-            </a:r>
-            <a:endParaRPr lang="en-US" sz="1600" dirty="0"/>
-          </a:p>
-        </p:txBody>
-      </p:sp>
-      <p:sp>
-        <p:nvSpPr>
-          <p:cNvPr id="26" name="Text 24"/>
-          <p:cNvSpPr/>
-          <p:nvPr/>
-        </p:nvSpPr>
-        <p:spPr>
-          <a:xfrm>
-            <a:off x="5157216" y="3474720"/>
-            <a:ext cx="1828800" cy="594360"/>
-          </a:xfrm>
-          <a:prstGeom prst="rect">
-            <a:avLst/>
-          </a:prstGeom>
-          <a:noFill/>
-          <a:ln/>
-        </p:spPr>
-        <p:txBody>
-          <a:bodyPr wrap="square" rtlCol="0" anchor="ctr"/>
-          <a:lstStyle/>
-          <a:p>
-            <a:pPr algn="ctr" indent="0" marL="0">
-              <a:buNone/>
-            </a:pPr>
-            <a:r>
-              <a:rPr lang="en-US" sz="1100" b="1" dirty="0">
-                <a:solidFill>
-                  <a:srgbClr val="FFFFFF"/>
-                </a:solidFill>
-              </a:rPr>
-              <a:t>test_jointure</a:t>
-            </a:r>
-            <a:endParaRPr lang="en-US" sz="1100" dirty="0"/>
-          </a:p>
-        </p:txBody>
-      </p:sp>
-      <p:sp>
-        <p:nvSpPr>
-          <p:cNvPr id="27" name="Shape 25"/>
-          <p:cNvSpPr/>
-          <p:nvPr/>
-        </p:nvSpPr>
-        <p:spPr>
-          <a:xfrm>
-            <a:off x="7278624" y="3017520"/>
-            <a:ext cx="2011680" cy="1143000"/>
-          </a:xfrm>
-          <a:prstGeom prst="roundRect">
-            <a:avLst>
-              <a:gd name="adj" fmla="val 6400"/>
-            </a:avLst>
-          </a:prstGeom>
-          <a:solidFill>
-            <a:srgbClr val="3E7C4A"/>
-          </a:solidFill>
-          <a:ln/>
-        </p:spPr>
-      </p:sp>
-      <p:sp>
-        <p:nvSpPr>
-          <p:cNvPr id="28" name="Text 26"/>
-          <p:cNvSpPr/>
-          <p:nvPr/>
-        </p:nvSpPr>
-        <p:spPr>
-          <a:xfrm>
-            <a:off x="7370064" y="3090672"/>
-            <a:ext cx="457200" cy="365760"/>
-          </a:xfrm>
-          <a:prstGeom prst="rect">
-            <a:avLst/>
-          </a:prstGeom>
-          <a:noFill/>
-          <a:ln/>
-        </p:spPr>
-        <p:txBody>
-          <a:bodyPr wrap="square" rtlCol="0" anchor="ctr"/>
-          <a:lstStyle/>
-          <a:p>
-            <a:pPr indent="0" marL="0">
-              <a:buNone/>
-            </a:pPr>
-            <a:r>
-              <a:rPr lang="en-US" sz="1600" b="1" dirty="0">
-                <a:solidFill>
-                  <a:srgbClr val="FFFFFF"/>
-                </a:solidFill>
-              </a:rPr>
-              <a:t>✓</a:t>
-            </a:r>
-            <a:endParaRPr lang="en-US" sz="1600" dirty="0"/>
-          </a:p>
-        </p:txBody>
-      </p:sp>
-      <p:sp>
-        <p:nvSpPr>
-          <p:cNvPr id="29" name="Text 27"/>
-          <p:cNvSpPr/>
-          <p:nvPr/>
-        </p:nvSpPr>
-        <p:spPr>
-          <a:xfrm>
-            <a:off x="7370064" y="3474720"/>
-            <a:ext cx="1828800" cy="594360"/>
-          </a:xfrm>
-          <a:prstGeom prst="rect">
-            <a:avLst/>
-          </a:prstGeom>
-          <a:noFill/>
-          <a:ln/>
-        </p:spPr>
-        <p:txBody>
-          <a:bodyPr wrap="square" rtlCol="0" anchor="ctr"/>
-          <a:lstStyle/>
-          <a:p>
-            <a:pPr algn="ctr" indent="0" marL="0">
-              <a:buNone/>
-            </a:pPr>
-            <a:r>
-              <a:rPr lang="en-US" sz="1100" b="1" dirty="0">
-                <a:solidFill>
-                  <a:srgbClr val="FFFFFF"/>
-                </a:solidFill>
-              </a:rPr>
-              <a:t>calcul_ca</a:t>
-            </a:r>
-            <a:endParaRPr lang="en-US" sz="1100" dirty="0"/>
-          </a:p>
-        </p:txBody>
-      </p:sp>
-      <p:sp>
-        <p:nvSpPr>
-          <p:cNvPr id="30" name="Shape 28"/>
-          <p:cNvSpPr/>
-          <p:nvPr/>
-        </p:nvSpPr>
-        <p:spPr>
-          <a:xfrm>
-            <a:off x="9491472" y="3017520"/>
-            <a:ext cx="2011680" cy="1143000"/>
-          </a:xfrm>
-          <a:prstGeom prst="roundRect">
-            <a:avLst>
-              <a:gd name="adj" fmla="val 6400"/>
-            </a:avLst>
-          </a:prstGeom>
-          <a:solidFill>
-            <a:srgbClr val="3E7C4A"/>
-          </a:solidFill>
-          <a:ln/>
-        </p:spPr>
-      </p:sp>
-      <p:sp>
-        <p:nvSpPr>
-          <p:cNvPr id="31" name="Text 29"/>
-          <p:cNvSpPr/>
-          <p:nvPr/>
-        </p:nvSpPr>
-        <p:spPr>
-          <a:xfrm>
-            <a:off x="9582912" y="3090672"/>
-            <a:ext cx="457200" cy="365760"/>
-          </a:xfrm>
-          <a:prstGeom prst="rect">
-            <a:avLst/>
-          </a:prstGeom>
-          <a:noFill/>
-          <a:ln/>
-        </p:spPr>
-        <p:txBody>
-          <a:bodyPr wrap="square" rtlCol="0" anchor="ctr"/>
-          <a:lstStyle/>
-          <a:p>
-            <a:pPr indent="0" marL="0">
-              <a:buNone/>
-            </a:pPr>
-            <a:r>
-              <a:rPr lang="en-US" sz="1600" b="1" dirty="0">
-                <a:solidFill>
-                  <a:srgbClr val="FFFFFF"/>
-                </a:solidFill>
-              </a:rPr>
-              <a:t>✓</a:t>
-            </a:r>
-            <a:endParaRPr lang="en-US" sz="1600" dirty="0"/>
-          </a:p>
-        </p:txBody>
-      </p:sp>
-      <p:sp>
-        <p:nvSpPr>
-          <p:cNvPr id="32" name="Text 30"/>
-          <p:cNvSpPr/>
-          <p:nvPr/>
-        </p:nvSpPr>
-        <p:spPr>
-          <a:xfrm>
-            <a:off x="9582912" y="3474720"/>
-            <a:ext cx="1828800" cy="594360"/>
-          </a:xfrm>
-          <a:prstGeom prst="rect">
-            <a:avLst/>
-          </a:prstGeom>
-          <a:noFill/>
-          <a:ln/>
-        </p:spPr>
-        <p:txBody>
-          <a:bodyPr wrap="square" rtlCol="0" anchor="ctr"/>
-          <a:lstStyle/>
-          <a:p>
-            <a:pPr algn="ctr" indent="0" marL="0">
-              <a:buNone/>
-            </a:pPr>
-            <a:r>
-              <a:rPr lang="en-US" sz="1100" b="1" dirty="0">
-                <a:solidFill>
-                  <a:srgbClr val="FFFFFF"/>
-                </a:solidFill>
-              </a:rPr>
-              <a:t>test_ca</a:t>
-            </a:r>
-            <a:endParaRPr lang="en-US" sz="1100" dirty="0"/>
-          </a:p>
-        </p:txBody>
-      </p:sp>
-      <p:sp>
-        <p:nvSpPr>
-          <p:cNvPr id="33" name="Text 31"/>
-          <p:cNvSpPr/>
-          <p:nvPr/>
-        </p:nvSpPr>
-        <p:spPr>
-          <a:xfrm>
-            <a:off x="640080" y="4709160"/>
-            <a:ext cx="10881360" cy="457200"/>
-          </a:xfrm>
-          <a:prstGeom prst="rect">
-            <a:avLst/>
-          </a:prstGeom>
-          <a:noFill/>
-          <a:ln/>
-        </p:spPr>
-        <p:txBody>
-          <a:bodyPr wrap="square" rtlCol="0" anchor="ctr"/>
-          <a:lstStyle/>
-          <a:p>
-            <a:pPr indent="0" marL="0">
-              <a:buNone/>
-            </a:pPr>
-            <a:r>
-              <a:rPr lang="en-US" sz="1300" i="1" dirty="0">
-                <a:solidFill>
-                  <a:srgbClr val="5A5550"/>
-                </a:solidFill>
-              </a:rPr>
-              <a:t>10 tâches validées en exécution réelle dans Kestra — pipeline nettoyage → jointure → chiffre d'affaires, chacune suivie de son test</a:t>
-            </a:r>
-            <a:endParaRPr lang="en-US" sz="1300" dirty="0"/>
-          </a:p>
-        </p:txBody>
-      </p:sp>
-      <p:sp>
-        <p:nvSpPr>
-          <p:cNvPr id="34" name="Text 32"/>
-          <p:cNvSpPr/>
-          <p:nvPr/>
-        </p:nvSpPr>
-        <p:spPr>
-          <a:xfrm>
-            <a:off x="640080" y="5166360"/>
-            <a:ext cx="10881360" cy="457200"/>
-          </a:xfrm>
-          <a:prstGeom prst="rect">
-            <a:avLst/>
-          </a:prstGeom>
-          <a:noFill/>
-          <a:ln/>
-        </p:spPr>
-        <p:txBody>
-          <a:bodyPr wrap="square" rtlCol="0" anchor="ctr"/>
-          <a:lstStyle/>
-          <a:p>
-            <a:pPr indent="0" marL="0">
-              <a:buNone/>
-            </a:pPr>
-            <a:r>
-              <a:rPr lang="en-US" sz="1200" b="1" dirty="0">
-                <a:solidFill>
-                  <a:srgbClr val="6B1233"/>
-                </a:solidFill>
-              </a:rPr>
-              <a:t>Étape suivante : intégration du script Python de détection z-score (voir diapositive « défis techniques »)</a:t>
+              <a:rPr lang="en-US" sz="1200" i="1" dirty="0">
+                <a:solidFill>
+                  <a:srgbClr val="7A7085"/>
+                </a:solidFill>
+              </a:rPr>
+              <a:t>Capture d'écran réelle de Kestra (onglet Topology) — déclencheur, nettoyages en parallèle (3 branches), suite du pipeline, comptage et Switch de routage des extractions</a:t>
             </a:r>
             <a:endParaRPr lang="en-US" sz="1200" dirty="0"/>
           </a:p>
         </p:txBody>
       </p:sp>
+      <p:pic>
+        <p:nvPicPr>
+          <p:cNvPr id="4" name="Image 0" descr="/home/claude/pptx_work2/topology_new.png">    </p:cNvPr>
+          <p:cNvPicPr>
+            <a:picLocks noChangeAspect="1"/>
+          </p:cNvPicPr>
+          <p:nvPr/>
+        </p:nvPicPr>
+        <p:blipFill>
+          <a:blip r:embed="rId1"/>
+          <a:stretch>
+            <a:fillRect/>
+          </a:stretch>
+        </p:blipFill>
+        <p:spPr>
+          <a:xfrm>
+            <a:off x="4160520" y="1280160"/>
+            <a:ext cx="3931920" cy="5641848"/>
+          </a:xfrm>
+          <a:prstGeom prst="rect">
+            <a:avLst/>
+          </a:prstGeom>
+        </p:spPr>
+      </p:pic>
     </p:spTree>
   </p:cSld>
   <p:clrMapOvr>
@@ -6006,8 +5873,8 @@
         </p:nvSpPr>
         <p:spPr>
           <a:xfrm>
-            <a:off x="640080" y="457200"/>
-            <a:ext cx="10881360" cy="640080"/>
+            <a:off x="640080" y="365760"/>
+            <a:ext cx="10881360" cy="548640"/>
           </a:xfrm>
           <a:prstGeom prst="rect">
             <a:avLst/>
@@ -6023,14 +5890,922 @@
               <a:buNone/>
             </a:pPr>
             <a:r>
-              <a:rPr lang="en-US" sz="3000" b="1" dirty="0">
-                <a:solidFill>
-                  <a:srgbClr val="1F1B18"/>
+              <a:rPr lang="en-US" sz="2800" b="1" dirty="0">
+                <a:solidFill>
+                  <a:srgbClr val="4A3363"/>
                 </a:solidFill>
                 <a:latin typeface="Georgia" pitchFamily="34" charset="0"/>
                 <a:ea typeface="Georgia" pitchFamily="34" charset="-122"/>
                 <a:cs typeface="Georgia" pitchFamily="34" charset="-120"/>
               </a:rPr>
+              <a:t>Exécution complète réussie</a:t>
+            </a:r>
+            <a:endParaRPr lang="en-US" sz="2800" dirty="0"/>
+          </a:p>
+        </p:txBody>
+      </p:sp>
+      <p:sp>
+        <p:nvSpPr>
+          <p:cNvPr id="3" name="Text 1"/>
+          <p:cNvSpPr/>
+          <p:nvPr/>
+        </p:nvSpPr>
+        <p:spPr>
+          <a:xfrm>
+            <a:off x="640080" y="868680"/>
+            <a:ext cx="10881360" cy="365760"/>
+          </a:xfrm>
+          <a:prstGeom prst="rect">
+            <a:avLst/>
+          </a:prstGeom>
+          <a:noFill/>
+          <a:ln/>
+        </p:spPr>
+        <p:txBody>
+          <a:bodyPr wrap="square" rtlCol="0" anchor="ctr"/>
+          <a:lstStyle/>
+          <a:p>
+            <a:pPr indent="0" marL="0">
+              <a:buNone/>
+            </a:pPr>
+            <a:r>
+              <a:rPr lang="en-US" sz="1200" i="1" dirty="0">
+                <a:solidFill>
+                  <a:srgbClr val="7A7085"/>
+                </a:solidFill>
+              </a:rPr>
+              <a:t>Exécution réelle et complète (capture Kestra) — les 3 nettoyages tournent bien en parallèle (barres alignées), puis jointure → CA → z-score → Switch → extractions premium/ordinaires, toutes en succès</a:t>
+            </a:r>
+            <a:endParaRPr lang="en-US" sz="1200" dirty="0"/>
+          </a:p>
+        </p:txBody>
+      </p:sp>
+      <p:pic>
+        <p:nvPicPr>
+          <p:cNvPr id="4" name="Image 0" descr="/home/claude/pptx_work2/gantt_new.png">    </p:cNvPr>
+          <p:cNvPicPr>
+            <a:picLocks noChangeAspect="1"/>
+          </p:cNvPicPr>
+          <p:nvPr/>
+        </p:nvPicPr>
+        <p:blipFill>
+          <a:blip r:embed="rId1"/>
+          <a:stretch>
+            <a:fillRect/>
+          </a:stretch>
+        </p:blipFill>
+        <p:spPr>
+          <a:xfrm>
+            <a:off x="502920" y="1371600"/>
+            <a:ext cx="11183112" cy="4700016"/>
+          </a:xfrm>
+          <a:prstGeom prst="rect">
+            <a:avLst/>
+          </a:prstGeom>
+        </p:spPr>
+      </p:pic>
+    </p:spTree>
+  </p:cSld>
+  <p:clrMapOvr>
+    <a:masterClrMapping/>
+  </p:clrMapOvr>
+</p:sld>
+</file>
+
+<file path=ppt/slides/slide8.xml><?xml version="1.0" encoding="utf-8"?>
+<p:sld xmlns:a="http://schemas.openxmlformats.org/drawingml/2006/main" xmlns:r="http://schemas.openxmlformats.org/officeDocument/2006/relationships" xmlns:p="http://schemas.openxmlformats.org/presentationml/2006/main">
+  <p:cSld name="Slide 8">
+    <p:bg>
+      <p:bgPr>
+        <a:solidFill>
+          <a:srgbClr val="FFFFFF"/>
+        </a:solidFill>
+      </p:bgPr>
+    </p:bg>
+    <p:spTree>
+      <p:nvGrpSpPr>
+        <p:cNvPr id="1" name=""/>
+        <p:cNvGrpSpPr/>
+        <p:nvPr/>
+      </p:nvGrpSpPr>
+      <p:grpSpPr>
+        <a:xfrm>
+          <a:off x="0" y="0"/>
+          <a:ext cx="0" cy="0"/>
+          <a:chOff x="0" y="0"/>
+          <a:chExt cx="0" cy="0"/>
+        </a:xfrm>
+      </p:grpSpPr>
+      <p:sp>
+        <p:nvSpPr>
+          <p:cNvPr id="2" name="Text 0"/>
+          <p:cNvSpPr/>
+          <p:nvPr/>
+        </p:nvSpPr>
+        <p:spPr>
+          <a:xfrm>
+            <a:off x="640080" y="457200"/>
+            <a:ext cx="10881360" cy="640080"/>
+          </a:xfrm>
+          <a:prstGeom prst="rect">
+            <a:avLst/>
+          </a:prstGeom>
+          <a:noFill/>
+          <a:ln/>
+        </p:spPr>
+        <p:txBody>
+          <a:bodyPr wrap="square" rtlCol="0" anchor="ctr"/>
+          <a:lstStyle/>
+          <a:p>
+            <a:pPr indent="0" marL="0">
+              <a:buNone/>
+            </a:pPr>
+            <a:r>
+              <a:rPr lang="en-US" sz="3000" b="1" dirty="0">
+                <a:solidFill>
+                  <a:srgbClr val="4A3363"/>
+                </a:solidFill>
+                <a:latin typeface="Georgia" pitchFamily="34" charset="0"/>
+                <a:ea typeface="Georgia" pitchFamily="34" charset="-122"/>
+                <a:cs typeface="Georgia" pitchFamily="34" charset="-120"/>
+              </a:rPr>
+              <a:t>Tests et résilience</a:t>
+            </a:r>
+            <a:endParaRPr lang="en-US" sz="3000" dirty="0"/>
+          </a:p>
+        </p:txBody>
+      </p:sp>
+      <p:sp>
+        <p:nvSpPr>
+          <p:cNvPr id="3" name="Shape 1"/>
+          <p:cNvSpPr/>
+          <p:nvPr/>
+        </p:nvSpPr>
+        <p:spPr>
+          <a:xfrm>
+            <a:off x="640080" y="1417320"/>
+            <a:ext cx="320040" cy="320040"/>
+          </a:xfrm>
+          <a:prstGeom prst="roundRect">
+            <a:avLst>
+              <a:gd name="adj" fmla="val 17143"/>
+            </a:avLst>
+          </a:prstGeom>
+          <a:solidFill>
+            <a:srgbClr val="E8B4C0"/>
+          </a:solidFill>
+          <a:ln/>
+        </p:spPr>
+      </p:sp>
+      <p:sp>
+        <p:nvSpPr>
+          <p:cNvPr id="4" name="Text 2"/>
+          <p:cNvSpPr/>
+          <p:nvPr/>
+        </p:nvSpPr>
+        <p:spPr>
+          <a:xfrm>
+            <a:off x="640080" y="1417320"/>
+            <a:ext cx="320040" cy="320040"/>
+          </a:xfrm>
+          <a:prstGeom prst="rect">
+            <a:avLst/>
+          </a:prstGeom>
+          <a:noFill/>
+          <a:ln/>
+        </p:spPr>
+        <p:txBody>
+          <a:bodyPr wrap="square" rtlCol="0" anchor="ctr"/>
+          <a:lstStyle/>
+          <a:p>
+            <a:pPr algn="ctr" indent="0" marL="0">
+              <a:buNone/>
+            </a:pPr>
+            <a:r>
+              <a:rPr lang="en-US" sz="1400" b="1" dirty="0">
+                <a:solidFill>
+                  <a:srgbClr val="FFFFFF"/>
+                </a:solidFill>
+              </a:rPr>
+              <a:t>✓</a:t>
+            </a:r>
+            <a:endParaRPr lang="en-US" sz="1400" dirty="0"/>
+          </a:p>
+        </p:txBody>
+      </p:sp>
+      <p:sp>
+        <p:nvSpPr>
+          <p:cNvPr id="5" name="Text 3"/>
+          <p:cNvSpPr/>
+          <p:nvPr/>
+        </p:nvSpPr>
+        <p:spPr>
+          <a:xfrm>
+            <a:off x="1143000" y="1389888"/>
+            <a:ext cx="3840480" cy="365760"/>
+          </a:xfrm>
+          <a:prstGeom prst="rect">
+            <a:avLst/>
+          </a:prstGeom>
+          <a:noFill/>
+          <a:ln/>
+        </p:spPr>
+        <p:txBody>
+          <a:bodyPr wrap="square" rtlCol="0" anchor="ctr"/>
+          <a:lstStyle/>
+          <a:p>
+            <a:pPr indent="0" marL="0">
+              <a:buNone/>
+            </a:pPr>
+            <a:r>
+              <a:rPr lang="en-US" sz="1300" b="1" dirty="0">
+                <a:solidFill>
+                  <a:srgbClr val="4A3363"/>
+                </a:solidFill>
+              </a:rPr>
+              <a:t>Absence de doublons</a:t>
+            </a:r>
+            <a:endParaRPr lang="en-US" sz="1300" dirty="0"/>
+          </a:p>
+        </p:txBody>
+      </p:sp>
+      <p:sp>
+        <p:nvSpPr>
+          <p:cNvPr id="6" name="Text 4"/>
+          <p:cNvSpPr/>
+          <p:nvPr/>
+        </p:nvSpPr>
+        <p:spPr>
+          <a:xfrm>
+            <a:off x="5074920" y="1389888"/>
+            <a:ext cx="5394960" cy="365760"/>
+          </a:xfrm>
+          <a:prstGeom prst="rect">
+            <a:avLst/>
+          </a:prstGeom>
+          <a:noFill/>
+          <a:ln/>
+        </p:spPr>
+        <p:txBody>
+          <a:bodyPr wrap="square" rtlCol="0" anchor="ctr"/>
+          <a:lstStyle/>
+          <a:p>
+            <a:pPr indent="0" marL="0">
+              <a:buNone/>
+            </a:pPr>
+            <a:r>
+              <a:rPr lang="en-US" sz="1150" dirty="0">
+                <a:solidFill>
+                  <a:srgbClr val="7A7085"/>
+                </a:solidFill>
+              </a:rPr>
+              <a:t>Sur erp, web et liaison, après nettoyage</a:t>
+            </a:r>
+            <a:endParaRPr lang="en-US" sz="1150" dirty="0"/>
+          </a:p>
+        </p:txBody>
+      </p:sp>
+      <p:sp>
+        <p:nvSpPr>
+          <p:cNvPr id="7" name="Shape 5"/>
+          <p:cNvSpPr/>
+          <p:nvPr/>
+        </p:nvSpPr>
+        <p:spPr>
+          <a:xfrm>
+            <a:off x="640080" y="1984248"/>
+            <a:ext cx="320040" cy="320040"/>
+          </a:xfrm>
+          <a:prstGeom prst="roundRect">
+            <a:avLst>
+              <a:gd name="adj" fmla="val 17143"/>
+            </a:avLst>
+          </a:prstGeom>
+          <a:solidFill>
+            <a:srgbClr val="E8B4C0"/>
+          </a:solidFill>
+          <a:ln/>
+        </p:spPr>
+      </p:sp>
+      <p:sp>
+        <p:nvSpPr>
+          <p:cNvPr id="8" name="Text 6"/>
+          <p:cNvSpPr/>
+          <p:nvPr/>
+        </p:nvSpPr>
+        <p:spPr>
+          <a:xfrm>
+            <a:off x="640080" y="1984248"/>
+            <a:ext cx="320040" cy="320040"/>
+          </a:xfrm>
+          <a:prstGeom prst="rect">
+            <a:avLst/>
+          </a:prstGeom>
+          <a:noFill/>
+          <a:ln/>
+        </p:spPr>
+        <p:txBody>
+          <a:bodyPr wrap="square" rtlCol="0" anchor="ctr"/>
+          <a:lstStyle/>
+          <a:p>
+            <a:pPr algn="ctr" indent="0" marL="0">
+              <a:buNone/>
+            </a:pPr>
+            <a:r>
+              <a:rPr lang="en-US" sz="1400" b="1" dirty="0">
+                <a:solidFill>
+                  <a:srgbClr val="FFFFFF"/>
+                </a:solidFill>
+              </a:rPr>
+              <a:t>✓</a:t>
+            </a:r>
+            <a:endParaRPr lang="en-US" sz="1400" dirty="0"/>
+          </a:p>
+        </p:txBody>
+      </p:sp>
+      <p:sp>
+        <p:nvSpPr>
+          <p:cNvPr id="9" name="Text 7"/>
+          <p:cNvSpPr/>
+          <p:nvPr/>
+        </p:nvSpPr>
+        <p:spPr>
+          <a:xfrm>
+            <a:off x="1143000" y="1956816"/>
+            <a:ext cx="3840480" cy="365760"/>
+          </a:xfrm>
+          <a:prstGeom prst="rect">
+            <a:avLst/>
+          </a:prstGeom>
+          <a:noFill/>
+          <a:ln/>
+        </p:spPr>
+        <p:txBody>
+          <a:bodyPr wrap="square" rtlCol="0" anchor="ctr"/>
+          <a:lstStyle/>
+          <a:p>
+            <a:pPr indent="0" marL="0">
+              <a:buNone/>
+            </a:pPr>
+            <a:r>
+              <a:rPr lang="en-US" sz="1300" b="1" dirty="0">
+                <a:solidFill>
+                  <a:srgbClr val="4A3363"/>
+                </a:solidFill>
+              </a:rPr>
+              <a:t>Absence de valeurs manquantes</a:t>
+            </a:r>
+            <a:endParaRPr lang="en-US" sz="1300" dirty="0"/>
+          </a:p>
+        </p:txBody>
+      </p:sp>
+      <p:sp>
+        <p:nvSpPr>
+          <p:cNvPr id="10" name="Text 8"/>
+          <p:cNvSpPr/>
+          <p:nvPr/>
+        </p:nvSpPr>
+        <p:spPr>
+          <a:xfrm>
+            <a:off x="5074920" y="1956816"/>
+            <a:ext cx="5394960" cy="365760"/>
+          </a:xfrm>
+          <a:prstGeom prst="rect">
+            <a:avLst/>
+          </a:prstGeom>
+          <a:noFill/>
+          <a:ln/>
+        </p:spPr>
+        <p:txBody>
+          <a:bodyPr wrap="square" rtlCol="0" anchor="ctr"/>
+          <a:lstStyle/>
+          <a:p>
+            <a:pPr indent="0" marL="0">
+              <a:buNone/>
+            </a:pPr>
+            <a:r>
+              <a:rPr lang="en-US" sz="1150" dirty="0">
+                <a:solidFill>
+                  <a:srgbClr val="7A7085"/>
+                </a:solidFill>
+              </a:rPr>
+              <a:t>Sur les clés primaires de chaque fichier source</a:t>
+            </a:r>
+            <a:endParaRPr lang="en-US" sz="1150" dirty="0"/>
+          </a:p>
+        </p:txBody>
+      </p:sp>
+      <p:sp>
+        <p:nvSpPr>
+          <p:cNvPr id="11" name="Shape 9"/>
+          <p:cNvSpPr/>
+          <p:nvPr/>
+        </p:nvSpPr>
+        <p:spPr>
+          <a:xfrm>
+            <a:off x="640080" y="2551176"/>
+            <a:ext cx="320040" cy="320040"/>
+          </a:xfrm>
+          <a:prstGeom prst="roundRect">
+            <a:avLst>
+              <a:gd name="adj" fmla="val 17143"/>
+            </a:avLst>
+          </a:prstGeom>
+          <a:solidFill>
+            <a:srgbClr val="E8B4C0"/>
+          </a:solidFill>
+          <a:ln/>
+        </p:spPr>
+      </p:sp>
+      <p:sp>
+        <p:nvSpPr>
+          <p:cNvPr id="12" name="Text 10"/>
+          <p:cNvSpPr/>
+          <p:nvPr/>
+        </p:nvSpPr>
+        <p:spPr>
+          <a:xfrm>
+            <a:off x="640080" y="2551176"/>
+            <a:ext cx="320040" cy="320040"/>
+          </a:xfrm>
+          <a:prstGeom prst="rect">
+            <a:avLst/>
+          </a:prstGeom>
+          <a:noFill/>
+          <a:ln/>
+        </p:spPr>
+        <p:txBody>
+          <a:bodyPr wrap="square" rtlCol="0" anchor="ctr"/>
+          <a:lstStyle/>
+          <a:p>
+            <a:pPr algn="ctr" indent="0" marL="0">
+              <a:buNone/>
+            </a:pPr>
+            <a:r>
+              <a:rPr lang="en-US" sz="1400" b="1" dirty="0">
+                <a:solidFill>
+                  <a:srgbClr val="FFFFFF"/>
+                </a:solidFill>
+              </a:rPr>
+              <a:t>✓</a:t>
+            </a:r>
+            <a:endParaRPr lang="en-US" sz="1400" dirty="0"/>
+          </a:p>
+        </p:txBody>
+      </p:sp>
+      <p:sp>
+        <p:nvSpPr>
+          <p:cNvPr id="13" name="Text 11"/>
+          <p:cNvSpPr/>
+          <p:nvPr/>
+        </p:nvSpPr>
+        <p:spPr>
+          <a:xfrm>
+            <a:off x="1143000" y="2523744"/>
+            <a:ext cx="3840480" cy="365760"/>
+          </a:xfrm>
+          <a:prstGeom prst="rect">
+            <a:avLst/>
+          </a:prstGeom>
+          <a:noFill/>
+          <a:ln/>
+        </p:spPr>
+        <p:txBody>
+          <a:bodyPr wrap="square" rtlCol="0" anchor="ctr"/>
+          <a:lstStyle/>
+          <a:p>
+            <a:pPr indent="0" marL="0">
+              <a:buNone/>
+            </a:pPr>
+            <a:r>
+              <a:rPr lang="en-US" sz="1300" b="1" dirty="0">
+                <a:solidFill>
+                  <a:srgbClr val="4A3363"/>
+                </a:solidFill>
+              </a:rPr>
+              <a:t>Cohérence de la jointure</a:t>
+            </a:r>
+            <a:endParaRPr lang="en-US" sz="1300" dirty="0"/>
+          </a:p>
+        </p:txBody>
+      </p:sp>
+      <p:sp>
+        <p:nvSpPr>
+          <p:cNvPr id="14" name="Text 12"/>
+          <p:cNvSpPr/>
+          <p:nvPr/>
+        </p:nvSpPr>
+        <p:spPr>
+          <a:xfrm>
+            <a:off x="5074920" y="2523744"/>
+            <a:ext cx="5394960" cy="365760"/>
+          </a:xfrm>
+          <a:prstGeom prst="rect">
+            <a:avLst/>
+          </a:prstGeom>
+          <a:noFill/>
+          <a:ln/>
+        </p:spPr>
+        <p:txBody>
+          <a:bodyPr wrap="square" rtlCol="0" anchor="ctr"/>
+          <a:lstStyle/>
+          <a:p>
+            <a:pPr indent="0" marL="0">
+              <a:buNone/>
+            </a:pPr>
+            <a:r>
+              <a:rPr lang="en-US" sz="1150" dirty="0">
+                <a:solidFill>
+                  <a:srgbClr val="7A7085"/>
+                </a:solidFill>
+              </a:rPr>
+              <a:t>Aucune ligne perdue ou dupliquée par le JOIN</a:t>
+            </a:r>
+            <a:endParaRPr lang="en-US" sz="1150" dirty="0"/>
+          </a:p>
+        </p:txBody>
+      </p:sp>
+      <p:sp>
+        <p:nvSpPr>
+          <p:cNvPr id="15" name="Shape 13"/>
+          <p:cNvSpPr/>
+          <p:nvPr/>
+        </p:nvSpPr>
+        <p:spPr>
+          <a:xfrm>
+            <a:off x="640080" y="3118104"/>
+            <a:ext cx="320040" cy="320040"/>
+          </a:xfrm>
+          <a:prstGeom prst="roundRect">
+            <a:avLst>
+              <a:gd name="adj" fmla="val 17143"/>
+            </a:avLst>
+          </a:prstGeom>
+          <a:solidFill>
+            <a:srgbClr val="E8B4C0"/>
+          </a:solidFill>
+          <a:ln/>
+        </p:spPr>
+      </p:sp>
+      <p:sp>
+        <p:nvSpPr>
+          <p:cNvPr id="16" name="Text 14"/>
+          <p:cNvSpPr/>
+          <p:nvPr/>
+        </p:nvSpPr>
+        <p:spPr>
+          <a:xfrm>
+            <a:off x="640080" y="3118104"/>
+            <a:ext cx="320040" cy="320040"/>
+          </a:xfrm>
+          <a:prstGeom prst="rect">
+            <a:avLst/>
+          </a:prstGeom>
+          <a:noFill/>
+          <a:ln/>
+        </p:spPr>
+        <p:txBody>
+          <a:bodyPr wrap="square" rtlCol="0" anchor="ctr"/>
+          <a:lstStyle/>
+          <a:p>
+            <a:pPr algn="ctr" indent="0" marL="0">
+              <a:buNone/>
+            </a:pPr>
+            <a:r>
+              <a:rPr lang="en-US" sz="1400" b="1" dirty="0">
+                <a:solidFill>
+                  <a:srgbClr val="FFFFFF"/>
+                </a:solidFill>
+              </a:rPr>
+              <a:t>✓</a:t>
+            </a:r>
+            <a:endParaRPr lang="en-US" sz="1400" dirty="0"/>
+          </a:p>
+        </p:txBody>
+      </p:sp>
+      <p:sp>
+        <p:nvSpPr>
+          <p:cNvPr id="17" name="Text 15"/>
+          <p:cNvSpPr/>
+          <p:nvPr/>
+        </p:nvSpPr>
+        <p:spPr>
+          <a:xfrm>
+            <a:off x="1143000" y="3090672"/>
+            <a:ext cx="3840480" cy="365760"/>
+          </a:xfrm>
+          <a:prstGeom prst="rect">
+            <a:avLst/>
+          </a:prstGeom>
+          <a:noFill/>
+          <a:ln/>
+        </p:spPr>
+        <p:txBody>
+          <a:bodyPr wrap="square" rtlCol="0" anchor="ctr"/>
+          <a:lstStyle/>
+          <a:p>
+            <a:pPr indent="0" marL="0">
+              <a:buNone/>
+            </a:pPr>
+            <a:r>
+              <a:rPr lang="en-US" sz="1300" b="1" dirty="0">
+                <a:solidFill>
+                  <a:srgbClr val="4A3363"/>
+                </a:solidFill>
+              </a:rPr>
+              <a:t>Cohérence du chiffre d'affaires</a:t>
+            </a:r>
+            <a:endParaRPr lang="en-US" sz="1300" dirty="0"/>
+          </a:p>
+        </p:txBody>
+      </p:sp>
+      <p:sp>
+        <p:nvSpPr>
+          <p:cNvPr id="18" name="Text 16"/>
+          <p:cNvSpPr/>
+          <p:nvPr/>
+        </p:nvSpPr>
+        <p:spPr>
+          <a:xfrm>
+            <a:off x="5074920" y="3090672"/>
+            <a:ext cx="5394960" cy="365760"/>
+          </a:xfrm>
+          <a:prstGeom prst="rect">
+            <a:avLst/>
+          </a:prstGeom>
+          <a:noFill/>
+          <a:ln/>
+        </p:spPr>
+        <p:txBody>
+          <a:bodyPr wrap="square" rtlCol="0" anchor="ctr"/>
+          <a:lstStyle/>
+          <a:p>
+            <a:pPr indent="0" marL="0">
+              <a:buNone/>
+            </a:pPr>
+            <a:r>
+              <a:rPr lang="en-US" sz="1150" dirty="0">
+                <a:solidFill>
+                  <a:srgbClr val="7A7085"/>
+                </a:solidFill>
+              </a:rPr>
+              <a:t>Somme du détail par produit = total calculé</a:t>
+            </a:r>
+            <a:endParaRPr lang="en-US" sz="1150" dirty="0"/>
+          </a:p>
+        </p:txBody>
+      </p:sp>
+      <p:sp>
+        <p:nvSpPr>
+          <p:cNvPr id="19" name="Shape 17"/>
+          <p:cNvSpPr/>
+          <p:nvPr/>
+        </p:nvSpPr>
+        <p:spPr>
+          <a:xfrm>
+            <a:off x="640080" y="3685032"/>
+            <a:ext cx="320040" cy="320040"/>
+          </a:xfrm>
+          <a:prstGeom prst="roundRect">
+            <a:avLst>
+              <a:gd name="adj" fmla="val 17143"/>
+            </a:avLst>
+          </a:prstGeom>
+          <a:solidFill>
+            <a:srgbClr val="E8B4C0"/>
+          </a:solidFill>
+          <a:ln/>
+        </p:spPr>
+      </p:sp>
+      <p:sp>
+        <p:nvSpPr>
+          <p:cNvPr id="20" name="Text 18"/>
+          <p:cNvSpPr/>
+          <p:nvPr/>
+        </p:nvSpPr>
+        <p:spPr>
+          <a:xfrm>
+            <a:off x="640080" y="3685032"/>
+            <a:ext cx="320040" cy="320040"/>
+          </a:xfrm>
+          <a:prstGeom prst="rect">
+            <a:avLst/>
+          </a:prstGeom>
+          <a:noFill/>
+          <a:ln/>
+        </p:spPr>
+        <p:txBody>
+          <a:bodyPr wrap="square" rtlCol="0" anchor="ctr"/>
+          <a:lstStyle/>
+          <a:p>
+            <a:pPr algn="ctr" indent="0" marL="0">
+              <a:buNone/>
+            </a:pPr>
+            <a:r>
+              <a:rPr lang="en-US" sz="1400" b="1" dirty="0">
+                <a:solidFill>
+                  <a:srgbClr val="FFFFFF"/>
+                </a:solidFill>
+              </a:rPr>
+              <a:t>✓</a:t>
+            </a:r>
+            <a:endParaRPr lang="en-US" sz="1400" dirty="0"/>
+          </a:p>
+        </p:txBody>
+      </p:sp>
+      <p:sp>
+        <p:nvSpPr>
+          <p:cNvPr id="21" name="Text 19"/>
+          <p:cNvSpPr/>
+          <p:nvPr/>
+        </p:nvSpPr>
+        <p:spPr>
+          <a:xfrm>
+            <a:off x="1143000" y="3657600"/>
+            <a:ext cx="3840480" cy="365760"/>
+          </a:xfrm>
+          <a:prstGeom prst="rect">
+            <a:avLst/>
+          </a:prstGeom>
+          <a:noFill/>
+          <a:ln/>
+        </p:spPr>
+        <p:txBody>
+          <a:bodyPr wrap="square" rtlCol="0" anchor="ctr"/>
+          <a:lstStyle/>
+          <a:p>
+            <a:pPr indent="0" marL="0">
+              <a:buNone/>
+            </a:pPr>
+            <a:r>
+              <a:rPr lang="en-US" sz="1300" b="1" dirty="0">
+                <a:solidFill>
+                  <a:srgbClr val="4A3363"/>
+                </a:solidFill>
+              </a:rPr>
+              <a:t>Cohérence du z-score</a:t>
+            </a:r>
+            <a:endParaRPr lang="en-US" sz="1300" dirty="0"/>
+          </a:p>
+        </p:txBody>
+      </p:sp>
+      <p:sp>
+        <p:nvSpPr>
+          <p:cNvPr id="22" name="Text 20"/>
+          <p:cNvSpPr/>
+          <p:nvPr/>
+        </p:nvSpPr>
+        <p:spPr>
+          <a:xfrm>
+            <a:off x="5074920" y="3657600"/>
+            <a:ext cx="5394960" cy="365760"/>
+          </a:xfrm>
+          <a:prstGeom prst="rect">
+            <a:avLst/>
+          </a:prstGeom>
+          <a:noFill/>
+          <a:ln/>
+        </p:spPr>
+        <p:txBody>
+          <a:bodyPr wrap="square" rtlCol="0" anchor="ctr"/>
+          <a:lstStyle/>
+          <a:p>
+            <a:pPr indent="0" marL="0">
+              <a:buNone/>
+            </a:pPr>
+            <a:r>
+              <a:rPr lang="en-US" sz="1150" dirty="0">
+                <a:solidFill>
+                  <a:srgbClr val="7A7085"/>
+                </a:solidFill>
+              </a:rPr>
+              <a:t>Classification premium/ordinaire respecte bien le seuil de 2</a:t>
+            </a:r>
+            <a:endParaRPr lang="en-US" sz="1150" dirty="0"/>
+          </a:p>
+        </p:txBody>
+      </p:sp>
+      <p:sp>
+        <p:nvSpPr>
+          <p:cNvPr id="23" name="Shape 21"/>
+          <p:cNvSpPr/>
+          <p:nvPr/>
+        </p:nvSpPr>
+        <p:spPr>
+          <a:xfrm>
+            <a:off x="640080" y="4709160"/>
+            <a:ext cx="10881360" cy="1463040"/>
+          </a:xfrm>
+          <a:prstGeom prst="rect">
+            <a:avLst/>
+          </a:prstGeom>
+          <a:solidFill>
+            <a:srgbClr val="8862A8"/>
+          </a:solidFill>
+          <a:ln/>
+        </p:spPr>
+      </p:sp>
+      <p:sp>
+        <p:nvSpPr>
+          <p:cNvPr id="24" name="Text 22"/>
+          <p:cNvSpPr/>
+          <p:nvPr/>
+        </p:nvSpPr>
+        <p:spPr>
+          <a:xfrm>
+            <a:off x="914400" y="4892040"/>
+            <a:ext cx="10332720" cy="1097280"/>
+          </a:xfrm>
+          <a:prstGeom prst="rect">
+            <a:avLst/>
+          </a:prstGeom>
+          <a:noFill/>
+          <a:ln/>
+        </p:spPr>
+        <p:txBody>
+          <a:bodyPr wrap="square" rtlCol="0" anchor="ctr"/>
+          <a:lstStyle/>
+          <a:p>
+            <a:pPr indent="0" marL="0">
+              <a:buNone/>
+            </a:pPr>
+            <a:r>
+              <a:rPr lang="en-US" sz="1300" dirty="0">
+                <a:solidFill>
+                  <a:srgbClr val="FFFFFF"/>
+                </a:solidFill>
+              </a:rPr>
+              <a:t>Chaque test utilise la fonction error() de DuckDB : un contrôle échoué fait échouer la tâche, déclenche jusqu'à 3 tentatives (retry), puis une alerte automatique si l'échec persiste — plutôt que de laisser passer une donnée invalide.</a:t>
+            </a:r>
+            <a:endParaRPr lang="en-US" sz="1300" dirty="0"/>
+          </a:p>
+        </p:txBody>
+      </p:sp>
+    </p:spTree>
+  </p:cSld>
+  <p:clrMapOvr>
+    <a:masterClrMapping/>
+  </p:clrMapOvr>
+</p:sld>
+</file>
+
+<file path=ppt/slides/slide9.xml><?xml version="1.0" encoding="utf-8"?>
+<p:sld xmlns:a="http://schemas.openxmlformats.org/drawingml/2006/main" xmlns:r="http://schemas.openxmlformats.org/officeDocument/2006/relationships" xmlns:p="http://schemas.openxmlformats.org/presentationml/2006/main">
+  <p:cSld name="Slide 9">
+    <p:bg>
+      <p:bgPr>
+        <a:solidFill>
+          <a:srgbClr val="FFFFFF"/>
+        </a:solidFill>
+      </p:bgPr>
+    </p:bg>
+    <p:spTree>
+      <p:nvGrpSpPr>
+        <p:cNvPr id="1" name=""/>
+        <p:cNvGrpSpPr/>
+        <p:nvPr/>
+      </p:nvGrpSpPr>
+      <p:grpSpPr>
+        <a:xfrm>
+          <a:off x="0" y="0"/>
+          <a:ext cx="0" cy="0"/>
+          <a:chOff x="0" y="0"/>
+          <a:chExt cx="0" cy="0"/>
+        </a:xfrm>
+      </p:grpSpPr>
+      <p:sp>
+        <p:nvSpPr>
+          <p:cNvPr id="2" name="Text 0"/>
+          <p:cNvSpPr/>
+          <p:nvPr/>
+        </p:nvSpPr>
+        <p:spPr>
+          <a:xfrm>
+            <a:off x="640080" y="457200"/>
+            <a:ext cx="10881360" cy="640080"/>
+          </a:xfrm>
+          <a:prstGeom prst="rect">
+            <a:avLst/>
+          </a:prstGeom>
+          <a:noFill/>
+          <a:ln/>
+        </p:spPr>
+        <p:txBody>
+          <a:bodyPr wrap="square" rtlCol="0" anchor="ctr"/>
+          <a:lstStyle/>
+          <a:p>
+            <a:pPr indent="0" marL="0">
+              <a:buNone/>
+            </a:pPr>
+            <a:r>
+              <a:rPr lang="en-US" sz="3000" b="1" dirty="0">
+                <a:solidFill>
+                  <a:srgbClr val="4A3363"/>
+                </a:solidFill>
+                <a:latin typeface="Georgia" pitchFamily="34" charset="0"/>
+                <a:ea typeface="Georgia" pitchFamily="34" charset="-122"/>
+                <a:cs typeface="Georgia" pitchFamily="34" charset="-120"/>
+              </a:rPr>
               <a:t>Résultats validés</a:t>
             </a:r>
             <a:endParaRPr lang="en-US" sz="3000" dirty="0"/>
@@ -6039,7 +6814,7 @@
       </p:sp>
       <p:graphicFrame>
         <p:nvGraphicFramePr>
-          <p:cNvPr id="8" name="Table 0"/>
+          <p:cNvPr id="10" name="Table 0"/>
           <p:cNvGraphicFramePr>
             <a:graphicFrameLocks noGrp="1"/>
           </p:cNvGraphicFramePr>
@@ -6087,7 +6862,7 @@
                   <a:tcPr marL="91440" marR="91440" marT="45720" marB="45720">
                     <a:lnL w="6350" cap="flat" cmpd="sng" algn="ctr">
                       <a:solidFill>
-                        <a:srgbClr val="DEDAD4"/>
+                        <a:srgbClr val="E5D5C3"/>
                       </a:solidFill>
                       <a:prstDash val="solid"/>
                       <a:round/>
@@ -6096,7 +6871,7 @@
                     </a:lnL>
                     <a:lnR w="6350" cap="flat" cmpd="sng" algn="ctr">
                       <a:solidFill>
-                        <a:srgbClr val="DEDAD4"/>
+                        <a:srgbClr val="E5D5C3"/>
                       </a:solidFill>
                       <a:prstDash val="solid"/>
                       <a:round/>
@@ -6105,7 +6880,7 @@
                     </a:lnR>
                     <a:lnT w="6350" cap="flat" cmpd="sng" algn="ctr">
                       <a:solidFill>
-                        <a:srgbClr val="DEDAD4"/>
+                        <a:srgbClr val="E5D5C3"/>
                       </a:solidFill>
                       <a:prstDash val="solid"/>
                       <a:round/>
@@ -6114,7 +6889,7 @@
                     </a:lnT>
                     <a:lnB w="6350" cap="flat" cmpd="sng" algn="ctr">
                       <a:solidFill>
-                        <a:srgbClr val="DEDAD4"/>
+                        <a:srgbClr val="E5D5C3"/>
                       </a:solidFill>
                       <a:prstDash val="solid"/>
                       <a:round/>
@@ -6122,7 +6897,7 @@
                       <a:tailEnd type="none" w="med" len="med"/>
                     </a:lnB>
                     <a:solidFill>
-                      <a:srgbClr val="6B1233"/>
+                      <a:srgbClr val="8862A8"/>
                     </a:solidFill>
                   </a:tcPr>
                 </a:tc>
@@ -6148,7 +6923,7 @@
                   <a:tcPr marL="91440" marR="91440" marT="45720" marB="45720">
                     <a:lnL w="6350" cap="flat" cmpd="sng" algn="ctr">
                       <a:solidFill>
-                        <a:srgbClr val="DEDAD4"/>
+                        <a:srgbClr val="E5D5C3"/>
                       </a:solidFill>
                       <a:prstDash val="solid"/>
                       <a:round/>
@@ -6157,7 +6932,7 @@
                     </a:lnL>
                     <a:lnR w="6350" cap="flat" cmpd="sng" algn="ctr">
                       <a:solidFill>
-                        <a:srgbClr val="DEDAD4"/>
+                        <a:srgbClr val="E5D5C3"/>
                       </a:solidFill>
                       <a:prstDash val="solid"/>
                       <a:round/>
@@ -6166,7 +6941,7 @@
                     </a:lnR>
                     <a:lnT w="6350" cap="flat" cmpd="sng" algn="ctr">
                       <a:solidFill>
-                        <a:srgbClr val="DEDAD4"/>
+                        <a:srgbClr val="E5D5C3"/>
                       </a:solidFill>
                       <a:prstDash val="solid"/>
                       <a:round/>
@@ -6175,7 +6950,7 @@
                     </a:lnT>
                     <a:lnB w="6350" cap="flat" cmpd="sng" algn="ctr">
                       <a:solidFill>
-                        <a:srgbClr val="DEDAD4"/>
+                        <a:srgbClr val="E5D5C3"/>
                       </a:solidFill>
                       <a:prstDash val="solid"/>
                       <a:round/>
@@ -6183,7 +6958,7 @@
                       <a:tailEnd type="none" w="med" len="med"/>
                     </a:lnB>
                     <a:solidFill>
-                      <a:srgbClr val="6B1233"/>
+                      <a:srgbClr val="8862A8"/>
                     </a:solidFill>
                   </a:tcPr>
                 </a:tc>
@@ -6209,7 +6984,7 @@
                   <a:tcPr marL="91440" marR="91440" marT="45720" marB="45720">
                     <a:lnL w="6350" cap="flat" cmpd="sng" algn="ctr">
                       <a:solidFill>
-                        <a:srgbClr val="DEDAD4"/>
+                        <a:srgbClr val="E5D5C3"/>
                       </a:solidFill>
                       <a:prstDash val="solid"/>
                       <a:round/>
@@ -6218,7 +6993,7 @@
                     </a:lnL>
                     <a:lnR w="6350" cap="flat" cmpd="sng" algn="ctr">
                       <a:solidFill>
-                        <a:srgbClr val="DEDAD4"/>
+                        <a:srgbClr val="E5D5C3"/>
                       </a:solidFill>
                       <a:prstDash val="solid"/>
                       <a:round/>
@@ -6227,7 +7002,7 @@
                     </a:lnR>
                     <a:lnT w="6350" cap="flat" cmpd="sng" algn="ctr">
                       <a:solidFill>
-                        <a:srgbClr val="DEDAD4"/>
+                        <a:srgbClr val="E5D5C3"/>
                       </a:solidFill>
                       <a:prstDash val="solid"/>
                       <a:round/>
@@ -6236,7 +7011,7 @@
                     </a:lnT>
                     <a:lnB w="6350" cap="flat" cmpd="sng" algn="ctr">
                       <a:solidFill>
-                        <a:srgbClr val="DEDAD4"/>
+                        <a:srgbClr val="E5D5C3"/>
                       </a:solidFill>
                       <a:prstDash val="solid"/>
                       <a:round/>
@@ -6244,7 +7019,7 @@
                       <a:tailEnd type="none" w="med" len="med"/>
                     </a:lnB>
                     <a:solidFill>
-                      <a:srgbClr val="6B1233"/>
+                      <a:srgbClr val="8862A8"/>
                     </a:solidFill>
                   </a:tcPr>
                 </a:tc>
@@ -6261,7 +7036,7 @@
                       <a:r>
                         <a:rPr lang="en-US" sz="1200" dirty="0">
                           <a:solidFill>
-                            <a:srgbClr val="1F1B18"/>
+                            <a:srgbClr val="4A3363"/>
                           </a:solidFill>
                         </a:rPr>
                         <a:t>erp nettoyé</a:t>
@@ -6272,7 +7047,7 @@
                   <a:tcPr marL="91440" marR="91440" marT="45720" marB="45720">
                     <a:lnL w="6350" cap="flat" cmpd="sng" algn="ctr">
                       <a:solidFill>
-                        <a:srgbClr val="DEDAD4"/>
+                        <a:srgbClr val="E5D5C3"/>
                       </a:solidFill>
                       <a:prstDash val="solid"/>
                       <a:round/>
@@ -6281,7 +7056,7 @@
                     </a:lnL>
                     <a:lnR w="6350" cap="flat" cmpd="sng" algn="ctr">
                       <a:solidFill>
-                        <a:srgbClr val="DEDAD4"/>
+                        <a:srgbClr val="E5D5C3"/>
                       </a:solidFill>
                       <a:prstDash val="solid"/>
                       <a:round/>
@@ -6290,7 +7065,7 @@
                     </a:lnR>
                     <a:lnT w="6350" cap="flat" cmpd="sng" algn="ctr">
                       <a:solidFill>
-                        <a:srgbClr val="DEDAD4"/>
+                        <a:srgbClr val="E5D5C3"/>
                       </a:solidFill>
                       <a:prstDash val="solid"/>
                       <a:round/>
@@ -6299,7 +7074,7 @@
                     </a:lnT>
                     <a:lnB w="6350" cap="flat" cmpd="sng" algn="ctr">
                       <a:solidFill>
-                        <a:srgbClr val="DEDAD4"/>
+                        <a:srgbClr val="E5D5C3"/>
                       </a:solidFill>
                       <a:prstDash val="solid"/>
                       <a:round/>
@@ -6322,7 +7097,7 @@
                       <a:r>
                         <a:rPr lang="en-US" sz="1200" dirty="0">
                           <a:solidFill>
-                            <a:srgbClr val="1F1B18"/>
+                            <a:srgbClr val="4A3363"/>
                           </a:solidFill>
                         </a:rPr>
                         <a:t>825 lignes</a:t>
@@ -6333,7 +7108,7 @@
                   <a:tcPr marL="91440" marR="91440" marT="45720" marB="45720">
                     <a:lnL w="6350" cap="flat" cmpd="sng" algn="ctr">
                       <a:solidFill>
-                        <a:srgbClr val="DEDAD4"/>
+                        <a:srgbClr val="E5D5C3"/>
                       </a:solidFill>
                       <a:prstDash val="solid"/>
                       <a:round/>
@@ -6342,7 +7117,7 @@
                     </a:lnL>
                     <a:lnR w="6350" cap="flat" cmpd="sng" algn="ctr">
                       <a:solidFill>
-                        <a:srgbClr val="DEDAD4"/>
+                        <a:srgbClr val="E5D5C3"/>
                       </a:solidFill>
                       <a:prstDash val="solid"/>
                       <a:round/>
@@ -6351,7 +7126,7 @@
                     </a:lnR>
                     <a:lnT w="6350" cap="flat" cmpd="sng" algn="ctr">
                       <a:solidFill>
-                        <a:srgbClr val="DEDAD4"/>
+                        <a:srgbClr val="E5D5C3"/>
                       </a:solidFill>
                       <a:prstDash val="solid"/>
                       <a:round/>
@@ -6360,7 +7135,7 @@
                     </a:lnT>
                     <a:lnB w="6350" cap="flat" cmpd="sng" algn="ctr">
                       <a:solidFill>
-                        <a:srgbClr val="DEDAD4"/>
+                        <a:srgbClr val="E5D5C3"/>
                       </a:solidFill>
                       <a:prstDash val="solid"/>
                       <a:round/>
@@ -6383,7 +7158,7 @@
                       <a:r>
                         <a:rPr lang="en-US" sz="1200" dirty="0">
                           <a:solidFill>
-                            <a:srgbClr val="1F1B18"/>
+                            <a:srgbClr val="4A3363"/>
                           </a:solidFill>
                         </a:rPr>
                         <a:t>825 ✓</a:t>
@@ -6394,7 +7169,7 @@
                   <a:tcPr marL="91440" marR="91440" marT="45720" marB="45720">
                     <a:lnL w="6350" cap="flat" cmpd="sng" algn="ctr">
                       <a:solidFill>
-                        <a:srgbClr val="DEDAD4"/>
+                        <a:srgbClr val="E5D5C3"/>
                       </a:solidFill>
                       <a:prstDash val="solid"/>
                       <a:round/>
@@ -6403,7 +7178,7 @@
                     </a:lnL>
                     <a:lnR w="6350" cap="flat" cmpd="sng" algn="ctr">
                       <a:solidFill>
-                        <a:srgbClr val="DEDAD4"/>
+                        <a:srgbClr val="E5D5C3"/>
                       </a:solidFill>
                       <a:prstDash val="solid"/>
                       <a:round/>
@@ -6412,7 +7187,7 @@
                     </a:lnR>
                     <a:lnT w="6350" cap="flat" cmpd="sng" algn="ctr">
                       <a:solidFill>
-                        <a:srgbClr val="DEDAD4"/>
+                        <a:srgbClr val="E5D5C3"/>
                       </a:solidFill>
                       <a:prstDash val="solid"/>
                       <a:round/>
@@ -6421,7 +7196,7 @@
                     </a:lnT>
                     <a:lnB w="6350" cap="flat" cmpd="sng" algn="ctr">
                       <a:solidFill>
-                        <a:srgbClr val="DEDAD4"/>
+                        <a:srgbClr val="E5D5C3"/>
                       </a:solidFill>
                       <a:prstDash val="solid"/>
                       <a:round/>
@@ -6446,7 +7221,7 @@
                       <a:r>
                         <a:rPr lang="en-US" sz="1200" dirty="0">
                           <a:solidFill>
-                            <a:srgbClr val="1F1B18"/>
+                            <a:srgbClr val="4A3363"/>
                           </a:solidFill>
                         </a:rPr>
                         <a:t>liaison nettoyé</a:t>
@@ -6457,7 +7232,7 @@
                   <a:tcPr marL="91440" marR="91440" marT="45720" marB="45720">
                     <a:lnL w="6350" cap="flat" cmpd="sng" algn="ctr">
                       <a:solidFill>
-                        <a:srgbClr val="DEDAD4"/>
+                        <a:srgbClr val="E5D5C3"/>
                       </a:solidFill>
                       <a:prstDash val="solid"/>
                       <a:round/>
@@ -6466,7 +7241,7 @@
                     </a:lnL>
                     <a:lnR w="6350" cap="flat" cmpd="sng" algn="ctr">
                       <a:solidFill>
-                        <a:srgbClr val="DEDAD4"/>
+                        <a:srgbClr val="E5D5C3"/>
                       </a:solidFill>
                       <a:prstDash val="solid"/>
                       <a:round/>
@@ -6475,7 +7250,7 @@
                     </a:lnR>
                     <a:lnT w="6350" cap="flat" cmpd="sng" algn="ctr">
                       <a:solidFill>
-                        <a:srgbClr val="DEDAD4"/>
+                        <a:srgbClr val="E5D5C3"/>
                       </a:solidFill>
                       <a:prstDash val="solid"/>
                       <a:round/>
@@ -6484,7 +7259,7 @@
                     </a:lnT>
                     <a:lnB w="6350" cap="flat" cmpd="sng" algn="ctr">
                       <a:solidFill>
-                        <a:srgbClr val="DEDAD4"/>
+                        <a:srgbClr val="E5D5C3"/>
                       </a:solidFill>
                       <a:prstDash val="solid"/>
                       <a:round/>
@@ -6492,7 +7267,7 @@
                       <a:tailEnd type="none" w="med" len="med"/>
                     </a:lnB>
                     <a:solidFill>
-                      <a:srgbClr val="F7F5F2"/>
+                      <a:srgbClr val="F0E2CC"/>
                     </a:solidFill>
                   </a:tcPr>
                 </a:tc>
@@ -6507,7 +7282,7 @@
                       <a:r>
                         <a:rPr lang="en-US" sz="1200" dirty="0">
                           <a:solidFill>
-                            <a:srgbClr val="1F1B18"/>
+                            <a:srgbClr val="4A3363"/>
                           </a:solidFill>
                         </a:rPr>
                         <a:t>825 lignes</a:t>
@@ -6518,7 +7293,7 @@
                   <a:tcPr marL="91440" marR="91440" marT="45720" marB="45720">
                     <a:lnL w="6350" cap="flat" cmpd="sng" algn="ctr">
                       <a:solidFill>
-                        <a:srgbClr val="DEDAD4"/>
+                        <a:srgbClr val="E5D5C3"/>
                       </a:solidFill>
                       <a:prstDash val="solid"/>
                       <a:round/>
@@ -6527,7 +7302,7 @@
                     </a:lnL>
                     <a:lnR w="6350" cap="flat" cmpd="sng" algn="ctr">
                       <a:solidFill>
-                        <a:srgbClr val="DEDAD4"/>
+                        <a:srgbClr val="E5D5C3"/>
                       </a:solidFill>
                       <a:prstDash val="solid"/>
                       <a:round/>
@@ -6536,7 +7311,7 @@
                     </a:lnR>
                     <a:lnT w="6350" cap="flat" cmpd="sng" algn="ctr">
                       <a:solidFill>
-                        <a:srgbClr val="DEDAD4"/>
+                        <a:srgbClr val="E5D5C3"/>
                       </a:solidFill>
                       <a:prstDash val="solid"/>
                       <a:round/>
@@ -6545,7 +7320,7 @@
                     </a:lnT>
                     <a:lnB w="6350" cap="flat" cmpd="sng" algn="ctr">
                       <a:solidFill>
-                        <a:srgbClr val="DEDAD4"/>
+                        <a:srgbClr val="E5D5C3"/>
                       </a:solidFill>
                       <a:prstDash val="solid"/>
                       <a:round/>
@@ -6553,7 +7328,7 @@
                       <a:tailEnd type="none" w="med" len="med"/>
                     </a:lnB>
                     <a:solidFill>
-                      <a:srgbClr val="F7F5F2"/>
+                      <a:srgbClr val="F0E2CC"/>
                     </a:solidFill>
                   </a:tcPr>
                 </a:tc>
@@ -6568,7 +7343,7 @@
                       <a:r>
                         <a:rPr lang="en-US" sz="1200" dirty="0">
                           <a:solidFill>
-                            <a:srgbClr val="1F1B18"/>
+                            <a:srgbClr val="4A3363"/>
                           </a:solidFill>
                         </a:rPr>
                         <a:t>825 ✓</a:t>
@@ -6579,7 +7354,7 @@
                   <a:tcPr marL="91440" marR="91440" marT="45720" marB="45720">
                     <a:lnL w="6350" cap="flat" cmpd="sng" algn="ctr">
                       <a:solidFill>
-                        <a:srgbClr val="DEDAD4"/>
+                        <a:srgbClr val="E5D5C3"/>
                       </a:solidFill>
                       <a:prstDash val="solid"/>
                       <a:round/>
@@ -6588,7 +7363,7 @@
                     </a:lnL>
                     <a:lnR w="6350" cap="flat" cmpd="sng" algn="ctr">
                       <a:solidFill>
-                        <a:srgbClr val="DEDAD4"/>
+                        <a:srgbClr val="E5D5C3"/>
                       </a:solidFill>
                       <a:prstDash val="solid"/>
                       <a:round/>
@@ -6597,7 +7372,7 @@
                     </a:lnR>
                     <a:lnT w="6350" cap="flat" cmpd="sng" algn="ctr">
                       <a:solidFill>
-                        <a:srgbClr val="DEDAD4"/>
+                        <a:srgbClr val="E5D5C3"/>
                       </a:solidFill>
                       <a:prstDash val="solid"/>
                       <a:round/>
@@ -6606,7 +7381,7 @@
                     </a:lnT>
                     <a:lnB w="6350" cap="flat" cmpd="sng" algn="ctr">
                       <a:solidFill>
-                        <a:srgbClr val="DEDAD4"/>
+                        <a:srgbClr val="E5D5C3"/>
                       </a:solidFill>
                       <a:prstDash val="solid"/>
                       <a:round/>
@@ -6614,7 +7389,7 @@
                       <a:tailEnd type="none" w="med" len="med"/>
                     </a:lnB>
                     <a:solidFill>
-                      <a:srgbClr val="F7F5F2"/>
+                      <a:srgbClr val="F0E2CC"/>
                     </a:solidFill>
                   </a:tcPr>
                 </a:tc>
@@ -6631,7 +7406,7 @@
                       <a:r>
                         <a:rPr lang="en-US" sz="1200" dirty="0">
                           <a:solidFill>
-                            <a:srgbClr val="1F1B18"/>
+                            <a:srgbClr val="4A3363"/>
                           </a:solidFill>
                         </a:rPr>
                         <a:t>web nettoyé</a:t>
@@ -6642,7 +7417,7 @@
                   <a:tcPr marL="91440" marR="91440" marT="45720" marB="45720">
                     <a:lnL w="6350" cap="flat" cmpd="sng" algn="ctr">
                       <a:solidFill>
-                        <a:srgbClr val="DEDAD4"/>
+                        <a:srgbClr val="E5D5C3"/>
                       </a:solidFill>
                       <a:prstDash val="solid"/>
                       <a:round/>
@@ -6651,7 +7426,7 @@
                     </a:lnL>
                     <a:lnR w="6350" cap="flat" cmpd="sng" algn="ctr">
                       <a:solidFill>
-                        <a:srgbClr val="DEDAD4"/>
+                        <a:srgbClr val="E5D5C3"/>
                       </a:solidFill>
                       <a:prstDash val="solid"/>
                       <a:round/>
@@ -6660,7 +7435,7 @@
                     </a:lnR>
                     <a:lnT w="6350" cap="flat" cmpd="sng" algn="ctr">
                       <a:solidFill>
-                        <a:srgbClr val="DEDAD4"/>
+                        <a:srgbClr val="E5D5C3"/>
                       </a:solidFill>
                       <a:prstDash val="solid"/>
                       <a:round/>
@@ -6669,7 +7444,7 @@
                     </a:lnT>
                     <a:lnB w="6350" cap="flat" cmpd="sng" algn="ctr">
                       <a:solidFill>
-                        <a:srgbClr val="DEDAD4"/>
+                        <a:srgbClr val="E5D5C3"/>
                       </a:solidFill>
                       <a:prstDash val="solid"/>
                       <a:round/>
@@ -6692,7 +7467,7 @@
                       <a:r>
                         <a:rPr lang="en-US" sz="1200" dirty="0">
                           <a:solidFill>
-                            <a:srgbClr val="1F1B18"/>
+                            <a:srgbClr val="4A3363"/>
                           </a:solidFill>
                         </a:rPr>
                         <a:t>1428 lignes</a:t>
@@ -6703,7 +7478,7 @@
                   <a:tcPr marL="91440" marR="91440" marT="45720" marB="45720">
                     <a:lnL w="6350" cap="flat" cmpd="sng" algn="ctr">
                       <a:solidFill>
-                        <a:srgbClr val="DEDAD4"/>
+                        <a:srgbClr val="E5D5C3"/>
                       </a:solidFill>
                       <a:prstDash val="solid"/>
                       <a:round/>
@@ -6712,7 +7487,7 @@
                     </a:lnL>
                     <a:lnR w="6350" cap="flat" cmpd="sng" algn="ctr">
                       <a:solidFill>
-                        <a:srgbClr val="DEDAD4"/>
+                        <a:srgbClr val="E5D5C3"/>
                       </a:solidFill>
                       <a:prstDash val="solid"/>
                       <a:round/>
@@ -6721,7 +7496,7 @@
                     </a:lnR>
                     <a:lnT w="6350" cap="flat" cmpd="sng" algn="ctr">
                       <a:solidFill>
-                        <a:srgbClr val="DEDAD4"/>
+                        <a:srgbClr val="E5D5C3"/>
                       </a:solidFill>
                       <a:prstDash val="solid"/>
                       <a:round/>
@@ -6730,7 +7505,7 @@
                     </a:lnT>
                     <a:lnB w="6350" cap="flat" cmpd="sng" algn="ctr">
                       <a:solidFill>
-                        <a:srgbClr val="DEDAD4"/>
+                        <a:srgbClr val="E5D5C3"/>
                       </a:solidFill>
                       <a:prstDash val="solid"/>
                       <a:round/>
@@ -6753,7 +7528,7 @@
                       <a:r>
                         <a:rPr lang="en-US" sz="1200" dirty="0">
                           <a:solidFill>
-                            <a:srgbClr val="1F1B18"/>
+                            <a:srgbClr val="4A3363"/>
                           </a:solidFill>
                         </a:rPr>
                         <a:t>1428 ✓</a:t>
@@ -6764,7 +7539,7 @@
                   <a:tcPr marL="91440" marR="91440" marT="45720" marB="45720">
                     <a:lnL w="6350" cap="flat" cmpd="sng" algn="ctr">
                       <a:solidFill>
-                        <a:srgbClr val="DEDAD4"/>
+                        <a:srgbClr val="E5D5C3"/>
                       </a:solidFill>
                       <a:prstDash val="solid"/>
                       <a:round/>
@@ -6773,7 +7548,7 @@
                     </a:lnL>
                     <a:lnR w="6350" cap="flat" cmpd="sng" algn="ctr">
                       <a:solidFill>
-                        <a:srgbClr val="DEDAD4"/>
+                        <a:srgbClr val="E5D5C3"/>
                       </a:solidFill>
                       <a:prstDash val="solid"/>
                       <a:round/>
@@ -6782,7 +7557,7 @@
                     </a:lnR>
                     <a:lnT w="6350" cap="flat" cmpd="sng" algn="ctr">
                       <a:solidFill>
-                        <a:srgbClr val="DEDAD4"/>
+                        <a:srgbClr val="E5D5C3"/>
                       </a:solidFill>
                       <a:prstDash val="solid"/>
                       <a:round/>
@@ -6791,7 +7566,7 @@
                     </a:lnT>
                     <a:lnB w="6350" cap="flat" cmpd="sng" algn="ctr">
                       <a:solidFill>
-                        <a:srgbClr val="DEDAD4"/>
+                        <a:srgbClr val="E5D5C3"/>
                       </a:solidFill>
                       <a:prstDash val="solid"/>
                       <a:round/>
@@ -6816,7 +7591,7 @@
                       <a:r>
                         <a:rPr lang="en-US" sz="1200" dirty="0">
                           <a:solidFill>
-                            <a:srgbClr val="1F1B18"/>
+                            <a:srgbClr val="4A3363"/>
                           </a:solidFill>
                         </a:rPr>
                         <a:t>web dédoublonné</a:t>
@@ -6827,7 +7602,7 @@
                   <a:tcPr marL="91440" marR="91440" marT="45720" marB="45720">
                     <a:lnL w="6350" cap="flat" cmpd="sng" algn="ctr">
                       <a:solidFill>
-                        <a:srgbClr val="DEDAD4"/>
+                        <a:srgbClr val="E5D5C3"/>
                       </a:solidFill>
                       <a:prstDash val="solid"/>
                       <a:round/>
@@ -6836,7 +7611,7 @@
                     </a:lnL>
                     <a:lnR w="6350" cap="flat" cmpd="sng" algn="ctr">
                       <a:solidFill>
-                        <a:srgbClr val="DEDAD4"/>
+                        <a:srgbClr val="E5D5C3"/>
                       </a:solidFill>
                       <a:prstDash val="solid"/>
                       <a:round/>
@@ -6845,7 +7620,7 @@
                     </a:lnR>
                     <a:lnT w="6350" cap="flat" cmpd="sng" algn="ctr">
                       <a:solidFill>
-                        <a:srgbClr val="DEDAD4"/>
+                        <a:srgbClr val="E5D5C3"/>
                       </a:solidFill>
                       <a:prstDash val="solid"/>
                       <a:round/>
@@ -6854,7 +7629,7 @@
                     </a:lnT>
                     <a:lnB w="6350" cap="flat" cmpd="sng" algn="ctr">
                       <a:solidFill>
-                        <a:srgbClr val="DEDAD4"/>
+                        <a:srgbClr val="E5D5C3"/>
                       </a:solidFill>
                       <a:prstDash val="solid"/>
                       <a:round/>
@@ -6862,7 +7637,7 @@
                       <a:tailEnd type="none" w="med" len="med"/>
                     </a:lnB>
                     <a:solidFill>
-                      <a:srgbClr val="F7F5F2"/>
+                      <a:srgbClr val="F0E2CC"/>
                     </a:solidFill>
                   </a:tcPr>
                 </a:tc>
@@ -6877,7 +7652,7 @@
                       <a:r>
                         <a:rPr lang="en-US" sz="1200" dirty="0">
                           <a:solidFill>
-                            <a:srgbClr val="1F1B18"/>
+                            <a:srgbClr val="4A3363"/>
                           </a:solidFill>
                         </a:rPr>
                         <a:t>714 lignes</a:t>
@@ -6888,7 +7663,7 @@
                   <a:tcPr marL="91440" marR="91440" marT="45720" marB="45720">
                     <a:lnL w="6350" cap="flat" cmpd="sng" algn="ctr">
                       <a:solidFill>
-                        <a:srgbClr val="DEDAD4"/>
+                        <a:srgbClr val="E5D5C3"/>
                       </a:solidFill>
                       <a:prstDash val="solid"/>
                       <a:round/>
@@ -6897,7 +7672,7 @@
                     </a:lnL>
                     <a:lnR w="6350" cap="flat" cmpd="sng" algn="ctr">
                       <a:solidFill>
-                        <a:srgbClr val="DEDAD4"/>
+                        <a:srgbClr val="E5D5C3"/>
                       </a:solidFill>
                       <a:prstDash val="solid"/>
                       <a:round/>
@@ -6906,7 +7681,7 @@
                     </a:lnR>
                     <a:lnT w="6350" cap="flat" cmpd="sng" algn="ctr">
                       <a:solidFill>
-                        <a:srgbClr val="DEDAD4"/>
+                        <a:srgbClr val="E5D5C3"/>
                       </a:solidFill>
                       <a:prstDash val="solid"/>
                       <a:round/>
@@ -6915,7 +7690,7 @@
                     </a:lnT>
                     <a:lnB w="6350" cap="flat" cmpd="sng" algn="ctr">
                       <a:solidFill>
-                        <a:srgbClr val="DEDAD4"/>
+                        <a:srgbClr val="E5D5C3"/>
                       </a:solidFill>
                       <a:prstDash val="solid"/>
                       <a:round/>
@@ -6923,7 +7698,7 @@
                       <a:tailEnd type="none" w="med" len="med"/>
                     </a:lnB>
                     <a:solidFill>
-                      <a:srgbClr val="F7F5F2"/>
+                      <a:srgbClr val="F0E2CC"/>
                     </a:solidFill>
                   </a:tcPr>
                 </a:tc>
@@ -6938,7 +7713,7 @@
                       <a:r>
                         <a:rPr lang="en-US" sz="1200" dirty="0">
                           <a:solidFill>
-                            <a:srgbClr val="1F1B18"/>
+                            <a:srgbClr val="4A3363"/>
                           </a:solidFill>
                         </a:rPr>
                         <a:t>714 ✓</a:t>
@@ -6949,7 +7724,7 @@
                   <a:tcPr marL="91440" marR="91440" marT="45720" marB="45720">
                     <a:lnL w="6350" cap="flat" cmpd="sng" algn="ctr">
                       <a:solidFill>
-                        <a:srgbClr val="DEDAD4"/>
+                        <a:srgbClr val="E5D5C3"/>
                       </a:solidFill>
                       <a:prstDash val="solid"/>
                       <a:round/>
@@ -6958,7 +7733,7 @@
                     </a:lnL>
                     <a:lnR w="6350" cap="flat" cmpd="sng" algn="ctr">
                       <a:solidFill>
-                        <a:srgbClr val="DEDAD4"/>
+                        <a:srgbClr val="E5D5C3"/>
                       </a:solidFill>
                       <a:prstDash val="solid"/>
                       <a:round/>
@@ -6967,7 +7742,7 @@
                     </a:lnR>
                     <a:lnT w="6350" cap="flat" cmpd="sng" algn="ctr">
                       <a:solidFill>
-                        <a:srgbClr val="DEDAD4"/>
+                        <a:srgbClr val="E5D5C3"/>
                       </a:solidFill>
                       <a:prstDash val="solid"/>
                       <a:round/>
@@ -6976,7 +7751,7 @@
                     </a:lnT>
                     <a:lnB w="6350" cap="flat" cmpd="sng" algn="ctr">
                       <a:solidFill>
-                        <a:srgbClr val="DEDAD4"/>
+                        <a:srgbClr val="E5D5C3"/>
                       </a:solidFill>
                       <a:prstDash val="solid"/>
                       <a:round/>
@@ -6984,7 +7759,7 @@
                       <a:tailEnd type="none" w="med" len="med"/>
                     </a:lnB>
                     <a:solidFill>
-                      <a:srgbClr val="F7F5F2"/>
+                      <a:srgbClr val="F0E2CC"/>
                     </a:solidFill>
                   </a:tcPr>
                 </a:tc>
@@ -7001,7 +7776,7 @@
                       <a:r>
                         <a:rPr lang="en-US" sz="1200" dirty="0">
                           <a:solidFill>
-                            <a:srgbClr val="1F1B18"/>
+                            <a:srgbClr val="4A3363"/>
                           </a:solidFill>
                         </a:rPr>
                         <a:t>Fichier fusionné</a:t>
@@ -7012,7 +7787,7 @@
                   <a:tcPr marL="91440" marR="91440" marT="45720" marB="45720">
                     <a:lnL w="6350" cap="flat" cmpd="sng" algn="ctr">
                       <a:solidFill>
-                        <a:srgbClr val="DEDAD4"/>
+                        <a:srgbClr val="E5D5C3"/>
                       </a:solidFill>
                       <a:prstDash val="solid"/>
                       <a:round/>
@@ -7021,7 +7796,7 @@
                     </a:lnL>
                     <a:lnR w="6350" cap="flat" cmpd="sng" algn="ctr">
                       <a:solidFill>
-                        <a:srgbClr val="DEDAD4"/>
+                        <a:srgbClr val="E5D5C3"/>
                       </a:solidFill>
                       <a:prstDash val="solid"/>
                       <a:round/>
@@ -7030,7 +7805,7 @@
                     </a:lnR>
                     <a:lnT w="6350" cap="flat" cmpd="sng" algn="ctr">
                       <a:solidFill>
-                        <a:srgbClr val="DEDAD4"/>
+                        <a:srgbClr val="E5D5C3"/>
                       </a:solidFill>
                       <a:prstDash val="solid"/>
                       <a:round/>
@@ -7039,7 +7814,7 @@
                     </a:lnT>
                     <a:lnB w="6350" cap="flat" cmpd="sng" algn="ctr">
                       <a:solidFill>
-                        <a:srgbClr val="DEDAD4"/>
+                        <a:srgbClr val="E5D5C3"/>
                       </a:solidFill>
                       <a:prstDash val="solid"/>
                       <a:round/>
@@ -7062,7 +7837,7 @@
                       <a:r>
                         <a:rPr lang="en-US" sz="1200" dirty="0">
                           <a:solidFill>
-                            <a:srgbClr val="1F1B18"/>
+                            <a:srgbClr val="4A3363"/>
                           </a:solidFill>
                         </a:rPr>
                         <a:t>714 lignes</a:t>
@@ -7073,7 +7848,7 @@
                   <a:tcPr marL="91440" marR="91440" marT="45720" marB="45720">
                     <a:lnL w="6350" cap="flat" cmpd="sng" algn="ctr">
                       <a:solidFill>
-                        <a:srgbClr val="DEDAD4"/>
+                        <a:srgbClr val="E5D5C3"/>
                       </a:solidFill>
                       <a:prstDash val="solid"/>
                       <a:round/>
@@ -7082,7 +7857,7 @@
                     </a:lnL>
                     <a:lnR w="6350" cap="flat" cmpd="sng" algn="ctr">
                       <a:solidFill>
-                        <a:srgbClr val="DEDAD4"/>
+                        <a:srgbClr val="E5D5C3"/>
                       </a:solidFill>
                       <a:prstDash val="solid"/>
                       <a:round/>
@@ -7091,7 +7866,7 @@
                     </a:lnR>
                     <a:lnT w="6350" cap="flat" cmpd="sng" algn="ctr">
                       <a:solidFill>
-                        <a:srgbClr val="DEDAD4"/>
+                        <a:srgbClr val="E5D5C3"/>
                       </a:solidFill>
                       <a:prstDash val="solid"/>
                       <a:round/>
@@ -7100,7 +7875,7 @@
                     </a:lnT>
                     <a:lnB w="6350" cap="flat" cmpd="sng" algn="ctr">
                       <a:solidFill>
-                        <a:srgbClr val="DEDAD4"/>
+                        <a:srgbClr val="E5D5C3"/>
                       </a:solidFill>
                       <a:prstDash val="solid"/>
                       <a:round/>
@@ -7123,7 +7898,7 @@
                       <a:r>
                         <a:rPr lang="en-US" sz="1200" dirty="0">
                           <a:solidFill>
-                            <a:srgbClr val="1F1B18"/>
+                            <a:srgbClr val="4A3363"/>
                           </a:solidFill>
                         </a:rPr>
                         <a:t>714 ✓</a:t>
@@ -7134,7 +7909,7 @@
                   <a:tcPr marL="91440" marR="91440" marT="45720" marB="45720">
                     <a:lnL w="6350" cap="flat" cmpd="sng" algn="ctr">
                       <a:solidFill>
-                        <a:srgbClr val="DEDAD4"/>
+                        <a:srgbClr val="E5D5C3"/>
                       </a:solidFill>
                       <a:prstDash val="solid"/>
                       <a:round/>
@@ -7143,7 +7918,7 @@
                     </a:lnL>
                     <a:lnR w="6350" cap="flat" cmpd="sng" algn="ctr">
                       <a:solidFill>
-                        <a:srgbClr val="DEDAD4"/>
+                        <a:srgbClr val="E5D5C3"/>
                       </a:solidFill>
                       <a:prstDash val="solid"/>
                       <a:round/>
@@ -7152,7 +7927,7 @@
                     </a:lnR>
                     <a:lnT w="6350" cap="flat" cmpd="sng" algn="ctr">
                       <a:solidFill>
-                        <a:srgbClr val="DEDAD4"/>
+                        <a:srgbClr val="E5D5C3"/>
                       </a:solidFill>
                       <a:prstDash val="solid"/>
                       <a:round/>
@@ -7161,7 +7936,7 @@
                     </a:lnT>
                     <a:lnB w="6350" cap="flat" cmpd="sng" algn="ctr">
                       <a:solidFill>
-                        <a:srgbClr val="DEDAD4"/>
+                        <a:srgbClr val="E5D5C3"/>
                       </a:solidFill>
                       <a:prstDash val="solid"/>
                       <a:round/>
@@ -7186,7 +7961,7 @@
                       <a:r>
                         <a:rPr lang="en-US" sz="1200" dirty="0">
                           <a:solidFill>
-                            <a:srgbClr val="1F1B18"/>
+                            <a:srgbClr val="4A3363"/>
                           </a:solidFill>
                         </a:rPr>
                         <a:t>CA total</a:t>
@@ -7197,7 +7972,7 @@
                   <a:tcPr marL="91440" marR="91440" marT="45720" marB="45720">
                     <a:lnL w="6350" cap="flat" cmpd="sng" algn="ctr">
                       <a:solidFill>
-                        <a:srgbClr val="DEDAD4"/>
+                        <a:srgbClr val="E5D5C3"/>
                       </a:solidFill>
                       <a:prstDash val="solid"/>
                       <a:round/>
@@ -7206,7 +7981,7 @@
                     </a:lnL>
                     <a:lnR w="6350" cap="flat" cmpd="sng" algn="ctr">
                       <a:solidFill>
-                        <a:srgbClr val="DEDAD4"/>
+                        <a:srgbClr val="E5D5C3"/>
                       </a:solidFill>
                       <a:prstDash val="solid"/>
                       <a:round/>
@@ -7215,7 +7990,7 @@
                     </a:lnR>
                     <a:lnT w="6350" cap="flat" cmpd="sng" algn="ctr">
                       <a:solidFill>
-                        <a:srgbClr val="DEDAD4"/>
+                        <a:srgbClr val="E5D5C3"/>
                       </a:solidFill>
                       <a:prstDash val="solid"/>
                       <a:round/>
@@ -7224,7 +7999,7 @@
                     </a:lnT>
                     <a:lnB w="6350" cap="flat" cmpd="sng" algn="ctr">
                       <a:solidFill>
-                        <a:srgbClr val="DEDAD4"/>
+                        <a:srgbClr val="E5D5C3"/>
                       </a:solidFill>
                       <a:prstDash val="solid"/>
                       <a:round/>
@@ -7232,7 +8007,7 @@
                       <a:tailEnd type="none" w="med" len="med"/>
                     </a:lnB>
                     <a:solidFill>
-                      <a:srgbClr val="F7F5F2"/>
+                      <a:srgbClr val="F0E2CC"/>
                     </a:solidFill>
                   </a:tcPr>
                 </a:tc>
@@ -7247,7 +8022,7 @@
                       <a:r>
                         <a:rPr lang="en-US" sz="1200" dirty="0">
                           <a:solidFill>
-                            <a:srgbClr val="1F1B18"/>
+                            <a:srgbClr val="4A3363"/>
                           </a:solidFill>
                         </a:rPr>
                         <a:t>70 568,60 €</a:t>
@@ -7258,7 +8033,7 @@
                   <a:tcPr marL="91440" marR="91440" marT="45720" marB="45720">
                     <a:lnL w="6350" cap="flat" cmpd="sng" algn="ctr">
                       <a:solidFill>
-                        <a:srgbClr val="DEDAD4"/>
+                        <a:srgbClr val="E5D5C3"/>
                       </a:solidFill>
                       <a:prstDash val="solid"/>
                       <a:round/>
@@ -7267,7 +8042,7 @@
                     </a:lnL>
                     <a:lnR w="6350" cap="flat" cmpd="sng" algn="ctr">
                       <a:solidFill>
-                        <a:srgbClr val="DEDAD4"/>
+                        <a:srgbClr val="E5D5C3"/>
                       </a:solidFill>
                       <a:prstDash val="solid"/>
                       <a:round/>
@@ -7276,7 +8051,7 @@
                     </a:lnR>
                     <a:lnT w="6350" cap="flat" cmpd="sng" algn="ctr">
                       <a:solidFill>
-                        <a:srgbClr val="DEDAD4"/>
+                        <a:srgbClr val="E5D5C3"/>
                       </a:solidFill>
                       <a:prstDash val="solid"/>
                       <a:round/>
@@ -7285,7 +8060,7 @@
                     </a:lnT>
                     <a:lnB w="6350" cap="flat" cmpd="sng" algn="ctr">
                       <a:solidFill>
-                        <a:srgbClr val="DEDAD4"/>
+                        <a:srgbClr val="E5D5C3"/>
                       </a:solidFill>
                       <a:prstDash val="solid"/>
                       <a:round/>
@@ -7293,7 +8068,7 @@
                       <a:tailEnd type="none" w="med" len="med"/>
                     </a:lnB>
                     <a:solidFill>
-                      <a:srgbClr val="F7F5F2"/>
+                      <a:srgbClr val="F0E2CC"/>
                     </a:solidFill>
                   </a:tcPr>
                 </a:tc>
@@ -7308,7 +8083,7 @@
                       <a:r>
                         <a:rPr lang="en-US" sz="1200" dirty="0">
                           <a:solidFill>
-                            <a:srgbClr val="1F1B18"/>
+                            <a:srgbClr val="4A3363"/>
                           </a:solidFill>
                         </a:rPr>
                         <a:t>70 568,60 € ✓</a:t>
@@ -7319,7 +8094,7 @@
                   <a:tcPr marL="91440" marR="91440" marT="45720" marB="45720">
                     <a:lnL w="6350" cap="flat" cmpd="sng" algn="ctr">
                       <a:solidFill>
-                        <a:srgbClr val="DEDAD4"/>
+                        <a:srgbClr val="E5D5C3"/>
                       </a:solidFill>
                       <a:prstDash val="solid"/>
                       <a:round/>
@@ -7328,7 +8103,7 @@
                     </a:lnL>
                     <a:lnR w="6350" cap="flat" cmpd="sng" algn="ctr">
                       <a:solidFill>
-                        <a:srgbClr val="DEDAD4"/>
+                        <a:srgbClr val="E5D5C3"/>
                       </a:solidFill>
                       <a:prstDash val="solid"/>
                       <a:round/>
@@ -7337,7 +8112,7 @@
                     </a:lnR>
                     <a:lnT w="6350" cap="flat" cmpd="sng" algn="ctr">
                       <a:solidFill>
-                        <a:srgbClr val="DEDAD4"/>
+                        <a:srgbClr val="E5D5C3"/>
                       </a:solidFill>
                       <a:prstDash val="solid"/>
                       <a:round/>
@@ -7346,7 +8121,7 @@
                     </a:lnT>
                     <a:lnB w="6350" cap="flat" cmpd="sng" algn="ctr">
                       <a:solidFill>
-                        <a:srgbClr val="DEDAD4"/>
+                        <a:srgbClr val="E5D5C3"/>
                       </a:solidFill>
                       <a:prstDash val="solid"/>
                       <a:round/>
@@ -7354,7 +8129,7 @@
                       <a:tailEnd type="none" w="med" len="med"/>
                     </a:lnB>
                     <a:solidFill>
-                      <a:srgbClr val="F7F5F2"/>
+                      <a:srgbClr val="F0E2CC"/>
                     </a:solidFill>
                   </a:tcPr>
                 </a:tc>
@@ -7371,7 +8146,7 @@
                       <a:r>
                         <a:rPr lang="en-US" sz="1200" dirty="0">
                           <a:solidFill>
-                            <a:srgbClr val="1F1B18"/>
+                            <a:srgbClr val="4A3363"/>
                           </a:solidFill>
                         </a:rPr>
                         <a:t>Vins premium</a:t>
@@ -7382,7 +8157,7 @@
                   <a:tcPr marL="91440" marR="91440" marT="45720" marB="45720">
                     <a:lnL w="6350" cap="flat" cmpd="sng" algn="ctr">
                       <a:solidFill>
-                        <a:srgbClr val="DEDAD4"/>
+                        <a:srgbClr val="E5D5C3"/>
                       </a:solidFill>
                       <a:prstDash val="solid"/>
                       <a:round/>
@@ -7391,7 +8166,7 @@
                     </a:lnL>
                     <a:lnR w="6350" cap="flat" cmpd="sng" algn="ctr">
                       <a:solidFill>
-                        <a:srgbClr val="DEDAD4"/>
+                        <a:srgbClr val="E5D5C3"/>
                       </a:solidFill>
                       <a:prstDash val="solid"/>
                       <a:round/>
@@ -7400,7 +8175,7 @@
                     </a:lnR>
                     <a:lnT w="6350" cap="flat" cmpd="sng" algn="ctr">
                       <a:solidFill>
-                        <a:srgbClr val="DEDAD4"/>
+                        <a:srgbClr val="E5D5C3"/>
                       </a:solidFill>
                       <a:prstDash val="solid"/>
                       <a:round/>
@@ -7409,7 +8184,7 @@
                     </a:lnT>
                     <a:lnB w="6350" cap="flat" cmpd="sng" algn="ctr">
                       <a:solidFill>
-                        <a:srgbClr val="DEDAD4"/>
+                        <a:srgbClr val="E5D5C3"/>
                       </a:solidFill>
                       <a:prstDash val="solid"/>
                       <a:round/>
@@ -7432,7 +8207,7 @@
                       <a:r>
                         <a:rPr lang="en-US" sz="1200" dirty="0">
                           <a:solidFill>
-                            <a:srgbClr val="1F1B18"/>
+                            <a:srgbClr val="4A3363"/>
                           </a:solidFill>
                         </a:rPr>
                         <a:t>30</a:t>
@@ -7443,7 +8218,7 @@
                   <a:tcPr marL="91440" marR="91440" marT="45720" marB="45720">
                     <a:lnL w="6350" cap="flat" cmpd="sng" algn="ctr">
                       <a:solidFill>
-                        <a:srgbClr val="DEDAD4"/>
+                        <a:srgbClr val="E5D5C3"/>
                       </a:solidFill>
                       <a:prstDash val="solid"/>
                       <a:round/>
@@ -7452,7 +8227,7 @@
                     </a:lnL>
                     <a:lnR w="6350" cap="flat" cmpd="sng" algn="ctr">
                       <a:solidFill>
-                        <a:srgbClr val="DEDAD4"/>
+                        <a:srgbClr val="E5D5C3"/>
                       </a:solidFill>
                       <a:prstDash val="solid"/>
                       <a:round/>
@@ -7461,7 +8236,7 @@
                     </a:lnR>
                     <a:lnT w="6350" cap="flat" cmpd="sng" algn="ctr">
                       <a:solidFill>
-                        <a:srgbClr val="DEDAD4"/>
+                        <a:srgbClr val="E5D5C3"/>
                       </a:solidFill>
                       <a:prstDash val="solid"/>
                       <a:round/>
@@ -7470,7 +8245,7 @@
                     </a:lnT>
                     <a:lnB w="6350" cap="flat" cmpd="sng" algn="ctr">
                       <a:solidFill>
-                        <a:srgbClr val="DEDAD4"/>
+                        <a:srgbClr val="E5D5C3"/>
                       </a:solidFill>
                       <a:prstDash val="solid"/>
                       <a:round/>
@@ -7493,7 +8268,7 @@
                       <a:r>
                         <a:rPr lang="en-US" sz="1200" dirty="0">
                           <a:solidFill>
-                            <a:srgbClr val="1F1B18"/>
+                            <a:srgbClr val="4A3363"/>
                           </a:solidFill>
                         </a:rPr>
                         <a:t>30 ✓</a:t>
@@ -7504,7 +8279,7 @@
                   <a:tcPr marL="91440" marR="91440" marT="45720" marB="45720">
                     <a:lnL w="6350" cap="flat" cmpd="sng" algn="ctr">
                       <a:solidFill>
-                        <a:srgbClr val="DEDAD4"/>
+                        <a:srgbClr val="E5D5C3"/>
                       </a:solidFill>
                       <a:prstDash val="solid"/>
                       <a:round/>
@@ -7513,7 +8288,7 @@
                     </a:lnL>
                     <a:lnR w="6350" cap="flat" cmpd="sng" algn="ctr">
                       <a:solidFill>
-                        <a:srgbClr val="DEDAD4"/>
+                        <a:srgbClr val="E5D5C3"/>
                       </a:solidFill>
                       <a:prstDash val="solid"/>
                       <a:round/>
@@ -7522,7 +8297,7 @@
                     </a:lnR>
                     <a:lnT w="6350" cap="flat" cmpd="sng" algn="ctr">
                       <a:solidFill>
-                        <a:srgbClr val="DEDAD4"/>
+                        <a:srgbClr val="E5D5C3"/>
                       </a:solidFill>
                       <a:prstDash val="solid"/>
                       <a:round/>
@@ -7531,7 +8306,7 @@
                     </a:lnT>
                     <a:lnB w="6350" cap="flat" cmpd="sng" algn="ctr">
                       <a:solidFill>
-                        <a:srgbClr val="DEDAD4"/>
+                        <a:srgbClr val="E5D5C3"/>
                       </a:solidFill>
                       <a:prstDash val="solid"/>
                       <a:round/>
@@ -7575,694 +8350,12 @@
             <a:r>
               <a:rPr lang="en-US" sz="1100" i="1" dirty="0">
                 <a:solidFill>
-                  <a:srgbClr val="5A5550"/>
+                  <a:srgbClr val="7A7085"/>
                 </a:solidFill>
               </a:rPr>
               <a:t>Chaque chiffre a été vérifié sur les données réelles avant intégration dans Kestra, puis confirmé en exécution</a:t>
             </a:r>
             <a:endParaRPr lang="en-US" sz="1100" dirty="0"/>
-          </a:p>
-        </p:txBody>
-      </p:sp>
-    </p:spTree>
-  </p:cSld>
-  <p:clrMapOvr>
-    <a:masterClrMapping/>
-  </p:clrMapOvr>
-</p:sld>
-</file>
-
-<file path=ppt/slides/slide8.xml><?xml version="1.0" encoding="utf-8"?>
-<p:sld xmlns:a="http://schemas.openxmlformats.org/drawingml/2006/main" xmlns:r="http://schemas.openxmlformats.org/officeDocument/2006/relationships" xmlns:p="http://schemas.openxmlformats.org/presentationml/2006/main">
-  <p:cSld name="Slide 8">
-    <p:bg>
-      <p:bgPr>
-        <a:solidFill>
-          <a:srgbClr val="FFFFFF"/>
-        </a:solidFill>
-      </p:bgPr>
-    </p:bg>
-    <p:spTree>
-      <p:nvGrpSpPr>
-        <p:cNvPr id="1" name=""/>
-        <p:cNvGrpSpPr/>
-        <p:nvPr/>
-      </p:nvGrpSpPr>
-      <p:grpSpPr>
-        <a:xfrm>
-          <a:off x="0" y="0"/>
-          <a:ext cx="0" cy="0"/>
-          <a:chOff x="0" y="0"/>
-          <a:chExt cx="0" cy="0"/>
-        </a:xfrm>
-      </p:grpSpPr>
-      <p:sp>
-        <p:nvSpPr>
-          <p:cNvPr id="2" name="Text 0"/>
-          <p:cNvSpPr/>
-          <p:nvPr/>
-        </p:nvSpPr>
-        <p:spPr>
-          <a:xfrm>
-            <a:off x="640080" y="457200"/>
-            <a:ext cx="10881360" cy="640080"/>
-          </a:xfrm>
-          <a:prstGeom prst="rect">
-            <a:avLst/>
-          </a:prstGeom>
-          <a:noFill/>
-          <a:ln/>
-        </p:spPr>
-        <p:txBody>
-          <a:bodyPr wrap="square" rtlCol="0" anchor="ctr"/>
-          <a:lstStyle/>
-          <a:p>
-            <a:pPr indent="0" marL="0">
-              <a:buNone/>
-            </a:pPr>
-            <a:r>
-              <a:rPr lang="en-US" sz="3000" b="1" dirty="0">
-                <a:solidFill>
-                  <a:srgbClr val="1F1B18"/>
-                </a:solidFill>
-                <a:latin typeface="Georgia" pitchFamily="34" charset="0"/>
-                <a:ea typeface="Georgia" pitchFamily="34" charset="-122"/>
-                <a:cs typeface="Georgia" pitchFamily="34" charset="-120"/>
-              </a:rPr>
-              <a:t>Défis techniques rencontrés</a:t>
-            </a:r>
-            <a:endParaRPr lang="en-US" sz="3000" dirty="0"/>
-          </a:p>
-        </p:txBody>
-      </p:sp>
-      <p:sp>
-        <p:nvSpPr>
-          <p:cNvPr id="3" name="Shape 1"/>
-          <p:cNvSpPr/>
-          <p:nvPr/>
-        </p:nvSpPr>
-        <p:spPr>
-          <a:xfrm>
-            <a:off x="640080" y="1371600"/>
-            <a:ext cx="5257800" cy="2103120"/>
-          </a:xfrm>
-          <a:prstGeom prst="rect">
-            <a:avLst/>
-          </a:prstGeom>
-          <a:solidFill>
-            <a:srgbClr val="F7F5F2"/>
-          </a:solidFill>
-          <a:ln/>
-        </p:spPr>
-      </p:sp>
-      <p:sp>
-        <p:nvSpPr>
-          <p:cNvPr id="4" name="Text 2"/>
-          <p:cNvSpPr/>
-          <p:nvPr/>
-        </p:nvSpPr>
-        <p:spPr>
-          <a:xfrm>
-            <a:off x="914400" y="1554480"/>
-            <a:ext cx="4709160" cy="457200"/>
-          </a:xfrm>
-          <a:prstGeom prst="rect">
-            <a:avLst/>
-          </a:prstGeom>
-          <a:noFill/>
-          <a:ln/>
-        </p:spPr>
-        <p:txBody>
-          <a:bodyPr wrap="square" rtlCol="0" anchor="ctr"/>
-          <a:lstStyle/>
-          <a:p>
-            <a:pPr indent="0" marL="0">
-              <a:buNone/>
-            </a:pPr>
-            <a:r>
-              <a:rPr lang="en-US" sz="1500" b="1" dirty="0">
-                <a:solidFill>
-                  <a:srgbClr val="6B1233"/>
-                </a:solidFill>
-              </a:rPr>
-              <a:t>Données hétérogènes</a:t>
-            </a:r>
-            <a:endParaRPr lang="en-US" sz="1500" dirty="0"/>
-          </a:p>
-        </p:txBody>
-      </p:sp>
-      <p:sp>
-        <p:nvSpPr>
-          <p:cNvPr id="5" name="Text 3"/>
-          <p:cNvSpPr/>
-          <p:nvPr/>
-        </p:nvSpPr>
-        <p:spPr>
-          <a:xfrm>
-            <a:off x="914400" y="2029968"/>
-            <a:ext cx="4709160" cy="1325880"/>
-          </a:xfrm>
-          <a:prstGeom prst="rect">
-            <a:avLst/>
-          </a:prstGeom>
-          <a:noFill/>
-          <a:ln/>
-        </p:spPr>
-        <p:txBody>
-          <a:bodyPr wrap="square" rtlCol="0" anchor="ctr"/>
-          <a:lstStyle/>
-          <a:p>
-            <a:pPr indent="0" marL="0">
-              <a:buNone/>
-            </a:pPr>
-            <a:r>
-              <a:rPr lang="en-US" sz="1050" dirty="0">
-                <a:solidFill>
-                  <a:srgbClr val="1F1B18"/>
-                </a:solidFill>
-              </a:rPr>
-              <a:t>Un produit « bon cadeau » avait un identifiant texte, pas numérique — corrigé en forcânt la lecture en texte puis reconversion ciblée (TRY_CAST)</a:t>
-            </a:r>
-            <a:endParaRPr lang="en-US" sz="1050" dirty="0"/>
-          </a:p>
-        </p:txBody>
-      </p:sp>
-      <p:sp>
-        <p:nvSpPr>
-          <p:cNvPr id="6" name="Shape 4"/>
-          <p:cNvSpPr/>
-          <p:nvPr/>
-        </p:nvSpPr>
-        <p:spPr>
-          <a:xfrm>
-            <a:off x="6172200" y="1371600"/>
-            <a:ext cx="5257800" cy="2103120"/>
-          </a:xfrm>
-          <a:prstGeom prst="rect">
-            <a:avLst/>
-          </a:prstGeom>
-          <a:solidFill>
-            <a:srgbClr val="F7F5F2"/>
-          </a:solidFill>
-          <a:ln/>
-        </p:spPr>
-      </p:sp>
-      <p:sp>
-        <p:nvSpPr>
-          <p:cNvPr id="7" name="Text 5"/>
-          <p:cNvSpPr/>
-          <p:nvPr/>
-        </p:nvSpPr>
-        <p:spPr>
-          <a:xfrm>
-            <a:off x="6446520" y="1554480"/>
-            <a:ext cx="4709160" cy="457200"/>
-          </a:xfrm>
-          <a:prstGeom prst="rect">
-            <a:avLst/>
-          </a:prstGeom>
-          <a:noFill/>
-          <a:ln/>
-        </p:spPr>
-        <p:txBody>
-          <a:bodyPr wrap="square" rtlCol="0" anchor="ctr"/>
-          <a:lstStyle/>
-          <a:p>
-            <a:pPr indent="0" marL="0">
-              <a:buNone/>
-            </a:pPr>
-            <a:r>
-              <a:rPr lang="en-US" sz="1500" b="1" dirty="0">
-                <a:solidFill>
-                  <a:srgbClr val="6B1233"/>
-                </a:solidFill>
-              </a:rPr>
-              <a:t>Dédoublonnage ambigu</a:t>
-            </a:r>
-            <a:endParaRPr lang="en-US" sz="1500" dirty="0"/>
-          </a:p>
-        </p:txBody>
-      </p:sp>
-      <p:sp>
-        <p:nvSpPr>
-          <p:cNvPr id="8" name="Text 6"/>
-          <p:cNvSpPr/>
-          <p:nvPr/>
-        </p:nvSpPr>
-        <p:spPr>
-          <a:xfrm>
-            <a:off x="6446520" y="2029968"/>
-            <a:ext cx="4709160" cy="1325880"/>
-          </a:xfrm>
-          <a:prstGeom prst="rect">
-            <a:avLst/>
-          </a:prstGeom>
-          <a:noFill/>
-          <a:ln/>
-        </p:spPr>
-        <p:txBody>
-          <a:bodyPr wrap="square" rtlCol="0" anchor="ctr"/>
-          <a:lstStyle/>
-          <a:p>
-            <a:pPr indent="0" marL="0">
-              <a:buNone/>
-            </a:pPr>
-            <a:r>
-              <a:rPr lang="en-US" sz="1050" dirty="0">
-                <a:solidFill>
-                  <a:srgbClr val="1F1B18"/>
-                </a:solidFill>
-              </a:rPr>
-              <a:t>Le fichier web contient 2 lignes par produit avec des chiffres de vente parfois différents — résolu en priorisant explicitement la ligne « product »</a:t>
-            </a:r>
-            <a:endParaRPr lang="en-US" sz="1050" dirty="0"/>
-          </a:p>
-        </p:txBody>
-      </p:sp>
-      <p:sp>
-        <p:nvSpPr>
-          <p:cNvPr id="9" name="Shape 7"/>
-          <p:cNvSpPr/>
-          <p:nvPr/>
-        </p:nvSpPr>
-        <p:spPr>
-          <a:xfrm>
-            <a:off x="640080" y="3749040"/>
-            <a:ext cx="5257800" cy="2103120"/>
-          </a:xfrm>
-          <a:prstGeom prst="rect">
-            <a:avLst/>
-          </a:prstGeom>
-          <a:solidFill>
-            <a:srgbClr val="F7F5F2"/>
-          </a:solidFill>
-          <a:ln/>
-        </p:spPr>
-      </p:sp>
-      <p:sp>
-        <p:nvSpPr>
-          <p:cNvPr id="10" name="Text 8"/>
-          <p:cNvSpPr/>
-          <p:nvPr/>
-        </p:nvSpPr>
-        <p:spPr>
-          <a:xfrm>
-            <a:off x="914400" y="3931920"/>
-            <a:ext cx="4709160" cy="457200"/>
-          </a:xfrm>
-          <a:prstGeom prst="rect">
-            <a:avLst/>
-          </a:prstGeom>
-          <a:noFill/>
-          <a:ln/>
-        </p:spPr>
-        <p:txBody>
-          <a:bodyPr wrap="square" rtlCol="0" anchor="ctr"/>
-          <a:lstStyle/>
-          <a:p>
-            <a:pPr indent="0" marL="0">
-              <a:buNone/>
-            </a:pPr>
-            <a:r>
-              <a:rPr lang="en-US" sz="1500" b="1" dirty="0">
-                <a:solidFill>
-                  <a:srgbClr val="6B1233"/>
-                </a:solidFill>
-              </a:rPr>
-              <a:t>Isolation des conteneurs</a:t>
-            </a:r>
-            <a:endParaRPr lang="en-US" sz="1500" dirty="0"/>
-          </a:p>
-        </p:txBody>
-      </p:sp>
-      <p:sp>
-        <p:nvSpPr>
-          <p:cNvPr id="11" name="Text 9"/>
-          <p:cNvSpPr/>
-          <p:nvPr/>
-        </p:nvSpPr>
-        <p:spPr>
-          <a:xfrm>
-            <a:off x="914400" y="4407408"/>
-            <a:ext cx="4709160" cy="1325880"/>
-          </a:xfrm>
-          <a:prstGeom prst="rect">
-            <a:avLst/>
-          </a:prstGeom>
-          <a:noFill/>
-          <a:ln/>
-        </p:spPr>
-        <p:txBody>
-          <a:bodyPr wrap="square" rtlCol="0" anchor="ctr"/>
-          <a:lstStyle/>
-          <a:p>
-            <a:pPr indent="0" marL="0">
-              <a:buNone/>
-            </a:pPr>
-            <a:r>
-              <a:rPr lang="en-US" sz="1050" dirty="0">
-                <a:solidFill>
-                  <a:srgbClr val="1F1B18"/>
-                </a:solidFill>
-              </a:rPr>
-              <a:t>Un script Python dans un conteneur Docker séparé ne partage pas automatiquement les fichiers du pipeline — intégration en cours de finalisation</a:t>
-            </a:r>
-            <a:endParaRPr lang="en-US" sz="1050" dirty="0"/>
-          </a:p>
-        </p:txBody>
-      </p:sp>
-      <p:sp>
-        <p:nvSpPr>
-          <p:cNvPr id="12" name="Shape 10"/>
-          <p:cNvSpPr/>
-          <p:nvPr/>
-        </p:nvSpPr>
-        <p:spPr>
-          <a:xfrm>
-            <a:off x="6172200" y="3749040"/>
-            <a:ext cx="5257800" cy="2103120"/>
-          </a:xfrm>
-          <a:prstGeom prst="rect">
-            <a:avLst/>
-          </a:prstGeom>
-          <a:solidFill>
-            <a:srgbClr val="F7F5F2"/>
-          </a:solidFill>
-          <a:ln/>
-        </p:spPr>
-      </p:sp>
-      <p:sp>
-        <p:nvSpPr>
-          <p:cNvPr id="13" name="Text 11"/>
-          <p:cNvSpPr/>
-          <p:nvPr/>
-        </p:nvSpPr>
-        <p:spPr>
-          <a:xfrm>
-            <a:off x="6446520" y="3931920"/>
-            <a:ext cx="4709160" cy="457200"/>
-          </a:xfrm>
-          <a:prstGeom prst="rect">
-            <a:avLst/>
-          </a:prstGeom>
-          <a:noFill/>
-          <a:ln/>
-        </p:spPr>
-        <p:txBody>
-          <a:bodyPr wrap="square" rtlCol="0" anchor="ctr"/>
-          <a:lstStyle/>
-          <a:p>
-            <a:pPr indent="0" marL="0">
-              <a:buNone/>
-            </a:pPr>
-            <a:r>
-              <a:rPr lang="en-US" sz="1500" b="1" dirty="0">
-                <a:solidFill>
-                  <a:srgbClr val="6B1233"/>
-                </a:solidFill>
-              </a:rPr>
-              <a:t>Robustesse</a:t>
-            </a:r>
-            <a:endParaRPr lang="en-US" sz="1500" dirty="0"/>
-          </a:p>
-        </p:txBody>
-      </p:sp>
-      <p:sp>
-        <p:nvSpPr>
-          <p:cNvPr id="14" name="Text 12"/>
-          <p:cNvSpPr/>
-          <p:nvPr/>
-        </p:nvSpPr>
-        <p:spPr>
-          <a:xfrm>
-            <a:off x="6446520" y="4407408"/>
-            <a:ext cx="4709160" cy="1325880"/>
-          </a:xfrm>
-          <a:prstGeom prst="rect">
-            <a:avLst/>
-          </a:prstGeom>
-          <a:noFill/>
-          <a:ln/>
-        </p:spPr>
-        <p:txBody>
-          <a:bodyPr wrap="square" rtlCol="0" anchor="ctr"/>
-          <a:lstStyle/>
-          <a:p>
-            <a:pPr indent="0" marL="0">
-              <a:buNone/>
-            </a:pPr>
-            <a:r>
-              <a:rPr lang="en-US" sz="1050" dirty="0">
-                <a:solidFill>
-                  <a:srgbClr val="1F1B18"/>
-                </a:solidFill>
-              </a:rPr>
-              <a:t>Chaque test utilise la fonction error() de DuckDB : un contrôle échoué fait échouer la tâche et peut déclencher une alerte, plutôt que de laisser passer une donnée invalide</a:t>
-            </a:r>
-            <a:endParaRPr lang="en-US" sz="1050" dirty="0"/>
-          </a:p>
-        </p:txBody>
-      </p:sp>
-    </p:spTree>
-  </p:cSld>
-  <p:clrMapOvr>
-    <a:masterClrMapping/>
-  </p:clrMapOvr>
-</p:sld>
-</file>
-
-<file path=ppt/slides/slide9.xml><?xml version="1.0" encoding="utf-8"?>
-<p:sld xmlns:a="http://schemas.openxmlformats.org/drawingml/2006/main" xmlns:r="http://schemas.openxmlformats.org/officeDocument/2006/relationships" xmlns:p="http://schemas.openxmlformats.org/presentationml/2006/main">
-  <p:cSld name="Slide 9">
-    <p:bg>
-      <p:bgPr>
-        <a:solidFill>
-          <a:srgbClr val="1F1B18"/>
-        </a:solidFill>
-      </p:bgPr>
-    </p:bg>
-    <p:spTree>
-      <p:nvGrpSpPr>
-        <p:cNvPr id="1" name=""/>
-        <p:cNvGrpSpPr/>
-        <p:nvPr/>
-      </p:nvGrpSpPr>
-      <p:grpSpPr>
-        <a:xfrm>
-          <a:off x="0" y="0"/>
-          <a:ext cx="0" cy="0"/>
-          <a:chOff x="0" y="0"/>
-          <a:chExt cx="0" cy="0"/>
-        </a:xfrm>
-      </p:grpSpPr>
-      <p:sp>
-        <p:nvSpPr>
-          <p:cNvPr id="2" name="Text 0"/>
-          <p:cNvSpPr/>
-          <p:nvPr/>
-        </p:nvSpPr>
-        <p:spPr>
-          <a:xfrm>
-            <a:off x="640080" y="548640"/>
-            <a:ext cx="10881360" cy="640080"/>
-          </a:xfrm>
-          <a:prstGeom prst="rect">
-            <a:avLst/>
-          </a:prstGeom>
-          <a:noFill/>
-          <a:ln/>
-        </p:spPr>
-        <p:txBody>
-          <a:bodyPr wrap="square" rtlCol="0" anchor="ctr"/>
-          <a:lstStyle/>
-          <a:p>
-            <a:pPr indent="0" marL="0">
-              <a:buNone/>
-            </a:pPr>
-            <a:r>
-              <a:rPr lang="en-US" sz="3000" b="1" dirty="0">
-                <a:solidFill>
-                  <a:srgbClr val="B8862B"/>
-                </a:solidFill>
-                <a:latin typeface="Georgia" pitchFamily="34" charset="0"/>
-                <a:ea typeface="Georgia" pitchFamily="34" charset="-122"/>
-                <a:cs typeface="Georgia" pitchFamily="34" charset="-120"/>
-              </a:rPr>
-              <a:t>Pistes d'amélioration</a:t>
-            </a:r>
-            <a:endParaRPr lang="en-US" sz="3000" dirty="0"/>
-          </a:p>
-        </p:txBody>
-      </p:sp>
-      <p:sp>
-        <p:nvSpPr>
-          <p:cNvPr id="3" name="Text 1"/>
-          <p:cNvSpPr/>
-          <p:nvPr/>
-        </p:nvSpPr>
-        <p:spPr>
-          <a:xfrm>
-            <a:off x="731520" y="1554480"/>
-            <a:ext cx="10058400" cy="2377440"/>
-          </a:xfrm>
-          <a:prstGeom prst="rect">
-            <a:avLst/>
-          </a:prstGeom>
-          <a:noFill/>
-          <a:ln/>
-        </p:spPr>
-        <p:txBody>
-          <a:bodyPr wrap="square" rtlCol="0" anchor="ctr"/>
-          <a:lstStyle/>
-          <a:p>
-            <a:pPr marL="342900" indent="-342900">
-              <a:spcAft>
-                <a:spcPts val="1800"/>
-              </a:spcAft>
-              <a:buSzPct val="100000"/>
-              <a:buChar char="•"/>
-            </a:pPr>
-            <a:r>
-              <a:rPr lang="en-US" sz="1600" dirty="0">
-                <a:solidFill>
-                  <a:srgbClr val="FFFFFF"/>
-                </a:solidFill>
-              </a:rPr>
-              <a:t>Paralléliser les 3 nettoyages (erp/web/liaison) pour réduire le temps d'exécution
-</a:t>
-            </a:r>
-            <a:endParaRPr lang="en-US" sz="1600" dirty="0"/>
-          </a:p>
-          <a:p>
-            <a:pPr marL="342900" indent="-342900">
-              <a:spcAft>
-                <a:spcPts val="1800"/>
-              </a:spcAft>
-              <a:buSzPct val="100000"/>
-              <a:buChar char="•"/>
-            </a:pPr>
-            <a:r>
-              <a:rPr lang="en-US" sz="1600" dirty="0">
-                <a:solidFill>
-                  <a:srgbClr val="FFFFFF"/>
-                </a:solidFill>
-              </a:rPr>
-              <a:t>Finaliser l'intégration du script Python z-score dans le conteneur isolé
-</a:t>
-            </a:r>
-            <a:endParaRPr lang="en-US" sz="1600" dirty="0"/>
-          </a:p>
-          <a:p>
-            <a:pPr marL="342900" indent="-342900">
-              <a:spcAft>
-                <a:spcPts val="1800"/>
-              </a:spcAft>
-              <a:buSzPct val="100000"/>
-              <a:buChar char="•"/>
-            </a:pPr>
-            <a:r>
-              <a:rPr lang="en-US" sz="1600" dirty="0">
-                <a:solidFill>
-                  <a:srgbClr val="FFFFFF"/>
-                </a:solidFill>
-              </a:rPr>
-              <a:t>Ajouter une notification (email/Slack) automatique en cas d'échec d'un test
-</a:t>
-            </a:r>
-            <a:endParaRPr lang="en-US" sz="1600" dirty="0"/>
-          </a:p>
-          <a:p>
-            <a:pPr marL="342900" indent="-342900">
-              <a:spcAft>
-                <a:spcPts val="1800"/>
-              </a:spcAft>
-              <a:buSzPct val="100000"/>
-              <a:buChar char="•"/>
-            </a:pPr>
-            <a:r>
-              <a:rPr lang="en-US" sz="1600" dirty="0">
-                <a:solidFill>
-                  <a:srgbClr val="FFFFFF"/>
-                </a:solidFill>
-              </a:rPr>
-              <a:t>Historiser les chiffres de contrôle mois par mois pour détecter des anomalies</a:t>
-            </a:r>
-            <a:endParaRPr lang="en-US" sz="1600" dirty="0"/>
-          </a:p>
-        </p:txBody>
-      </p:sp>
-      <p:sp>
-        <p:nvSpPr>
-          <p:cNvPr id="4" name="Text 2"/>
-          <p:cNvSpPr/>
-          <p:nvPr/>
-        </p:nvSpPr>
-        <p:spPr>
-          <a:xfrm>
-            <a:off x="731520" y="5120640"/>
-            <a:ext cx="7315200" cy="640080"/>
-          </a:xfrm>
-          <a:prstGeom prst="rect">
-            <a:avLst/>
-          </a:prstGeom>
-          <a:noFill/>
-          <a:ln/>
-        </p:spPr>
-        <p:txBody>
-          <a:bodyPr wrap="square" rtlCol="0" anchor="ctr"/>
-          <a:lstStyle/>
-          <a:p>
-            <a:pPr indent="0" marL="0">
-              <a:buNone/>
-            </a:pPr>
-            <a:r>
-              <a:rPr lang="en-US" sz="2400" b="1" dirty="0">
-                <a:solidFill>
-                  <a:srgbClr val="B8862B"/>
-                </a:solidFill>
-                <a:latin typeface="Georgia" pitchFamily="34" charset="0"/>
-                <a:ea typeface="Georgia" pitchFamily="34" charset="-122"/>
-                <a:cs typeface="Georgia" pitchFamily="34" charset="-120"/>
-              </a:rPr>
-              <a:t>Merci de votre attention</a:t>
-            </a:r>
-            <a:endParaRPr lang="en-US" sz="2400" dirty="0"/>
-          </a:p>
-        </p:txBody>
-      </p:sp>
-      <p:sp>
-        <p:nvSpPr>
-          <p:cNvPr id="5" name="Text 3"/>
-          <p:cNvSpPr/>
-          <p:nvPr/>
-        </p:nvSpPr>
-        <p:spPr>
-          <a:xfrm>
-            <a:off x="731520" y="5760720"/>
-            <a:ext cx="5486400" cy="457200"/>
-          </a:xfrm>
-          <a:prstGeom prst="rect">
-            <a:avLst/>
-          </a:prstGeom>
-          <a:noFill/>
-          <a:ln/>
-        </p:spPr>
-        <p:txBody>
-          <a:bodyPr wrap="square" rtlCol="0" anchor="ctr"/>
-          <a:lstStyle/>
-          <a:p>
-            <a:pPr indent="0" marL="0">
-              <a:buNone/>
-            </a:pPr>
-            <a:r>
-              <a:rPr lang="en-US" sz="1600" dirty="0">
-                <a:solidFill>
-                  <a:srgbClr val="FFFFFF"/>
-                </a:solidFill>
-              </a:rPr>
-              <a:t>Questions ?</a:t>
-            </a:r>
-            <a:endParaRPr lang="en-US" sz="1600" dirty="0"/>
           </a:p>
         </p:txBody>
       </p:sp>

--- a/bottleneck_presentation.pptx
+++ b/bottleneck_presentation.pptx
@@ -2371,7 +2371,7 @@
                   <a:srgbClr val="4A3363"/>
                 </a:solidFill>
               </a:rPr>
-              <a:t>Impossible de faire lire au Switch une valeur calculée par un script — résolu en réutilisant le même mécanisme que pour les tests (error() + état de la tâche), plutôt qu'une nouvelle approche plus fragile</a:t>
+              <a:t>Impossible de faire lire au Switch une valeur calculée directement — résolu en séparant comptage (toujours réussi) et vérification (échoue si zéro), le Switch lisant l'état de la vérification</a:t>
             </a:r>
             <a:endParaRPr lang="en-US" sz="1050" dirty="0"/>
           </a:p>
@@ -5014,7 +5014,7 @@
             <a:r>
               <a:rPr lang="en-US" sz="1000" b="1" dirty="0">
                 <a:solidFill>
-                  <a:srgbClr val="FFFFFF"/>
+                  <a:srgbClr val="4A3363"/>
                 </a:solidFill>
               </a:rPr>
               <a:t>Rapport CA</a:t>
@@ -5028,7 +5028,7 @@
             <a:r>
               <a:rPr lang="en-US" sz="1000" b="1" dirty="0">
                 <a:solidFill>
-                  <a:srgbClr val="FFFFFF"/>
+                  <a:srgbClr val="4A3363"/>
                 </a:solidFill>
               </a:rPr>
               <a:t>(.xlsx)</a:t>
@@ -5091,7 +5091,7 @@
             <a:r>
               <a:rPr lang="en-US" sz="1000" b="1" dirty="0">
                 <a:solidFill>
-                  <a:srgbClr val="FFFFFF"/>
+                  <a:srgbClr val="4A3363"/>
                 </a:solidFill>
               </a:rPr>
               <a:t>Vins premium</a:t>
@@ -5105,7 +5105,7 @@
             <a:r>
               <a:rPr lang="en-US" sz="1000" b="1" dirty="0">
                 <a:solidFill>
-                  <a:srgbClr val="FFFFFF"/>
+                  <a:srgbClr val="4A3363"/>
                 </a:solidFill>
               </a:rPr>
               <a:t>(.csv)</a:t>
@@ -5168,7 +5168,7 @@
             <a:r>
               <a:rPr lang="en-US" sz="1000" b="1" dirty="0">
                 <a:solidFill>
-                  <a:srgbClr val="FFFFFF"/>
+                  <a:srgbClr val="4A3363"/>
                 </a:solidFill>
               </a:rPr>
               <a:t>Vins ordinaires</a:t>
@@ -5182,7 +5182,7 @@
             <a:r>
               <a:rPr lang="en-US" sz="1000" b="1" dirty="0">
                 <a:solidFill>
-                  <a:srgbClr val="FFFFFF"/>
+                  <a:srgbClr val="4A3363"/>
                 </a:solidFill>
               </a:rPr>
               <a:t>(.csv)</a:t>
@@ -5696,7 +5696,7 @@
                   <a:srgbClr val="4A3363"/>
                 </a:solidFill>
               </a:rPr>
-              <a:t>Un branchement conditionnel vérifie si des vins premium sont détectés : si oui, extraction des deux catégories ; sinon, extraction des ordinaires seuls + alerte</a:t>
+              <a:t>Un comptage des vins premium détectés décide du chemin : s'il y en a au moins un, extraction des deux catégories ; sinon, extraction des ordinaires seuls + alerte</a:t>
             </a:r>
             <a:endParaRPr lang="en-US" sz="1150" dirty="0"/>
           </a:p>
@@ -5811,7 +5811,7 @@
       </p:sp>
       <p:pic>
         <p:nvPicPr>
-          <p:cNvPr id="4" name="Image 0" descr="/home/claude/pptx_work2/topology_new.png">    </p:cNvPr>
+          <p:cNvPr id="4" name="Image 0" descr="/home/claude/pptx_work3/topology_new.png">    </p:cNvPr>
           <p:cNvPicPr>
             <a:picLocks noChangeAspect="1"/>
           </p:cNvPicPr>
@@ -5942,7 +5942,7 @@
       </p:sp>
       <p:pic>
         <p:nvPicPr>
-          <p:cNvPr id="4" name="Image 0" descr="/home/claude/pptx_work2/gantt_new.png">    </p:cNvPr>
+          <p:cNvPr id="4" name="Image 0" descr="/home/claude/pptx_work3/gantt_new.png">    </p:cNvPr>
           <p:cNvPicPr>
             <a:picLocks noChangeAspect="1"/>
           </p:cNvPicPr>
@@ -6084,7 +6084,7 @@
             <a:r>
               <a:rPr lang="en-US" sz="1400" b="1" dirty="0">
                 <a:solidFill>
-                  <a:srgbClr val="FFFFFF"/>
+                  <a:srgbClr val="4A3363"/>
                 </a:solidFill>
               </a:rPr>
               <a:t>✓</a:t>
@@ -6214,7 +6214,7 @@
             <a:r>
               <a:rPr lang="en-US" sz="1400" b="1" dirty="0">
                 <a:solidFill>
-                  <a:srgbClr val="FFFFFF"/>
+                  <a:srgbClr val="4A3363"/>
                 </a:solidFill>
               </a:rPr>
               <a:t>✓</a:t>
@@ -6344,7 +6344,7 @@
             <a:r>
               <a:rPr lang="en-US" sz="1400" b="1" dirty="0">
                 <a:solidFill>
-                  <a:srgbClr val="FFFFFF"/>
+                  <a:srgbClr val="4A3363"/>
                 </a:solidFill>
               </a:rPr>
               <a:t>✓</a:t>
@@ -6474,7 +6474,7 @@
             <a:r>
               <a:rPr lang="en-US" sz="1400" b="1" dirty="0">
                 <a:solidFill>
-                  <a:srgbClr val="FFFFFF"/>
+                  <a:srgbClr val="4A3363"/>
                 </a:solidFill>
               </a:rPr>
               <a:t>✓</a:t>
@@ -6604,7 +6604,7 @@
             <a:r>
               <a:rPr lang="en-US" sz="1400" b="1" dirty="0">
                 <a:solidFill>
-                  <a:srgbClr val="FFFFFF"/>
+                  <a:srgbClr val="4A3363"/>
                 </a:solidFill>
               </a:rPr>
               <a:t>✓</a:t>

--- a/bottleneck_presentation.pptx
+++ b/bottleneck_presentation.pptx
@@ -5696,7 +5696,7 @@
                   <a:srgbClr val="4A3363"/>
                 </a:solidFill>
               </a:rPr>
-              <a:t>Un comptage des vins premium détectés décide du chemin : s'il y en a au moins un, extraction des deux catégories ; sinon, extraction des ordinaires seuls + alerte</a:t>
+              <a:t>Une tâche de comptage (toujours en succès) puis une tâche de vérification dédiée décident du chemin : s'il y a au moins un vin premium, extraction des deux catégories ; sinon, extraction des ordinaires seuls + alerte</a:t>
             </a:r>
             <a:endParaRPr lang="en-US" sz="1150" dirty="0"/>
           </a:p>
